--- a/docs/deck/courtside.pptx
+++ b/docs/deck/courtside.pptx
@@ -2257,7 +2257,7 @@
           </a:p>
           <a:p>
             <a:r>
-              <a:t>[Sources: HYPOTHESIS.md (commit 7232986; H1–H4); DEVIATIONS.md D3, D5 (H5, H6 after in-sample); results/oos_peeks.log (3 looks: v1 10:42 UTC, v2 13:24, v2-causal 13:53); DEVIATIONS.md D9 and HYPOTHESIS_V2.md A1 (81%); docs/NOTE.md Table 1 and sections 4 and 5; research/v2/livefill/RESULTS.md (36% within 60 s); research/v2/crossmarket/RESULTS.md (sniping +0.93¢ [−2.8, 4.7], $472 over six months; leaning maker ~$2.1k per 30 days); docs/DEVPOST.md Challenges.]</a:t>
+              <a:t>[Sources: HYPOTHESIS.md (commit 7232986; H1–H4); DEVIATIONS.md D3, D5 (H5, H6 after in-sample); results/oos_peeks.log (3 looks: v1 10:42 UTC, v2 13:24, v2-causal 13:53); DEVIATIONS.md D9 and HYPOTHESIS_V2.md A1 (81%); docs/NOTE.md Table 1 and sections 4 and 5; research/v2/livefill/RESULTS.md (35% within 60 s); research/v2/crossmarket/RESULTS.md (sniping +0.93¢ [−2.8, 4.7], $472 over six months; leaning maker ~$2.1k per 30 days); docs/DEVPOST.md Challenges.]</a:t>
             </a:r>
           </a:p>
         </p:txBody>

--- a/docs/deck/courtside.pptx
+++ b/docs/deck/courtside.pptx
@@ -35,6 +35,7 @@
     <p:sldId id="283" r:id="rId35"/>
     <p:sldId id="284" r:id="rId36"/>
     <p:sldId id="285" r:id="rId37"/>
+    <p:sldId id="286" r:id="rId38"/>
   </p:sldIdLst>
   <p:sldSz cx="12192000" cy="6858000" type="screen4x3"/>
   <p:notesSz cx="6858000" cy="9144000"/>
@@ -176,6 +177,7 @@
             <p14:sldId id="283"/>
             <p14:sldId id="284"/>
             <p14:sldId id="285"/>
+            <p14:sldId id="286"/>
           </p14:sldIdLst>
         </p14:section>
       </p14:sectionLst>
@@ -2055,7 +2057,7 @@
           <a:p/>
           <a:p>
             <a:r>
-              <a:t>Every tennis point moves a prediction market: on average about 5.7% of a player's fair value per point.</a:t>
+              <a:t>Every tennis point moves a prediction market: on average a one-dollar share moves about 2.6¢ per point, and the point is worth a 5.7¢ swing between winning and losing it.</a:t>
             </a:r>
           </a:p>
           <a:p/>
@@ -2159,13 +2161,18 @@
           <a:p/>
           <a:p>
             <a:r>
-              <a:t>One command reproduces every number from public data: bash reproduce.sh. The repo is public, the failures are in it, and the blind forward test runs once tomorrow. Thank you.</a:t>
+              <a:t>The code is public and the failures are in it. bash run.sh replay reruns the paper engine on recorded books in seconds; bash run.sh data, then bash run.sh reproduce, rebuilds every table and figure from public data in one to two hours. The blind forward test runs once, planned for 2026-10-04 11:30 UTC. Thank you.</a:t>
             </a:r>
           </a:p>
           <a:p/>
           <a:p>
             <a:r>
-              <a:t>[Status at build time: forward test pending; live session QUOTING (paper).]</a:t>
+              <a:t>[Status at build time: forward test pending; live session warming up (started 2026-10-03 20:48 UTC).]</a:t>
+            </a:r>
+          </a:p>
+          <a:p>
+            <a:r>
+              <a:t>[If asked about reproducing the CV calls: the frozen call model (models/vision/frozen_call_model.pkl) is not in git; hpg/engine_vision.sbatch rebuilds it on HiPerGator.]</a:t>
             </a:r>
           </a:p>
         </p:txBody>
@@ -2368,12 +2375,12 @@
           </a:p>
           <a:p>
             <a:r>
-              <a:t>- The forward window is run once, tomorrow, and reported either way.</a:t>
-            </a:r>
-          </a:p>
-          <a:p>
-            <a:r>
-              <a:t>- All 45 looks at held-out data are in results/oos_peeks.log.</a:t>
+              <a:t>- The forward window is run once, planned for 2026-10-04 11:30 UTC, and reported either way.</a:t>
+            </a:r>
+          </a:p>
+          <a:p>
+            <a:r>
+              <a:t>- All 65 looks at held-out data are in results/oos_peeks.log.</a:t>
             </a:r>
           </a:p>
           <a:p/>
@@ -2867,7 +2874,7 @@
           <a:lstStyle/>
           <a:p>
             <a:r>
-              <a:t>BACKUP Q7: You tried 3,386 or more variants. Why isn't this the luckiest draw?</a:t>
+              <a:t>BACKUP Q7: You tried 3,410 or more variants. Why isn't this the luckiest draw?</a:t>
             </a:r>
           </a:p>
           <a:p/>
@@ -2878,17 +2885,17 @@
           </a:p>
           <a:p>
             <a:r>
-              <a:t>- Every variant is counted and reported: N = 3,386.</a:t>
-            </a:r>
-          </a:p>
-          <a:p>
-            <a:r>
-              <a:t>- In sample the deflated Sharpe at that N is 1.00, even with the most conservative variance.</a:t>
-            </a:r>
-          </a:p>
-          <a:p>
-            <a:r>
-              <a:t>- On the 40-day burned OOS it is 0.481 at N = 44 and 0.075 at N = 3,386. 40 days cannot rule out luck at the full trial count, and we say that.</a:t>
+              <a:t>- Every variant is counted and reported: N = 3,410.</a:t>
+            </a:r>
+          </a:p>
+          <a:p>
+            <a:r>
+              <a:t>- In sample the deflated Sharpe at that N is 0.997, even with the most conservative variance.</a:t>
+            </a:r>
+          </a:p>
+          <a:p>
+            <a:r>
+              <a:t>- On the 40-day burned OOS it is 0.481 at N = 44 and 0.075 at N = 3,410. 40 days cannot rule out luck at the full trial count, and we say that.</a:t>
             </a:r>
           </a:p>
           <a:p>
@@ -2974,7 +2981,7 @@
           <a:lstStyle/>
           <a:p>
             <a:r>
-              <a:t>BACKUP Q8: Your OOS is 20% of matches but only 39 of 360 days, and your universe keeps matches with at least $5k of lifetime volume, which you only know afterwards. Isn't that survivorship and lookahead?</a:t>
+              <a:t>BACKUP Q8: Your OOS is 20% of matches but only 38.7 of 360 days, and your universe keeps matches with at least $5k of lifetime volume, which you only know afterwards. Isn't that survivorship and lookahead?</a:t>
             </a:r>
           </a:p>
           <a:p/>
@@ -2985,7 +2992,7 @@
           </a:p>
           <a:p>
             <a:r>
-              <a:t>- We read “20%” as a share of observations: 2,617 of 13,084 matches, 21% of volume. By calendar time it is 39 of 360 days; a time-based 20% would start 2026-07-23.</a:t>
+              <a:t>- We read “20%” as a share of observations: 2,617 of 13,084 matches, 21% of volume. By calendar time it is 38.7 of 360 days (40 UTC dates, the count slides 5 and 6 use); a time-based 20% would start 2026-07-23.</a:t>
             </a:r>
           </a:p>
           <a:p>
@@ -3196,10 +3203,15 @@
           <a:p/>
           <a:p>
             <a:r>
-              <a:t>Over a match a one-dollar share's fair value travels $4.2 in total. Whoever trades on an older tier sells to someone faster. The venue admits it: it holds every marketable order 1 s so makers can reprice, and charges takers 5% times p(1−p).</a:t>
+              <a:t>Over a match a one-dollar share's fair value travels $4.2 in total, about 2.6¢ per point. Whoever trades on an older tier sells to someone faster. The venue admits it: it holds every marketable order 1 s so makers can reprice, and charges takers 5% times p(1−p).</a:t>
             </a:r>
           </a:p>
           <a:p/>
+          <a:p>
+            <a:r>
+              <a:t>[If asked how ESPN's lag was measured: we bought no official ATP/WTA data feed and no trading result uses one; the free WTA website and ESPN scoreboard were recorded on 2026-10-03 only to time their lag (research/v2/latency/RESULTS.md).]</a:t>
+            </a:r>
+          </a:p>
           <a:p>
             <a:r>
               <a:t>[If asked about the clocks: the WTA stamp is the public point log, 1 s resolution, read after the fact; its lag to the bounce (≈3.1 s) is an inference from fast-tier prints, not a measurement. ATP has no public official point clock.]</a:t>
@@ -3298,7 +3310,7 @@
           </a:p>
           <a:p>
             <a:r>
-              <a:t>- The contribution is the time budget: where a lead comes from (frame rate, cameras, being in the venue) and what it costs in latency (~100 ms per call on a laptop).</a:t>
+              <a:t>- The contribution is the time budget: where a lead comes from (frame rate, cameras, being in the venue) and what it costs in latency (~158 ms per call on a laptop).</a:t>
             </a:r>
           </a:p>
           <a:p>
@@ -3496,19 +3508,29 @@
           <a:p/>
           <a:p>
             <a:r>
-              <a:t>Our tracker finds the ball within five pixels on 97.7% of labelled held-out frames. The frozen call model, scored once on held-out games, made 11/11 correct miss calls fifty milliseconds before contact. It is conservative: it called 11 of 41 misses, recall 27%, and with that sample the lower bound on precision is 74%.</a:t>
+              <a:t>Our tracker finds the ball within five pixels on 94.0% of labelled held-out frames. The frozen call model, scored once on held-out games, made 11/11 correct miss calls fifty milliseconds before contact. It is conservative: it called 11 of 41 misses, recall 27%, and with that sample the lower bound on precision is 74%.</a:t>
             </a:r>
           </a:p>
           <a:p/>
           <a:p>
             <a:r>
-              <a:t>The engine runs it as a stream: about 100 ms per call on a laptop. The lead comes from frame rate and cameras, so it lives in the venue.</a:t>
+              <a:t>The engine runs it as a stream: about 158 ms per call on a laptop. The lead comes from frame rate and cameras, so it lives in the venue.</a:t>
             </a:r>
           </a:p>
           <a:p/>
           <a:p>
             <a:r>
-              <a:t>[If asked about the laptop: it sustains 51 fps, not 120, under load; HiPerGator GPU timing is in hpg/engine_vision.sbatch. Footage credit: OpenTTGames, CC BY-NC-SA 4.0 (non-commercial; credited on the slide).]</a:t>
+              <a:t>[If asked about the laptop: it sustains 51 fps, not 120, under load; HiPerGator GPU timing is in hpg/engine_vision.sbatch. Footage credit: OpenTTGames, adapted (overlays added), CC BY-NC-SA 4.0 (non-commercial; credited on the slide).]</a:t>
+            </a:r>
+          </a:p>
+          <a:p>
+            <a:r>
+              <a:t>[If asked about the video's 408 ms call: it is the longest call on held-out games; the online rule's median lead is 25 ms.]</a:t>
+            </a:r>
+          </a:p>
+          <a:p>
+            <a:r>
+              <a:t>[Reproducing the calls needs models/vision/frozen_call_model.pkl, which is not in git; hpg/engine_vision.sbatch rebuilds it.]</a:t>
             </a:r>
           </a:p>
           <a:p>
@@ -3607,7 +3629,7 @@
           <a:p/>
           <a:p>
             <a:r>
-              <a:t>The blind forward test runs once tomorrow; it is pending and will be reported either way.</a:t>
+              <a:t>The blind forward test runs once, planned for 2026-10-04 11:30 UTC; at build time it is pending, and it will be reported either way.</a:t>
             </a:r>
           </a:p>
           <a:p/>
@@ -3694,25 +3716,31 @@
           <a:p/>
           <a:p>
             <a:r>
-              <a:t>We tried 3,386 variants, and we count all of them. In sample the deflated Sharpe is 1.00. On the burned 40 days it is 0.075 at the full trial count: 40 days cannot rule out luck, and we say that. Overfitting probability on our risk grid: 15.4%.</a:t>
+              <a:t>We tried 3,410 variants, and we count all of them. In sample the deflated Sharpe is 0.997. On the burned 40 days it is 0.075 at the full trial count: 40 days cannot rule out luck, and we say that. Overfitting probability on our risk grid: 15.4%.</a:t>
             </a:r>
           </a:p>
           <a:p/>
           <a:p>
             <a:r>
-              <a:t>Then the blind tests, which we could not tune. Run frozen on markets we had never opened, v2 passed in the in-sample period and failed out of sample: its interval includes zero. Our side-market maker, pre-registered, failed its blind test. Table tennis has no fast tier at all. Fees doubled: negative.</a:t>
+              <a:t>Then the blind tests, which we could not tune. Run frozen on markets we had never opened, v2 passed in the in-sample period and failed out of sample: its interval includes zero. Our side-market maker, pre-registered, failed its blind test. The frozen tier-0 v3 counterfactual failed its blind tests on unseen markets in both periods, and its burned out-of-sample run failed too because the interval includes zero. In table tennis we detected no fast tier. Fees doubled: negative.</a:t>
             </a:r>
           </a:p>
           <a:p/>
           <a:p>
             <a:r>
-              <a:t>The one clean test left is the forward run tomorrow. 45 lines in the peek log show every time we looked.</a:t>
+              <a:t>The one clean test left is the forward run, planned for 2026-10-04 11:30 UTC. Every look is logged (65 lines in the peek log at build time).</a:t>
             </a:r>
           </a:p>
           <a:p/>
           <a:p>
             <a:r>
-              <a:t>[Sources: results/rigor/rigor.json (psr_dsr, pbo_cscv, bootstrap); results/expand/results.json primary; results/maker/oos.json primary; results/tt/results.json TT1-TT3; results/v2/cost_stress.json; results/oos_peeks.log.]</a:t>
+              <a:t>[NOTE section 8 counts 3,386 trials; the deck and video deflate at N = 3,410, which adds the 24-variant v2-safe grid. DSR is the lowest across the variance sources (dsr_min).]</a:t>
+            </a:r>
+          </a:p>
+          <a:p/>
+          <a:p>
+            <a:r>
+              <a:t>[Sources: results/rigor/rigor.json (psr_dsr, pbo_cscv, bootstrap); results/expand/results.json primary; results/maker/oos.json primary; results/tier0_v3/blind.json (tier-0 v3, counterfactual); results/tt/results.json TT1-TT3; results/v2/cost_stress.json; results/oos_peeks.log.]</a:t>
             </a:r>
           </a:p>
         </p:txBody>
@@ -3788,7 +3816,7 @@
           <a:p/>
           <a:p>
             <a:r>
-              <a:t>What would calling the point first buy? We cannot buy a licensed live feed or put a camera courtside, so this slide carries the label COUNTERFACTUAL: assumes a licensed live feed + courtside camera (not purchased); parameters measured. No live ATP or WTA data was used.</a:t>
+              <a:t>What would calling the point first buy? We cannot buy a licensed live feed or put a camera courtside, so this slide carries the label COUNTERFACTUAL: assumes a licensed live feed + courtside camera (not purchased); parameters measured. We bought no official ATP/WTA data feed and no result here uses one.</a:t>
             </a:r>
           </a:p>
           <a:p/>
@@ -3800,24 +3828,30 @@
           <a:p/>
           <a:p>
             <a:r>
-              <a:t>The chart is the honest part: profit depends on how long after the bounce the book reprices, which nobody publishes. Under one reading of the clocks, below 1.1 s it is negative.</a:t>
+              <a:t>The chart is the honest part: profit depends on how long after the bounce the book reprices, which nobody publishes. Under one reading of the clocks, below 1.1 s it is negative, and our pre-registered estimate, 0.68 s, falls in that zone.</a:t>
             </a:r>
           </a:p>
           <a:p/>
           <a:p>
             <a:r>
+              <a:t>Then we froze a third version and tested it blind: on unseen markets it earned −0.22¢ and −0.52¢ a share (FAIL), and on the burned window +0.68¢ with an interval that includes zero (FAIL). A frozen version failed its blind tests.</a:t>
+            </a:r>
+          </a:p>
+          <a:p/>
+          <a:p>
+            <a:r>
               <a:t>And at today's costs it does not pay for the feed licence and the camera. The value of the CV is the time budget it measures, not a P&amp;L we can bank.</a:t>
             </a:r>
           </a:p>
           <a:p/>
           <a:p>
             <a:r>
-              <a:t>[Second-round verification of this counterfactual is running separately (results/tier0_v3); the headline here is results/tier0/results.json "headline", marked VERIFIED.]</a:t>
-            </a:r>
-          </a:p>
-          <a:p>
-            <a:r>
-              <a:t>[Sources: results/tier0/results.json headline, timing, pnl_vs_t_reprice_minus_t_bounce; results/financials/financials.json Tier-0 rows.]</a:t>
+              <a:t>[The headline here is results/tier0/results.json "headline", marked VERIFIED; the frozen v3 blind tests are results/tier0_v3/blind.json (research/v2/tier0_v3/TEST_RESULTS.md).]</a:t>
+            </a:r>
+          </a:p>
+          <a:p>
+            <a:r>
+              <a:t>[Sources: results/tier0/results.json headline, timing, pnl_vs_t_reprice_minus_t_bounce; results/tier0_v3/blind.json sets, verdicts; results/financials/financials.json Tier-0 rows.]</a:t>
             </a:r>
           </a:p>
         </p:txBody>
@@ -3893,25 +3927,25 @@
           <a:p/>
           <a:p>
             <a:r>
-              <a:t>This is not just a backtest. The engine connects to live Polymarket order books, read-only: 7,785 · 54 messages and assets in a 60 s window, feed delay (p50/95/99) 65 / 84 / 123 ms, no gaps, and zero orders sent, by construction.</a:t>
+              <a:t>This is not just a backtest. The market-data and paper-trading legs run on live Polymarket order books, read-only: 7,785 · 54 messages and assets in a 60 s window, feed delay (p50/95/99) 65 / 84 / 123 ms, no gaps, and zero orders sent, by construction.</a:t>
             </a:r>
           </a:p>
           <a:p/>
           <a:p>
             <a:r>
-              <a:t>On the right, the full chain on a real recorded WTA book: vision call, paper order, the one-second venue delay, the fill, then the reprice. It is an illustrative pairing of table-tennis calls with a tennis book, so it shows timing, not edge.</a:t>
+              <a:t>On the right, the full chain runs on a real recorded WTA book: vision call, paper order, the one-second venue delay, the fill, then the reprice. It is an illustrative pairing of table-tennis calls with a tennis book, so it shows timing, not edge.</a:t>
             </a:r>
           </a:p>
           <a:p/>
           <a:p>
             <a:r>
-              <a:t>Tonight it is running a live paper session with our pre-registered maker and a taker control. Status at build time: QUOTING (paper). Primary book: 0 fills, P&amp;L +$0.00. It is a plumbing check; that strategy already failed its blind test.</a:t>
+              <a:t>The live paper session (our pre-registered maker plus a taker control) was warming up at build time. Status: warm-up: waiting for trades (0 seen). Primary book: 0 fills, P&amp;L +$0.00. It is a plumbing check; that strategy already failed its blind test.</a:t>
             </a:r>
           </a:p>
           <a:p/>
           <a:p>
             <a:r>
-              <a:t>[Paper only: TERMS 5.3 forbids funded accounts; the executor raises LiveTradingForbidden if keys or live flags exist. If the session summary updates before the talk, rebuild: the numbers are read at build time.]</a:t>
+              <a:t>[Paper only: TERMS 5.3 forbids funded accounts; the executor raises LiveTradingForbidden if keys or live flags exist. If the session summary updates before the talk, rebuild the deck and re-render the video together: both read it at build time.]</a:t>
             </a:r>
           </a:p>
           <a:p>
@@ -7669,7 +7703,7 @@
                 </a:solidFill>
                 <a:latin typeface="Arial Narrow" panose="020B0606020202030204" pitchFamily="34" charset="0"/>
               </a:rPr>
-              <a:t>One command. Public data. Paper only.</a:t>
+              <a:t>Public code. Public data. Paper only.</a:t>
             </a:r>
           </a:p>
         </p:txBody>
@@ -7762,11 +7796,11 @@
         <p:spPr>
           <a:xfrm>
             <a:off x="548640" y="1737360"/>
-            <a:ext cx="6766560" cy="2011680"/>
+            <a:ext cx="7863840" cy="2103120"/>
           </a:xfrm>
           <a:prstGeom prst="roundRect">
             <a:avLst>
-              <a:gd name="adj" fmla="val 4545"/>
+              <a:gd name="adj" fmla="val 4347"/>
             </a:avLst>
           </a:prstGeom>
           <a:solidFill>
@@ -7808,7 +7842,7 @@
         <p:spPr>
           <a:xfrm>
             <a:off x="822959" y="1737360"/>
-            <a:ext cx="6309360" cy="2011680"/>
+            <a:ext cx="7406640" cy="2103120"/>
           </a:xfrm>
           <a:prstGeom prst="rect">
             <a:avLst/>
@@ -7823,7 +7857,7 @@
           <a:p>
             <a:pPr algn="l"/>
             <a:r>
-              <a:rPr sz="1600" b="1" i="0">
+              <a:rPr sz="1500" b="1" i="0">
                 <a:solidFill>
                   <a:srgbClr val="F07A66"/>
                 </a:solidFill>
@@ -7832,13 +7866,62 @@
               <a:t>$ </a:t>
             </a:r>
             <a:r>
-              <a:rPr sz="2200" b="1" i="0">
+              <a:rPr sz="1900" b="1" i="0">
                 <a:solidFill>
                   <a:srgbClr val="FFFFFF"/>
                 </a:solidFill>
                 <a:latin typeface="Courier New"/>
               </a:rPr>
-              <a:t>bash reproduce.sh</a:t>
+              <a:t>bash run.sh replay</a:t>
+            </a:r>
+          </a:p>
+          <a:p>
+            <a:pPr algn="l"/>
+            <a:r>
+              <a:rPr sz="1150" b="0" i="0">
+                <a:solidFill>
+                  <a:srgbClr val="9FB3C8"/>
+                </a:solidFill>
+                <a:latin typeface="Courier New"/>
+              </a:rPr>
+              <a:t>  # paper engine on recorded live books, in seconds, no network</a:t>
+            </a:r>
+          </a:p>
+          <a:p>
+            <a:pPr algn="l">
+              <a:spcBef>
+                <a:spcPts val="600"/>
+              </a:spcBef>
+            </a:pPr>
+            <a:r>
+              <a:rPr sz="1500" b="1" i="0">
+                <a:solidFill>
+                  <a:srgbClr val="F07A66"/>
+                </a:solidFill>
+                <a:latin typeface="Courier New"/>
+              </a:rPr>
+              <a:t>$ </a:t>
+            </a:r>
+            <a:r>
+              <a:rPr sz="1900" b="1" i="0">
+                <a:solidFill>
+                  <a:srgbClr val="FFFFFF"/>
+                </a:solidFill>
+                <a:latin typeface="Courier New"/>
+              </a:rPr>
+              <a:t>bash run.sh data &amp;&amp; bash run.sh reproduce</a:t>
+            </a:r>
+          </a:p>
+          <a:p>
+            <a:pPr algn="l"/>
+            <a:r>
+              <a:rPr sz="1150" b="0" i="0">
+                <a:solidFill>
+                  <a:srgbClr val="9FB3C8"/>
+                </a:solidFill>
+                <a:latin typeface="Courier New"/>
+              </a:rPr>
+              <a:t>  # public crawl, no keys (~1-2 h), then every table and figure in the note</a:t>
             </a:r>
           </a:p>
           <a:p>
@@ -7848,13 +7931,141 @@
               </a:spcBef>
             </a:pPr>
             <a:r>
-              <a:rPr sz="1200" b="0" i="0">
+              <a:rPr sz="1150" b="0" i="0">
                 <a:solidFill>
                   <a:srgbClr val="9FB3C8"/>
                 </a:solidFill>
                 <a:latin typeface="Courier New"/>
               </a:rPr>
-              <a:t>  # every number and figure in the note, from cached public data</a:t>
+              <a:t>  # this deck: .venv/bin/python docs/deck/build_deck.py</a:t>
+            </a:r>
+          </a:p>
+          <a:p>
+            <a:pPr algn="l"/>
+            <a:r>
+              <a:rPr sz="1150" b="0" i="0">
+                <a:solidFill>
+                  <a:srgbClr val="9FB3C8"/>
+                </a:solidFill>
+                <a:latin typeface="Courier New"/>
+              </a:rPr>
+              <a:t>  # vision calls need models/vision/frozen_call_model.pkl (not in git; rebuilt by hpg/engine_vision.sbatch)</a:t>
+            </a:r>
+          </a:p>
+        </p:txBody>
+      </p:sp>
+      <p:sp>
+        <p:nvSpPr>
+          <p:cNvPr id="7" name="Repo URL"/>
+          <p:cNvSpPr txBox="1"/>
+          <p:nvPr/>
+        </p:nvSpPr>
+        <p:spPr>
+          <a:xfrm>
+            <a:off x="548640" y="3977639"/>
+            <a:ext cx="11094415" cy="502920"/>
+          </a:xfrm>
+          <a:prstGeom prst="rect">
+            <a:avLst/>
+          </a:prstGeom>
+          <a:noFill/>
+        </p:spPr>
+        <p:txBody>
+          <a:bodyPr wrap="square" anchor="ctr" lIns="0" tIns="0" rIns="0" bIns="0">
+            <a:noAutofit/>
+          </a:bodyPr>
+          <a:lstStyle/>
+          <a:p>
+            <a:pPr algn="l"/>
+            <a:r>
+              <a:rPr sz="1400" b="1" i="0">
+                <a:solidFill>
+                  <a:srgbClr val="FFFFFF"/>
+                </a:solidFill>
+                <a:latin typeface="Courier New"/>
+              </a:rPr>
+              <a:t>https://github.com/OjasMishra32/computervisionpredictivetabletennismoneymachineouuushiii</a:t>
+            </a:r>
+          </a:p>
+        </p:txBody>
+      </p:sp>
+      <p:sp>
+        <p:nvSpPr>
+          <p:cNvPr id="8" name="Pending"/>
+          <p:cNvSpPr txBox="1"/>
+          <p:nvPr/>
+        </p:nvSpPr>
+        <p:spPr>
+          <a:xfrm>
+            <a:off x="548640" y="4663440"/>
+            <a:ext cx="11094415" cy="1463040"/>
+          </a:xfrm>
+          <a:prstGeom prst="rect">
+            <a:avLst/>
+          </a:prstGeom>
+          <a:noFill/>
+        </p:spPr>
+        <p:txBody>
+          <a:bodyPr wrap="square" anchor="t" lIns="0" tIns="0" rIns="0" bIns="0">
+            <a:noAutofit/>
+          </a:bodyPr>
+          <a:lstStyle/>
+          <a:p>
+            <a:pPr algn="l"/>
+            <a:r>
+              <a:rPr sz="1200" b="1" i="0" spc="140">
+                <a:solidFill>
+                  <a:srgbClr val="9FB3C8"/>
+                </a:solidFill>
+                <a:latin typeface="Arial" panose="020B0604020202020204" pitchFamily="34" charset="0"/>
+              </a:rPr>
+              <a:t>STILL OPEN AT BUILD TIME</a:t>
+            </a:r>
+          </a:p>
+          <a:p>
+            <a:pPr algn="l">
+              <a:spcBef>
+                <a:spcPts val="400"/>
+              </a:spcBef>
+            </a:pPr>
+            <a:r>
+              <a:rPr sz="1400" b="1" i="0">
+                <a:solidFill>
+                  <a:srgbClr val="FFFFFF"/>
+                </a:solidFill>
+                <a:latin typeface="Arial" panose="020B0604020202020204" pitchFamily="34" charset="0"/>
+              </a:rPr>
+              <a:t>Blind forward test (run once, planned 2026-10-04 11:30 UTC): </a:t>
+            </a:r>
+            <a:r>
+              <a:rPr sz="1400" b="1" i="0">
+                <a:solidFill>
+                  <a:srgbClr val="F07A66"/>
+                </a:solidFill>
+                <a:latin typeface="Arial" panose="020B0604020202020204" pitchFamily="34" charset="0"/>
+              </a:rPr>
+              <a:t>pending</a:t>
+            </a:r>
+          </a:p>
+          <a:p>
+            <a:pPr algn="l"/>
+            <a:r>
+              <a:rPr sz="1400" b="1" i="0">
+                <a:solidFill>
+                  <a:srgbClr val="FFFFFF"/>
+                </a:solidFill>
+                <a:latin typeface="Arial" panose="020B0604020202020204" pitchFamily="34" charset="0"/>
+              </a:rPr>
+              <a:t>Live paper session: </a:t>
+            </a:r>
+            <a:r>
+              <a:rPr sz="1400" b="0" i="0">
+                <a:solidFill>
+                  <a:srgbClr val="9FB3C8"/>
+                </a:solidFill>
+                <a:latin typeface="Arial" panose="020B0604020202020204" pitchFamily="34" charset="0"/>
+              </a:rPr>
+              <a:t>warming up (started 2026-10-03 20:48 UTC)</a:t>
             </a:r>
           </a:p>
           <a:p>
@@ -7868,39 +8079,23 @@
                 <a:solidFill>
                   <a:srgbClr val="9FB3C8"/>
                 </a:solidFill>
-                <a:latin typeface="Courier New"/>
-              </a:rPr>
-              <a:t>  # first run: .venv/bin/python scripts/fetch_polymarket.py (no keys)</a:t>
-            </a:r>
-          </a:p>
-          <a:p>
-            <a:pPr algn="l">
-              <a:spcBef>
-                <a:spcPts val="200"/>
-              </a:spcBef>
-            </a:pPr>
-            <a:r>
-              <a:rPr sz="1200" b="0" i="0">
-                <a:solidFill>
-                  <a:srgbClr val="9FB3C8"/>
-                </a:solidFill>
-                <a:latin typeface="Courier New"/>
-              </a:rPr>
-              <a:t>  # this deck: .venv/bin/python docs/deck/build_deck.py</a:t>
-            </a:r>
-          </a:p>
-        </p:txBody>
-      </p:sp>
-      <p:sp>
-        <p:nvSpPr>
-          <p:cNvPr id="7" name="Repo URL"/>
+                <a:latin typeface="Arial" panose="020B0604020202020204" pitchFamily="34" charset="0"/>
+              </a:rPr>
+              <a:t>Financials still pending: v2 (frozen fast-tier book) Forward (blind); Maker v1, side markets Live paper session</a:t>
+            </a:r>
+          </a:p>
+        </p:txBody>
+      </p:sp>
+      <p:sp>
+        <p:nvSpPr>
+          <p:cNvPr id="9" name="Disclaimer"/>
           <p:cNvSpPr txBox="1"/>
           <p:nvPr/>
         </p:nvSpPr>
         <p:spPr>
           <a:xfrm>
-            <a:off x="548640" y="3977639"/>
-            <a:ext cx="11094415" cy="502920"/>
+            <a:off x="548640" y="6272784"/>
+            <a:ext cx="11094415" cy="457200"/>
           </a:xfrm>
           <a:prstGeom prst="rect">
             <a:avLst/>
@@ -7915,145 +8110,13 @@
           <a:p>
             <a:pPr algn="l"/>
             <a:r>
-              <a:rPr sz="1400" b="1" i="0">
-                <a:solidFill>
-                  <a:srgbClr val="FFFFFF"/>
-                </a:solidFill>
-                <a:latin typeface="Courier New"/>
-              </a:rPr>
-              <a:t>https://github.com/OjasMishra32/computervisionpredictivetabletennismoneymachineouuushiii</a:t>
-            </a:r>
-          </a:p>
-        </p:txBody>
-      </p:sp>
-      <p:sp>
-        <p:nvSpPr>
-          <p:cNvPr id="8" name="Pending"/>
-          <p:cNvSpPr txBox="1"/>
-          <p:nvPr/>
-        </p:nvSpPr>
-        <p:spPr>
-          <a:xfrm>
-            <a:off x="548640" y="4663440"/>
-            <a:ext cx="11094415" cy="1463040"/>
-          </a:xfrm>
-          <a:prstGeom prst="rect">
-            <a:avLst/>
-          </a:prstGeom>
-          <a:noFill/>
-        </p:spPr>
-        <p:txBody>
-          <a:bodyPr wrap="square" anchor="t" lIns="0" tIns="0" rIns="0" bIns="0">
-            <a:noAutofit/>
-          </a:bodyPr>
-          <a:lstStyle/>
-          <a:p>
-            <a:pPr algn="l"/>
-            <a:r>
-              <a:rPr sz="1200" b="1" i="0" spc="140">
+              <a:rPr sz="1100" b="0" i="0">
                 <a:solidFill>
                   <a:srgbClr val="9FB3C8"/>
                 </a:solidFill>
                 <a:latin typeface="Arial" panose="020B0604020202020204" pitchFamily="34" charset="0"/>
               </a:rPr>
-              <a:t>STILL OPEN AT BUILD TIME</a:t>
-            </a:r>
-          </a:p>
-          <a:p>
-            <a:pPr algn="l">
-              <a:spcBef>
-                <a:spcPts val="400"/>
-              </a:spcBef>
-            </a:pPr>
-            <a:r>
-              <a:rPr sz="1400" b="1" i="0">
-                <a:solidFill>
-                  <a:srgbClr val="FFFFFF"/>
-                </a:solidFill>
-                <a:latin typeface="Arial" panose="020B0604020202020204" pitchFamily="34" charset="0"/>
-              </a:rPr>
-              <a:t>Blind forward test (run once, tomorrow): </a:t>
-            </a:r>
-            <a:r>
-              <a:rPr sz="1400" b="1" i="0">
-                <a:solidFill>
-                  <a:srgbClr val="F07A66"/>
-                </a:solidFill>
-                <a:latin typeface="Arial" panose="020B0604020202020204" pitchFamily="34" charset="0"/>
-              </a:rPr>
-              <a:t>pending</a:t>
-            </a:r>
-          </a:p>
-          <a:p>
-            <a:pPr algn="l"/>
-            <a:r>
-              <a:rPr sz="1400" b="1" i="0">
-                <a:solidFill>
-                  <a:srgbClr val="FFFFFF"/>
-                </a:solidFill>
-                <a:latin typeface="Arial" panose="020B0604020202020204" pitchFamily="34" charset="0"/>
-              </a:rPr>
-              <a:t>Live paper session: </a:t>
-            </a:r>
-            <a:r>
-              <a:rPr sz="1400" b="0" i="0">
-                <a:solidFill>
-                  <a:srgbClr val="9FB3C8"/>
-                </a:solidFill>
-                <a:latin typeface="Arial" panose="020B0604020202020204" pitchFamily="34" charset="0"/>
-              </a:rPr>
-              <a:t>QUOTING (paper)</a:t>
-            </a:r>
-          </a:p>
-          <a:p>
-            <a:pPr algn="l">
-              <a:spcBef>
-                <a:spcPts val="200"/>
-              </a:spcBef>
-            </a:pPr>
-            <a:r>
-              <a:rPr sz="1200" b="0" i="0">
-                <a:solidFill>
-                  <a:srgbClr val="9FB3C8"/>
-                </a:solidFill>
-                <a:latin typeface="Arial" panose="020B0604020202020204" pitchFamily="34" charset="0"/>
-              </a:rPr>
-              <a:t>Financials still pending: v2 (frozen fast-tier book) Forward (blind); Maker v1, side markets Live paper session</a:t>
-            </a:r>
-          </a:p>
-        </p:txBody>
-      </p:sp>
-      <p:sp>
-        <p:nvSpPr>
-          <p:cNvPr id="9" name="Disclaimer"/>
-          <p:cNvSpPr txBox="1"/>
-          <p:nvPr/>
-        </p:nvSpPr>
-        <p:spPr>
-          <a:xfrm>
-            <a:off x="548640" y="6355080"/>
-            <a:ext cx="11094415" cy="320040"/>
-          </a:xfrm>
-          <a:prstGeom prst="rect">
-            <a:avLst/>
-          </a:prstGeom>
-          <a:noFill/>
-        </p:spPr>
-        <p:txBody>
-          <a:bodyPr wrap="square" anchor="ctr" lIns="0" tIns="0" rIns="0" bIns="0">
-            <a:noAutofit/>
-          </a:bodyPr>
-          <a:lstStyle/>
-          <a:p>
-            <a:pPr algn="l"/>
-            <a:r>
-              <a:rPr sz="1100" b="0" i="0">
-                <a:solidFill>
-                  <a:srgbClr val="9FB3C8"/>
-                </a:solidFill>
-                <a:latin typeface="Arial" panose="020B0604020202020204" pitchFamily="34" charset="0"/>
-              </a:rPr>
-              <a:t>No real money was traded. No live ATP/WTA data was bought or used. Tier 0 is a labelled counterfactual.</a:t>
+              <a:t>No real money was traded. We bought no official ATP/WTA data feed and no trading result uses one; free public score pages were recorded only to time their lag. Tier 0 is a labelled counterfactual.</a:t>
             </a:r>
           </a:p>
         </p:txBody>
@@ -8910,7 +8973,7 @@
                 </a:solidFill>
                 <a:latin typeface="Arial" panose="020B0604020202020204" pitchFamily="34" charset="0"/>
               </a:rPr>
-              <a:t>The forward window is run once, tomorrow, and reported either way.</a:t>
+              <a:t>The forward window is run once, planned for 2026-10-04 11:30 UTC, and reported either way.</a:t>
             </a:r>
           </a:p>
           <a:p>
@@ -8935,7 +8998,7 @@
                 </a:solidFill>
                 <a:latin typeface="Arial" panose="020B0604020202020204" pitchFamily="34" charset="0"/>
               </a:rPr>
-              <a:t>All 45 looks at held-out data are in results/oos_peeks.log.</a:t>
+              <a:t>All 65 looks at held-out data are in results/oos_peeks.log.</a:t>
             </a:r>
           </a:p>
         </p:txBody>
@@ -9096,7 +9159,7 @@
                 </a:solidFill>
                 <a:latin typeface="Arial Narrow" panose="020B0606020202030204" pitchFamily="34" charset="0"/>
               </a:rPr>
-              <a:t>45</a:t>
+              <a:t>65</a:t>
             </a:r>
           </a:p>
           <a:p>
@@ -11640,7 +11703,7 @@
                 </a:solidFill>
                 <a:latin typeface="Arial" panose="020B0604020202020204" pitchFamily="34" charset="0"/>
               </a:rPr>
-              <a:t>“You tried 3,386 or more variants. Why isn't this the luckiest draw?”</a:t>
+              <a:t>“You tried 3,410 or more variants. Why isn't this the luckiest draw?”</a:t>
             </a:r>
           </a:p>
         </p:txBody>
@@ -11693,7 +11756,7 @@
                 </a:solidFill>
                 <a:latin typeface="Arial" panose="020B0604020202020204" pitchFamily="34" charset="0"/>
               </a:rPr>
-              <a:t>N = 3,386.</a:t>
+              <a:t>N = 3,410.</a:t>
             </a:r>
           </a:p>
           <a:p>
@@ -11727,7 +11790,7 @@
                 </a:solidFill>
                 <a:latin typeface="Arial" panose="020B0604020202020204" pitchFamily="34" charset="0"/>
               </a:rPr>
-              <a:t>1.00, even with the most conservative variance.</a:t>
+              <a:t>0.997, even with the most conservative variance.</a:t>
             </a:r>
           </a:p>
           <a:p>
@@ -11761,7 +11824,7 @@
                 </a:solidFill>
                 <a:latin typeface="Arial" panose="020B0604020202020204" pitchFamily="34" charset="0"/>
               </a:rPr>
-              <a:t>0.481 at N = 44 and 0.075 at N = 3,386. 40 days cannot rule out luck at the full trial count, and we say that.</a:t>
+              <a:t>0.481 at N = 44 and 0.075 at N = 3,410. 40 days cannot rule out luck at the full trial count, and we say that.</a:t>
             </a:r>
           </a:p>
           <a:p>
@@ -11916,7 +11979,7 @@
                 </a:solidFill>
                 <a:latin typeface="Arial Narrow" panose="020B0606020202030204" pitchFamily="34" charset="0"/>
               </a:rPr>
-              <a:t>1.00</a:t>
+              <a:t>0.997</a:t>
             </a:r>
           </a:p>
           <a:p>
@@ -11928,7 +11991,7 @@
                 </a:solidFill>
                 <a:latin typeface="Arial" panose="020B0604020202020204" pitchFamily="34" charset="0"/>
               </a:rPr>
-              <a:t>DSR in sample, N = 3,386</a:t>
+              <a:t>DSR in sample, N = 3,410</a:t>
             </a:r>
           </a:p>
           <a:p>
@@ -11956,7 +12019,7 @@
                 </a:solidFill>
                 <a:latin typeface="Arial" panose="020B0604020202020204" pitchFamily="34" charset="0"/>
               </a:rPr>
-              <a:t>DSR burned OOS, N = 3,386</a:t>
+              <a:t>DSR burned OOS, N = 3,410</a:t>
             </a:r>
           </a:p>
           <a:p>
@@ -12229,7 +12292,7 @@
                 </a:solidFill>
                 <a:latin typeface="Arial" panose="020B0604020202020204" pitchFamily="34" charset="0"/>
               </a:rPr>
-              <a:t>“Your OOS is 20% of matches but only 39 of 360 days, and your universe keeps matches with at least $5k of lifetime volume, which you only know afterwards. Isn't that survivorship and lookahead?”</a:t>
+              <a:t>“Your OOS is 20% of matches but only 38.7 of 360 days, and your universe keeps matches with at least $5k of lifetime volume, which you only know afterwards. Isn't that survivorship and lookahead?”</a:t>
             </a:r>
           </a:p>
         </p:txBody>
@@ -12282,7 +12345,7 @@
                 </a:solidFill>
                 <a:latin typeface="Arial" panose="020B0604020202020204" pitchFamily="34" charset="0"/>
               </a:rPr>
-              <a:t>2,617 of 13,084 matches, 21% of volume. By calendar time it is 39 of 360 days; a time-based 20% would start 2026-07-23.</a:t>
+              <a:t>2,617 of 13,084 matches, 21% of volume. By calendar time it is 38.7 of 360 days (40 UTC dates, the count slides 5 and 6 use); a time-based 20% would start 2026-07-23.</a:t>
             </a:r>
           </a:p>
           <a:p>
@@ -12508,7 +12571,7 @@
                 </a:solidFill>
                 <a:latin typeface="Arial Narrow" panose="020B0606020202030204" pitchFamily="34" charset="0"/>
               </a:rPr>
-              <a:t>39 of 360</a:t>
+              <a:t>38.7 of 360</a:t>
             </a:r>
           </a:p>
           <a:p>
@@ -13428,7 +13491,7 @@
                 </a:solidFill>
                 <a:latin typeface="Arial" panose="020B0604020202020204" pitchFamily="34" charset="0"/>
               </a:rPr>
-              <a:t>cameras in the venue</a:t>
+              <a:t>our vision ~158 ms/call (laptop; no courtside camera)</a:t>
             </a:r>
           </a:p>
         </p:txBody>
@@ -14380,7 +14443,7 @@
                 </a:solidFill>
                 <a:latin typeface="Arial" panose="020B0604020202020204" pitchFamily="34" charset="0"/>
               </a:rPr>
-              <a:t>total |fair-value move| per $1 share over a simulated ATP best-of-3 (161 points, 5.7% mean per point)</a:t>
+              <a:t>total |fair-value move| per $1 share over a simulated ATP best-of-3 (161 points): 2.6¢ realised move per point on average (5.7¢ swing between winning and losing it)</a:t>
             </a:r>
           </a:p>
         </p:txBody>
@@ -14881,7 +14944,7 @@
                 </a:solidFill>
                 <a:latin typeface="Arial" panose="020B0604020202020204" pitchFamily="34" charset="0"/>
               </a:rPr>
-              <a:t>where a lead comes from (frame rate, cameras, being in the venue) and what it costs in latency (~100 ms per call on a laptop).</a:t>
+              <a:t>where a lead comes from (frame rate, cameras, being in the venue) and what it costs in latency (~158 ms per call on a laptop).</a:t>
             </a:r>
           </a:p>
           <a:p>
@@ -15298,7 +15361,7 @@
                 </a:solidFill>
                 <a:latin typeface="Arial" panose="020B0604020202020204" pitchFamily="34" charset="0"/>
               </a:rPr>
-              <a:t>HIDDEN MANIFEST  ·  PAGE 1 OF 10</a:t>
+              <a:t>HIDDEN MANIFEST  ·  PAGE 1 OF 11</a:t>
             </a:r>
           </a:p>
         </p:txBody>
@@ -15429,7 +15492,19 @@
                 </a:solidFill>
                 <a:latin typeface="Courier New"/>
               </a:rPr>
-              <a:t>1 Title                    5.7%                     results/leverage_stats.json :: atp &gt; mean_abs_leverage</a:t>
+              <a:t>1 Title                    2.6¢                     results/leverage_stats.json :: atp  [total_abs_move_per_match / points_per_match, per $1 share]</a:t>
+            </a:r>
+          </a:p>
+          <a:p>
+            <a:pPr algn="l"/>
+            <a:r>
+              <a:rPr sz="700" b="0" i="0">
+                <a:solidFill>
+                  <a:srgbClr val="0C1A28"/>
+                </a:solidFill>
+                <a:latin typeface="Courier New"/>
+              </a:rPr>
+              <a:t>1 Title                    5.7¢                     results/leverage_stats.json :: atp &gt; mean_abs_leverage  [swing in fair value between winning and losing the point]</a:t>
             </a:r>
           </a:p>
           <a:p>
@@ -15453,6 +15528,18 @@
                 </a:solidFill>
                 <a:latin typeface="Courier New"/>
               </a:rPr>
+              <a:t>2 Economics                158 ms                   results/engine/demo_run.json :: latency_budget &gt; [stage 'vision…'] &gt; ms  [processing only; laptop benchmark]</a:t>
+            </a:r>
+          </a:p>
+          <a:p>
+            <a:pPr algn="l"/>
+            <a:r>
+              <a:rPr sz="700" b="0" i="0">
+                <a:solidFill>
+                  <a:srgbClr val="0C1A28"/>
+                </a:solidFill>
+                <a:latin typeface="Courier New"/>
+              </a:rPr>
               <a:t>2 Economics                −1.32 s                  results/tier0/results.json :: timing &gt; median_t_reprice_minus_t_stamp_s</a:t>
             </a:r>
           </a:p>
@@ -15561,7 +15648,19 @@
                 </a:solidFill>
                 <a:latin typeface="Courier New"/>
               </a:rPr>
-              <a:t>2 Economics                5.7%                     results/leverage_stats.json :: atp &gt; mean_abs_leverage</a:t>
+              <a:t>2 Economics                2.6¢                     results/leverage_stats.json :: atp  [total_abs_move_per_match / points_per_match, per $1 share]</a:t>
+            </a:r>
+          </a:p>
+          <a:p>
+            <a:pPr algn="l"/>
+            <a:r>
+              <a:rPr sz="700" b="0" i="0">
+                <a:solidFill>
+                  <a:srgbClr val="0C1A28"/>
+                </a:solidFill>
+                <a:latin typeface="Courier New"/>
+              </a:rPr>
+              <a:t>2 Economics                5.7¢                     results/leverage_stats.json :: atp &gt; mean_abs_leverage  [swing in fair value between winning and losing the point]</a:t>
             </a:r>
           </a:p>
           <a:p>
@@ -15694,42 +15793,6 @@
                 <a:latin typeface="Courier New"/>
               </a:rPr>
               <a:t>3 Evidence                 −2.10¢                   results/summary.json :: is &gt; h6_walkforward &gt; [month=2026-01] &gt; follow_res_c</a:t>
-            </a:r>
-          </a:p>
-          <a:p>
-            <a:pPr algn="l"/>
-            <a:r>
-              <a:rPr sz="700" b="0" i="0">
-                <a:solidFill>
-                  <a:srgbClr val="0C1A28"/>
-                </a:solidFill>
-                <a:latin typeface="Courier New"/>
-              </a:rPr>
-              <a:t>3 Evidence                 +1.21¢                   results/summary.json :: is &gt; h6_walkforward &gt; [month=2026-02] &gt; net30_c</a:t>
-            </a:r>
-          </a:p>
-          <a:p>
-            <a:pPr algn="l"/>
-            <a:r>
-              <a:rPr sz="700" b="0" i="0">
-                <a:solidFill>
-                  <a:srgbClr val="0C1A28"/>
-                </a:solidFill>
-                <a:latin typeface="Courier New"/>
-              </a:rPr>
-              <a:t>3 Evidence                 −0.63¢                   results/summary.json :: is &gt; h6_walkforward &gt; [month=2026-02] &gt; others_net30_c</a:t>
-            </a:r>
-          </a:p>
-          <a:p>
-            <a:pPr algn="l"/>
-            <a:r>
-              <a:rPr sz="700" b="0" i="0">
-                <a:solidFill>
-                  <a:srgbClr val="0C1A28"/>
-                </a:solidFill>
-                <a:latin typeface="Courier New"/>
-              </a:rPr>
-              <a:t>3 Evidence                 −0.06¢                   results/summary.json :: is &gt; h6_walkforward &gt; [month=2026-02] &gt; follow_res_c</a:t>
             </a:r>
           </a:p>
         </p:txBody>
@@ -15923,7 +15986,7 @@
                 </a:solidFill>
                 <a:latin typeface="Arial" panose="020B0604020202020204" pitchFamily="34" charset="0"/>
               </a:rPr>
-              <a:t>HIDDEN MANIFEST  ·  PAGE 2 OF 10</a:t>
+              <a:t>HIDDEN MANIFEST  ·  PAGE 2 OF 11</a:t>
             </a:r>
           </a:p>
         </p:txBody>
@@ -15958,6 +16021,42 @@
                 </a:solidFill>
                 <a:latin typeface="Courier New"/>
               </a:rPr>
+              <a:t>3 Evidence                 +1.21¢                   results/summary.json :: is &gt; h6_walkforward &gt; [month=2026-02] &gt; net30_c</a:t>
+            </a:r>
+          </a:p>
+          <a:p>
+            <a:pPr algn="l"/>
+            <a:r>
+              <a:rPr sz="700" b="0" i="0">
+                <a:solidFill>
+                  <a:srgbClr val="0C1A28"/>
+                </a:solidFill>
+                <a:latin typeface="Courier New"/>
+              </a:rPr>
+              <a:t>3 Evidence                 −0.63¢                   results/summary.json :: is &gt; h6_walkforward &gt; [month=2026-02] &gt; others_net30_c</a:t>
+            </a:r>
+          </a:p>
+          <a:p>
+            <a:pPr algn="l"/>
+            <a:r>
+              <a:rPr sz="700" b="0" i="0">
+                <a:solidFill>
+                  <a:srgbClr val="0C1A28"/>
+                </a:solidFill>
+                <a:latin typeface="Courier New"/>
+              </a:rPr>
+              <a:t>3 Evidence                 −0.06¢                   results/summary.json :: is &gt; h6_walkforward &gt; [month=2026-02] &gt; follow_res_c</a:t>
+            </a:r>
+          </a:p>
+          <a:p>
+            <a:pPr algn="l"/>
+            <a:r>
+              <a:rPr sz="700" b="0" i="0">
+                <a:solidFill>
+                  <a:srgbClr val="0C1A28"/>
+                </a:solidFill>
+                <a:latin typeface="Courier New"/>
+              </a:rPr>
               <a:t>3 Evidence                 +2.02¢                   results/summary.json :: is &gt; h6_walkforward &gt; [month=2026-03] &gt; net30_c</a:t>
             </a:r>
           </a:p>
@@ -16319,42 +16418,6 @@
                 <a:latin typeface="Courier New"/>
               </a:rPr>
               <a:t>4 CV in action             41                       results/tracking/summary.json :: early_call &gt; precision_recall_test_snapshot &gt; 50ms  [tp+fn]</a:t>
-            </a:r>
-          </a:p>
-          <a:p>
-            <a:pPr algn="l"/>
-            <a:r>
-              <a:rPr sz="700" b="0" i="0">
-                <a:solidFill>
-                  <a:srgbClr val="0C1A28"/>
-                </a:solidFill>
-                <a:latin typeface="Courier New"/>
-              </a:rPr>
-              <a:t>4 CV in action             27%                      results/tracking/summary.json :: early_call &gt; precision_recall_test_snapshot &gt; 50ms &gt; recall</a:t>
-            </a:r>
-          </a:p>
-          <a:p>
-            <a:pPr algn="l"/>
-            <a:r>
-              <a:rPr sz="700" b="0" i="0">
-                <a:solidFill>
-                  <a:srgbClr val="0C1A28"/>
-                </a:solidFill>
-                <a:latin typeface="Courier New"/>
-              </a:rPr>
-              <a:t>4 CV in action             74%                      results/tracking/summary.json :: early_call &gt; precision_recall_test_snapshot &gt; 50ms &gt; precision_wilson95</a:t>
-            </a:r>
-          </a:p>
-          <a:p>
-            <a:pPr algn="l"/>
-            <a:r>
-              <a:rPr sz="700" b="0" i="0">
-                <a:solidFill>
-                  <a:srgbClr val="0C1A28"/>
-                </a:solidFill>
-                <a:latin typeface="Courier New"/>
-              </a:rPr>
-              <a:t>4 CV in action             97.7%                    results/engine/demo_run.json :: vision &gt; detection_vs_labels &gt; within_5px</a:t>
             </a:r>
           </a:p>
         </p:txBody>
@@ -16548,7 +16611,7 @@
                 </a:solidFill>
                 <a:latin typeface="Arial" panose="020B0604020202020204" pitchFamily="34" charset="0"/>
               </a:rPr>
-              <a:t>HIDDEN MANIFEST  ·  PAGE 3 OF 10</a:t>
+              <a:t>HIDDEN MANIFEST  ·  PAGE 3 OF 11</a:t>
             </a:r>
           </a:p>
         </p:txBody>
@@ -16583,31 +16646,103 @@
                 </a:solidFill>
                 <a:latin typeface="Courier New"/>
               </a:rPr>
-              <a:t>4 CV in action             99.7%                    results/engine/demo_run.json :: vision &gt; detection_vs_labels &gt; recall</a:t>
-            </a:r>
-          </a:p>
-          <a:p>
-            <a:pPr algn="l"/>
-            <a:r>
-              <a:rPr sz="700" b="0" i="0">
-                <a:solidFill>
-                  <a:srgbClr val="0C1A28"/>
-                </a:solidFill>
-                <a:latin typeface="Courier New"/>
-              </a:rPr>
-              <a:t>4 CV in action             100 ms                   results/engine/demo_run.json :: latency_budget &gt; [stage 'vision…'] &gt; ms</a:t>
-            </a:r>
-          </a:p>
-          <a:p>
-            <a:pPr algn="l"/>
-            <a:r>
-              <a:rPr sz="700" b="0" i="0">
-                <a:solidFill>
-                  <a:srgbClr val="0C1A28"/>
-                </a:solidFill>
-                <a:latin typeface="Courier New"/>
-              </a:rPr>
-              <a:t>4 CV in action             153 ms                   results/engine/demo_run.json :: latency_budget &gt; [stage 'vision…'] &gt; p90</a:t>
+              <a:t>4 CV in action             27%                      results/tracking/summary.json :: early_call &gt; precision_recall_test_snapshot &gt; 50ms &gt; recall</a:t>
+            </a:r>
+          </a:p>
+          <a:p>
+            <a:pPr algn="l"/>
+            <a:r>
+              <a:rPr sz="700" b="0" i="0">
+                <a:solidFill>
+                  <a:srgbClr val="0C1A28"/>
+                </a:solidFill>
+                <a:latin typeface="Courier New"/>
+              </a:rPr>
+              <a:t>4 CV in action             74%                      results/tracking/summary.json :: early_call &gt; precision_recall_test_snapshot &gt; 50ms &gt; precision_wilson95</a:t>
+            </a:r>
+          </a:p>
+          <a:p>
+            <a:pPr algn="l"/>
+            <a:r>
+              <a:rPr sz="700" b="0" i="0">
+                <a:solidFill>
+                  <a:srgbClr val="0C1A28"/>
+                </a:solidFill>
+                <a:latin typeface="Courier New"/>
+              </a:rPr>
+              <a:t>4 CV in action             94.0%                    results/tracking/summary.json :: detection_accuracy_pooled &gt; [split=test, source=tracked] &gt; within5</a:t>
+            </a:r>
+          </a:p>
+          <a:p>
+            <a:pPr algn="l"/>
+            <a:r>
+              <a:rPr sz="700" b="0" i="0">
+                <a:solidFill>
+                  <a:srgbClr val="0C1A28"/>
+                </a:solidFill>
+                <a:latin typeface="Courier New"/>
+              </a:rPr>
+              <a:t>4 CV in action             96.7%                    results/tracking/summary.json :: detection_accuracy_pooled &gt; [split=test, source=tracked] &gt; recall</a:t>
+            </a:r>
+          </a:p>
+          <a:p>
+            <a:pPr algn="l"/>
+            <a:r>
+              <a:rPr sz="700" b="0" i="0">
+                <a:solidFill>
+                  <a:srgbClr val="0C1A28"/>
+                </a:solidFill>
+                <a:latin typeface="Courier New"/>
+              </a:rPr>
+              <a:t>4 CV in action             6,833                    results/tracking/summary.json :: detection_accuracy_pooled &gt; [split=test, source=tracked] &gt; n_visible</a:t>
+            </a:r>
+          </a:p>
+          <a:p>
+            <a:pPr algn="l"/>
+            <a:r>
+              <a:rPr sz="700" b="0" i="0">
+                <a:solidFill>
+                  <a:srgbClr val="0C1A28"/>
+                </a:solidFill>
+                <a:latin typeface="Courier New"/>
+              </a:rPr>
+              <a:t>4 CV in action             25 ms                    results/tracking/summary.json :: early_call &gt; miss_first_call_lead_test_ms &gt; median</a:t>
+            </a:r>
+          </a:p>
+          <a:p>
+            <a:pPr algn="l"/>
+            <a:r>
+              <a:rPr sz="700" b="0" i="0">
+                <a:solidFill>
+                  <a:srgbClr val="0C1A28"/>
+                </a:solidFill>
+                <a:latin typeface="Courier New"/>
+              </a:rPr>
+              <a:t>4 CV in action             408 ms                   results/tracking/demo/manifest.json :: clips &gt; 0 &gt; call_lead_ms</a:t>
+            </a:r>
+          </a:p>
+          <a:p>
+            <a:pPr algn="l"/>
+            <a:r>
+              <a:rPr sz="700" b="0" i="0">
+                <a:solidFill>
+                  <a:srgbClr val="0C1A28"/>
+                </a:solidFill>
+                <a:latin typeface="Courier New"/>
+              </a:rPr>
+              <a:t>4 CV in action             158 ms                   results/engine/demo_run.json :: latency_budget &gt; [stage 'vision…'] &gt; ms</a:t>
+            </a:r>
+          </a:p>
+          <a:p>
+            <a:pPr algn="l"/>
+            <a:r>
+              <a:rPr sz="700" b="0" i="0">
+                <a:solidFill>
+                  <a:srgbClr val="0C1A28"/>
+                </a:solidFill>
+                <a:latin typeface="Courier New"/>
+              </a:rPr>
+              <a:t>4 CV in action             219 ms                   results/engine/demo_run.json :: latency_budget &gt; [stage 'vision…'] &gt; p90</a:t>
             </a:r>
           </a:p>
           <a:p>
@@ -16787,6 +16922,18 @@
                 </a:solidFill>
                 <a:latin typeface="Courier New"/>
               </a:rPr>
+              <a:t>5 Backtest                 2026-10-04 11:30 UTC     HYPOTHESIS_V2.md :: Forward test 'planned ~&lt;date&gt; UTC'</a:t>
+            </a:r>
+          </a:p>
+          <a:p>
+            <a:pPr algn="l"/>
+            <a:r>
+              <a:rPr sz="700" b="0" i="0">
+                <a:solidFill>
+                  <a:srgbClr val="0C1A28"/>
+                </a:solidFill>
+                <a:latin typeface="Courier New"/>
+              </a:rPr>
               <a:t>5 Backtest                 [1.17, 1.59]             results/v2/causal.json :: causal/is_eval/slip0.0 &gt; per_share_ci_c</a:t>
             </a:r>
           </a:p>
@@ -16896,90 +17043,6 @@
                 <a:latin typeface="Courier New"/>
               </a:rPr>
               <a:t>5 Backtest                 3                        results/v2/causal.json :: causal/burned_oos/slip0.0 &gt; months_total</a:t>
-            </a:r>
-          </a:p>
-          <a:p>
-            <a:pPr algn="l"/>
-            <a:r>
-              <a:rPr sz="700" b="0" i="0">
-                <a:solidFill>
-                  <a:srgbClr val="0C1A28"/>
-                </a:solidFill>
-                <a:latin typeface="Courier New"/>
-              </a:rPr>
-              <a:t>5 Backtest                 +$40.4k                  results/v2/causal.json :: causal/is_eval/slip0.0 &gt; total_pnl_usd</a:t>
-            </a:r>
-          </a:p>
-          <a:p>
-            <a:pPr algn="l"/>
-            <a:r>
-              <a:rPr sz="700" b="0" i="0">
-                <a:solidFill>
-                  <a:srgbClr val="0C1A28"/>
-                </a:solidFill>
-                <a:latin typeface="Courier New"/>
-              </a:rPr>
-              <a:t>5 Backtest                 $28.3k                   results/v2/causal.json :: causal/is_eval/slip0.0 &gt; capital_usd</a:t>
-            </a:r>
-          </a:p>
-          <a:p>
-            <a:pPr algn="l"/>
-            <a:r>
-              <a:rPr sz="700" b="0" i="0">
-                <a:solidFill>
-                  <a:srgbClr val="0C1A28"/>
-                </a:solidFill>
-                <a:latin typeface="Courier New"/>
-              </a:rPr>
-              <a:t>5 Backtest                 +$3.7k                   results/v2/causal.json :: causal/burned_oos/slip0.0 &gt; total_pnl_usd</a:t>
-            </a:r>
-          </a:p>
-          <a:p>
-            <a:pPr algn="l"/>
-            <a:r>
-              <a:rPr sz="700" b="0" i="0">
-                <a:solidFill>
-                  <a:srgbClr val="0C1A28"/>
-                </a:solidFill>
-                <a:latin typeface="Courier New"/>
-              </a:rPr>
-              <a:t>5 Backtest                 $22.8k                   results/v2/causal.json :: causal/burned_oos/slip0.0 &gt; capital_usd</a:t>
-            </a:r>
-          </a:p>
-          <a:p>
-            <a:pPr algn="l"/>
-            <a:r>
-              <a:rPr sz="700" b="0" i="0">
-                <a:solidFill>
-                  <a:srgbClr val="0C1A28"/>
-                </a:solidFill>
-                <a:latin typeface="Courier New"/>
-              </a:rPr>
-              <a:t>5 Backtest                 lost $36.1k              results/summary.json :: oos &gt; h6_shadow &gt; total_pnl_usd</a:t>
-            </a:r>
-          </a:p>
-          <a:p>
-            <a:pPr algn="l"/>
-            <a:r>
-              <a:rPr sz="700" b="0" i="0">
-                <a:solidFill>
-                  <a:srgbClr val="0C1A28"/>
-                </a:solidFill>
-                <a:latin typeface="Courier New"/>
-              </a:rPr>
-              <a:t>5 Backtest                 −75%                     results/summary.json :: oos &gt; h6_shadow &gt; max_dd</a:t>
-            </a:r>
-          </a:p>
-          <a:p>
-            <a:pPr algn="l"/>
-            <a:r>
-              <a:rPr sz="700" b="0" i="0">
-                <a:solidFill>
-                  <a:srgbClr val="0C1A28"/>
-                </a:solidFill>
-                <a:latin typeface="Courier New"/>
-              </a:rPr>
-              <a:t>6 Rigor                    3,386                    results/rigor/rigor.json :: psr_dsr &gt; N &gt; all_NOTE_s8</a:t>
             </a:r>
           </a:p>
         </p:txBody>
@@ -17173,7 +17236,7 @@
                 </a:solidFill>
                 <a:latin typeface="Arial" panose="020B0604020202020204" pitchFamily="34" charset="0"/>
               </a:rPr>
-              <a:t>HIDDEN MANIFEST  ·  PAGE 4 OF 10</a:t>
+              <a:t>HIDDEN MANIFEST  ·  PAGE 4 OF 11</a:t>
             </a:r>
           </a:p>
         </p:txBody>
@@ -17208,6 +17271,90 @@
                 </a:solidFill>
                 <a:latin typeface="Courier New"/>
               </a:rPr>
+              <a:t>5 Backtest                 +$40.4k                  results/v2/causal.json :: causal/is_eval/slip0.0 &gt; total_pnl_usd</a:t>
+            </a:r>
+          </a:p>
+          <a:p>
+            <a:pPr algn="l"/>
+            <a:r>
+              <a:rPr sz="700" b="0" i="0">
+                <a:solidFill>
+                  <a:srgbClr val="0C1A28"/>
+                </a:solidFill>
+                <a:latin typeface="Courier New"/>
+              </a:rPr>
+              <a:t>5 Backtest                 $28.3k                   results/v2/causal.json :: causal/is_eval/slip0.0 &gt; capital_usd</a:t>
+            </a:r>
+          </a:p>
+          <a:p>
+            <a:pPr algn="l"/>
+            <a:r>
+              <a:rPr sz="700" b="0" i="0">
+                <a:solidFill>
+                  <a:srgbClr val="0C1A28"/>
+                </a:solidFill>
+                <a:latin typeface="Courier New"/>
+              </a:rPr>
+              <a:t>5 Backtest                 +$3.7k                   results/v2/causal.json :: causal/burned_oos/slip0.0 &gt; total_pnl_usd</a:t>
+            </a:r>
+          </a:p>
+          <a:p>
+            <a:pPr algn="l"/>
+            <a:r>
+              <a:rPr sz="700" b="0" i="0">
+                <a:solidFill>
+                  <a:srgbClr val="0C1A28"/>
+                </a:solidFill>
+                <a:latin typeface="Courier New"/>
+              </a:rPr>
+              <a:t>5 Backtest                 $22.8k                   results/v2/causal.json :: causal/burned_oos/slip0.0 &gt; capital_usd</a:t>
+            </a:r>
+          </a:p>
+          <a:p>
+            <a:pPr algn="l"/>
+            <a:r>
+              <a:rPr sz="700" b="0" i="0">
+                <a:solidFill>
+                  <a:srgbClr val="0C1A28"/>
+                </a:solidFill>
+                <a:latin typeface="Courier New"/>
+              </a:rPr>
+              <a:t>5 Backtest                 lost $36.1k              results/summary.json :: oos &gt; h6_shadow &gt; total_pnl_usd</a:t>
+            </a:r>
+          </a:p>
+          <a:p>
+            <a:pPr algn="l"/>
+            <a:r>
+              <a:rPr sz="700" b="0" i="0">
+                <a:solidFill>
+                  <a:srgbClr val="0C1A28"/>
+                </a:solidFill>
+                <a:latin typeface="Courier New"/>
+              </a:rPr>
+              <a:t>5 Backtest                 −75%                     results/summary.json :: oos &gt; h6_shadow &gt; max_dd</a:t>
+            </a:r>
+          </a:p>
+          <a:p>
+            <a:pPr algn="l"/>
+            <a:r>
+              <a:rPr sz="700" b="0" i="0">
+                <a:solidFill>
+                  <a:srgbClr val="0C1A28"/>
+                </a:solidFill>
+                <a:latin typeface="Courier New"/>
+              </a:rPr>
+              <a:t>6 Rigor                    3,410                    results/rigor/rigor.json :: psr_dsr &gt; N &gt; all_plus_v2safe_grid  [NOTE section 8 counts 3,386; plus the 24-variant v2-safe gri…</a:t>
+            </a:r>
+          </a:p>
+          <a:p>
+            <a:pPr algn="l"/>
+            <a:r>
+              <a:rPr sz="700" b="0" i="0">
+                <a:solidFill>
+                  <a:srgbClr val="0C1A28"/>
+                </a:solidFill>
+                <a:latin typeface="Courier New"/>
+              </a:rPr>
               <a:t>6 Rigor                    44                       results/rigor/rigor.json :: psr_dsr &gt; N &gt; H1_H6</a:t>
             </a:r>
           </a:p>
@@ -17220,31 +17367,31 @@
                 </a:solidFill>
                 <a:latin typeface="Courier New"/>
               </a:rPr>
-              <a:t>6 Rigor                    1.00                     results/rigor/rigor.json :: psr_dsr &gt; rows &gt; [series=v2_is] &gt; dsr &gt; N3386/sizing_grid_55 &gt; dsr</a:t>
-            </a:r>
-          </a:p>
-          <a:p>
-            <a:pPr algn="l"/>
-            <a:r>
-              <a:rPr sz="700" b="0" i="0">
-                <a:solidFill>
-                  <a:srgbClr val="0C1A28"/>
-                </a:solidFill>
-                <a:latin typeface="Courier New"/>
-              </a:rPr>
-              <a:t>6 Rigor                    0.075                    results/rigor/rigor.json :: psr_dsr &gt; rows &gt; [series=v2_oos] &gt; dsr &gt; N3386/null &gt; dsr</a:t>
-            </a:r>
-          </a:p>
-          <a:p>
-            <a:pPr algn="l"/>
-            <a:r>
-              <a:rPr sz="700" b="0" i="0">
-                <a:solidFill>
-                  <a:srgbClr val="0C1A28"/>
-                </a:solidFill>
-                <a:latin typeface="Courier New"/>
-              </a:rPr>
-              <a:t>6 Rigor                    0.481                    results/rigor/rigor.json :: psr_dsr &gt; rows &gt; [series=v2_oos] &gt; dsr &gt; N44/null &gt; dsr</a:t>
+              <a:t>6 Rigor                    0.997                    results/rigor/rigor.json :: psr_dsr &gt; rows &gt; [series=v2_is] &gt; dsr_min_N3410</a:t>
+            </a:r>
+          </a:p>
+          <a:p>
+            <a:pPr algn="l"/>
+            <a:r>
+              <a:rPr sz="700" b="0" i="0">
+                <a:solidFill>
+                  <a:srgbClr val="0C1A28"/>
+                </a:solidFill>
+                <a:latin typeface="Courier New"/>
+              </a:rPr>
+              <a:t>6 Rigor                    0.075                    results/rigor/rigor.json :: psr_dsr &gt; rows &gt; [series=v2_oos] &gt; dsr_min_N3410</a:t>
+            </a:r>
+          </a:p>
+          <a:p>
+            <a:pPr algn="l"/>
+            <a:r>
+              <a:rPr sz="700" b="0" i="0">
+                <a:solidFill>
+                  <a:srgbClr val="0C1A28"/>
+                </a:solidFill>
+                <a:latin typeface="Courier New"/>
+              </a:rPr>
+              <a:t>6 Rigor                    0.481                    results/rigor/rigor.json :: psr_dsr &gt; rows &gt; [series=v2_oos] &gt; dsr_min_N44</a:t>
             </a:r>
           </a:p>
           <a:p>
@@ -17388,6 +17535,30 @@
                 </a:solidFill>
                 <a:latin typeface="Courier New"/>
               </a:rPr>
+              <a:t>6 Rigor                    −0.22¢ / −0.52¢; burned  results/tier0_v3/blind.json :: sets &gt; u2_is|u2_oos|burned_oos &gt; primary &gt; per_share_c (+ burned CI)</a:t>
+            </a:r>
+          </a:p>
+          <a:p>
+            <a:pPr algn="l"/>
+            <a:r>
+              <a:rPr sz="700" b="0" i="0">
+                <a:solidFill>
+                  <a:srgbClr val="0C1A28"/>
+                </a:solidFill>
+                <a:latin typeface="Courier New"/>
+              </a:rPr>
+              <a:t>6 Rigor                    FAIL                     results/tier0_v3/blind.json :: verdicts &gt; U2 (primary, test b) &gt; overall; sets &gt; burned_oos &gt; reading &gt; verdict</a:t>
+            </a:r>
+          </a:p>
+          <a:p>
+            <a:pPr algn="l"/>
+            <a:r>
+              <a:rPr sz="700" b="0" i="0">
+                <a:solidFill>
+                  <a:srgbClr val="0C1A28"/>
+                </a:solidFill>
+                <a:latin typeface="Courier New"/>
+              </a:rPr>
               <a:t>6 Rigor                    3/3 months &gt; 0           results/summary.json :: oos &gt; h6_walkforward  [months net30_c &gt; 0]</a:t>
             </a:r>
           </a:p>
@@ -17497,114 +17668,6 @@
                 <a:latin typeface="Courier New"/>
               </a:rPr>
               <a:t>6 Rigor                    +1.87¢                   results/maker/oos.json :: primary &gt; value_c</a:t>
-            </a:r>
-          </a:p>
-          <a:p>
-            <a:pPr algn="l"/>
-            <a:r>
-              <a:rPr sz="700" b="0" i="0">
-                <a:solidFill>
-                  <a:srgbClr val="0C1A28"/>
-                </a:solidFill>
-                <a:latin typeface="Courier New"/>
-              </a:rPr>
-              <a:t>6 Rigor                    [−0.14, 3.86]            results/maker/oos.json :: primary &gt; ci95_c</a:t>
-            </a:r>
-          </a:p>
-          <a:p>
-            <a:pPr algn="l"/>
-            <a:r>
-              <a:rPr sz="700" b="0" i="0">
-                <a:solidFill>
-                  <a:srgbClr val="0C1A28"/>
-                </a:solidFill>
-                <a:latin typeface="Courier New"/>
-              </a:rPr>
-              <a:t>6 Rigor                    −$379                    results/maker/oos.json :: headline &gt; total_pnl_usd</a:t>
-            </a:r>
-          </a:p>
-          <a:p>
-            <a:pPr algn="l"/>
-            <a:r>
-              <a:rPr sz="700" b="0" i="0">
-                <a:solidFill>
-                  <a:srgbClr val="0C1A28"/>
-                </a:solidFill>
-                <a:latin typeface="Courier New"/>
-              </a:rPr>
-              <a:t>6 Rigor                    45                       results/oos_peeks.log  [non-empty lines]</a:t>
-            </a:r>
-          </a:p>
-          <a:p>
-            <a:pPr algn="l"/>
-            <a:r>
-              <a:rPr sz="700" b="0" i="0">
-                <a:solidFill>
-                  <a:srgbClr val="0C1A28"/>
-                </a:solidFill>
-                <a:latin typeface="Courier New"/>
-              </a:rPr>
-              <a:t>7 Tier-0 counterfactual    COUNTERFACTUAL label     results/tier0/results.json :: label  [must contain COUNTERFACTUAL; checked at build]</a:t>
-            </a:r>
-          </a:p>
-          <a:p>
-            <a:pPr algn="l"/>
-            <a:r>
-              <a:rPr sz="700" b="0" i="0">
-                <a:solidFill>
-                  <a:srgbClr val="0C1A28"/>
-                </a:solidFill>
-                <a:latin typeface="Courier New"/>
-              </a:rPr>
-              <a:t>7 Tier-0 counterfactual    +1.10¢                   results/tier0/results.json :: headline &gt; IS &gt; mean &gt; per_share_c</a:t>
-            </a:r>
-          </a:p>
-          <a:p>
-            <a:pPr algn="l"/>
-            <a:r>
-              <a:rPr sz="700" b="0" i="0">
-                <a:solidFill>
-                  <a:srgbClr val="0C1A28"/>
-                </a:solidFill>
-                <a:latin typeface="Courier New"/>
-              </a:rPr>
-              <a:t>7 Tier-0 counterfactual    0.82                     results/tier0/results.json :: headline &gt; IS &gt; mean &gt; per_share_ci95_c_lo</a:t>
-            </a:r>
-          </a:p>
-          <a:p>
-            <a:pPr algn="l"/>
-            <a:r>
-              <a:rPr sz="700" b="0" i="0">
-                <a:solidFill>
-                  <a:srgbClr val="0C1A28"/>
-                </a:solidFill>
-                <a:latin typeface="Courier New"/>
-              </a:rPr>
-              <a:t>7 Tier-0 counterfactual    1.38                     results/tier0/results.json :: headline &gt; IS &gt; mean &gt; per_share_ci95_c_hi</a:t>
-            </a:r>
-          </a:p>
-          <a:p>
-            <a:pPr algn="l"/>
-            <a:r>
-              <a:rPr sz="700" b="0" i="0">
-                <a:solidFill>
-                  <a:srgbClr val="0C1A28"/>
-                </a:solidFill>
-                <a:latin typeface="Courier New"/>
-              </a:rPr>
-              <a:t>7 Tier-0 counterfactual    11.4                     results/tier0/results.json :: headline &gt; IS &gt; mean &gt; sharpe_ann</a:t>
-            </a:r>
-          </a:p>
-          <a:p>
-            <a:pPr algn="l"/>
-            <a:r>
-              <a:rPr sz="700" b="0" i="0">
-                <a:solidFill>
-                  <a:srgbClr val="0C1A28"/>
-                </a:solidFill>
-                <a:latin typeface="Courier New"/>
-              </a:rPr>
-              <a:t>7 Tier-0 counterfactual    2.5                      results/tier0/results.json :: headline &gt; IS &gt; sd &gt; sharpe_ann</a:t>
             </a:r>
           </a:p>
         </p:txBody>
@@ -17798,7 +17861,7 @@
                 </a:solidFill>
                 <a:latin typeface="Arial" panose="020B0604020202020204" pitchFamily="34" charset="0"/>
               </a:rPr>
-              <a:t>HIDDEN MANIFEST  ·  PAGE 5 OF 10</a:t>
+              <a:t>HIDDEN MANIFEST  ·  PAGE 5 OF 11</a:t>
             </a:r>
           </a:p>
         </p:txBody>
@@ -17833,6 +17896,126 @@
                 </a:solidFill>
                 <a:latin typeface="Courier New"/>
               </a:rPr>
+              <a:t>6 Rigor                    [−0.14, 3.86]            results/maker/oos.json :: primary &gt; ci95_c</a:t>
+            </a:r>
+          </a:p>
+          <a:p>
+            <a:pPr algn="l"/>
+            <a:r>
+              <a:rPr sz="700" b="0" i="0">
+                <a:solidFill>
+                  <a:srgbClr val="0C1A28"/>
+                </a:solidFill>
+                <a:latin typeface="Courier New"/>
+              </a:rPr>
+              <a:t>6 Rigor                    −$379                    results/maker/oos.json :: headline &gt; total_pnl_usd</a:t>
+            </a:r>
+          </a:p>
+          <a:p>
+            <a:pPr algn="l"/>
+            <a:r>
+              <a:rPr sz="700" b="0" i="0">
+                <a:solidFill>
+                  <a:srgbClr val="0C1A28"/>
+                </a:solidFill>
+                <a:latin typeface="Courier New"/>
+              </a:rPr>
+              <a:t>6 Rigor                    2026-10-04 11:30 UTC     HYPOTHESIS_V2.md :: Forward test 'planned ~&lt;date&gt; UTC'</a:t>
+            </a:r>
+          </a:p>
+          <a:p>
+            <a:pPr algn="l"/>
+            <a:r>
+              <a:rPr sz="700" b="0" i="0">
+                <a:solidFill>
+                  <a:srgbClr val="0C1A28"/>
+                </a:solidFill>
+                <a:latin typeface="Courier New"/>
+              </a:rPr>
+              <a:t>6 Rigor                    65                       results/oos_peeks.log  [non-empty lines at build time]</a:t>
+            </a:r>
+          </a:p>
+          <a:p>
+            <a:pPr algn="l"/>
+            <a:r>
+              <a:rPr sz="700" b="0" i="0">
+                <a:solidFill>
+                  <a:srgbClr val="0C1A28"/>
+                </a:solidFill>
+                <a:latin typeface="Courier New"/>
+              </a:rPr>
+              <a:t>7 Tier-0 counterfactual    COUNTERFACTUAL label     results/tier0/results.json :: label  [must contain COUNTERFACTUAL; checked at build]</a:t>
+            </a:r>
+          </a:p>
+          <a:p>
+            <a:pPr algn="l"/>
+            <a:r>
+              <a:rPr sz="700" b="0" i="0">
+                <a:solidFill>
+                  <a:srgbClr val="0C1A28"/>
+                </a:solidFill>
+                <a:latin typeface="Courier New"/>
+              </a:rPr>
+              <a:t>7 Tier-0 counterfactual    +1.10¢                   results/tier0/results.json :: headline &gt; IS &gt; mean &gt; per_share_c</a:t>
+            </a:r>
+          </a:p>
+          <a:p>
+            <a:pPr algn="l"/>
+            <a:r>
+              <a:rPr sz="700" b="0" i="0">
+                <a:solidFill>
+                  <a:srgbClr val="0C1A28"/>
+                </a:solidFill>
+                <a:latin typeface="Courier New"/>
+              </a:rPr>
+              <a:t>7 Tier-0 counterfactual    0.82                     results/tier0/results.json :: headline &gt; IS &gt; mean &gt; per_share_ci95_c_lo</a:t>
+            </a:r>
+          </a:p>
+          <a:p>
+            <a:pPr algn="l"/>
+            <a:r>
+              <a:rPr sz="700" b="0" i="0">
+                <a:solidFill>
+                  <a:srgbClr val="0C1A28"/>
+                </a:solidFill>
+                <a:latin typeface="Courier New"/>
+              </a:rPr>
+              <a:t>7 Tier-0 counterfactual    1.38                     results/tier0/results.json :: headline &gt; IS &gt; mean &gt; per_share_ci95_c_hi</a:t>
+            </a:r>
+          </a:p>
+          <a:p>
+            <a:pPr algn="l"/>
+            <a:r>
+              <a:rPr sz="700" b="0" i="0">
+                <a:solidFill>
+                  <a:srgbClr val="0C1A28"/>
+                </a:solidFill>
+                <a:latin typeface="Courier New"/>
+              </a:rPr>
+              <a:t>7 Tier-0 counterfactual    11.4                     results/tier0/results.json :: headline &gt; IS &gt; mean &gt; sharpe_ann</a:t>
+            </a:r>
+          </a:p>
+          <a:p>
+            <a:pPr algn="l"/>
+            <a:r>
+              <a:rPr sz="700" b="0" i="0">
+                <a:solidFill>
+                  <a:srgbClr val="0C1A28"/>
+                </a:solidFill>
+                <a:latin typeface="Courier New"/>
+              </a:rPr>
+              <a:t>7 Tier-0 counterfactual    2.5                      results/tier0/results.json :: headline &gt; IS &gt; sd &gt; sharpe_ann</a:t>
+            </a:r>
+          </a:p>
+          <a:p>
+            <a:pPr algn="l"/>
+            <a:r>
+              <a:rPr sz="700" b="0" i="0">
+                <a:solidFill>
+                  <a:srgbClr val="0C1A28"/>
+                </a:solidFill>
+                <a:latin typeface="Courier New"/>
+              </a:rPr>
               <a:t>7 Tier-0 counterfactual    $88.8                    results/tier0/results.json :: headline &gt; IS &gt; mean &gt; pnl_per_day_usd</a:t>
             </a:r>
           </a:p>
@@ -18110,126 +18293,6 @@
                 <a:latin typeface="Courier New"/>
               </a:rPr>
               <a:t>7 Tier-0 counterfactual    +0.23¢                   results/tier0/results.json :: pnl_vs_t_reprice_minus_t_bounce &gt; burned_OOS &gt; tournament &gt; 0.6 &gt; per_share_c</a:t>
-            </a:r>
-          </a:p>
-          <a:p>
-            <a:pPr algn="l"/>
-            <a:r>
-              <a:rPr sz="700" b="0" i="0">
-                <a:solidFill>
-                  <a:srgbClr val="0C1A28"/>
-                </a:solidFill>
-                <a:latin typeface="Courier New"/>
-              </a:rPr>
-              <a:t>7 Tier-0 counterfactual    +0.67¢                   results/tier0/results.json :: pnl_vs_t_reprice_minus_t_bounce &gt; burned_OOS &gt; tournament &gt; 0.8 &gt; per_share_c</a:t>
-            </a:r>
-          </a:p>
-          <a:p>
-            <a:pPr algn="l"/>
-            <a:r>
-              <a:rPr sz="700" b="0" i="0">
-                <a:solidFill>
-                  <a:srgbClr val="0C1A28"/>
-                </a:solidFill>
-                <a:latin typeface="Courier New"/>
-              </a:rPr>
-              <a:t>7 Tier-0 counterfactual    +0.73¢                   results/tier0/results.json :: pnl_vs_t_reprice_minus_t_bounce &gt; burned_OOS &gt; tournament &gt; 1 &gt; per_share_c</a:t>
-            </a:r>
-          </a:p>
-          <a:p>
-            <a:pPr algn="l"/>
-            <a:r>
-              <a:rPr sz="700" b="0" i="0">
-                <a:solidFill>
-                  <a:srgbClr val="0C1A28"/>
-                </a:solidFill>
-                <a:latin typeface="Courier New"/>
-              </a:rPr>
-              <a:t>7 Tier-0 counterfactual    +0.78¢                   results/tier0/results.json :: pnl_vs_t_reprice_minus_t_bounce &gt; burned_OOS &gt; tournament &gt; 1.1 &gt; per_share_c</a:t>
-            </a:r>
-          </a:p>
-          <a:p>
-            <a:pPr algn="l"/>
-            <a:r>
-              <a:rPr sz="700" b="0" i="0">
-                <a:solidFill>
-                  <a:srgbClr val="0C1A28"/>
-                </a:solidFill>
-                <a:latin typeface="Courier New"/>
-              </a:rPr>
-              <a:t>7 Tier-0 counterfactual    +0.84¢                   results/tier0/results.json :: pnl_vs_t_reprice_minus_t_bounce &gt; burned_OOS &gt; tournament &gt; 1.2 &gt; per_share_c</a:t>
-            </a:r>
-          </a:p>
-          <a:p>
-            <a:pPr algn="l"/>
-            <a:r>
-              <a:rPr sz="700" b="0" i="0">
-                <a:solidFill>
-                  <a:srgbClr val="0C1A28"/>
-                </a:solidFill>
-                <a:latin typeface="Courier New"/>
-              </a:rPr>
-              <a:t>7 Tier-0 counterfactual    +0.83¢                   results/tier0/results.json :: pnl_vs_t_reprice_minus_t_bounce &gt; burned_OOS &gt; tournament &gt; 1.3 &gt; per_share_c</a:t>
-            </a:r>
-          </a:p>
-          <a:p>
-            <a:pPr algn="l"/>
-            <a:r>
-              <a:rPr sz="700" b="0" i="0">
-                <a:solidFill>
-                  <a:srgbClr val="0C1A28"/>
-                </a:solidFill>
-                <a:latin typeface="Courier New"/>
-              </a:rPr>
-              <a:t>7 Tier-0 counterfactual    +0.83¢                   results/tier0/results.json :: pnl_vs_t_reprice_minus_t_bounce &gt; burned_OOS &gt; tournament &gt; 1.35 &gt; per_share_c</a:t>
-            </a:r>
-          </a:p>
-          <a:p>
-            <a:pPr algn="l"/>
-            <a:r>
-              <a:rPr sz="700" b="0" i="0">
-                <a:solidFill>
-                  <a:srgbClr val="0C1A28"/>
-                </a:solidFill>
-                <a:latin typeface="Courier New"/>
-              </a:rPr>
-              <a:t>7 Tier-0 counterfactual    +0.83¢                   results/tier0/results.json :: pnl_vs_t_reprice_minus_t_bounce &gt; burned_OOS &gt; tournament &gt; 1.4 &gt; per_share_c</a:t>
-            </a:r>
-          </a:p>
-          <a:p>
-            <a:pPr algn="l"/>
-            <a:r>
-              <a:rPr sz="700" b="0" i="0">
-                <a:solidFill>
-                  <a:srgbClr val="0C1A28"/>
-                </a:solidFill>
-                <a:latin typeface="Courier New"/>
-              </a:rPr>
-              <a:t>7 Tier-0 counterfactual    +0.84¢                   results/tier0/results.json :: pnl_vs_t_reprice_minus_t_bounce &gt; burned_OOS &gt; tournament &gt; 1.5 &gt; per_share_c</a:t>
-            </a:r>
-          </a:p>
-          <a:p>
-            <a:pPr algn="l"/>
-            <a:r>
-              <a:rPr sz="700" b="0" i="0">
-                <a:solidFill>
-                  <a:srgbClr val="0C1A28"/>
-                </a:solidFill>
-                <a:latin typeface="Courier New"/>
-              </a:rPr>
-              <a:t>7 Tier-0 counterfactual    +0.93¢                   results/tier0/results.json :: pnl_vs_t_reprice_minus_t_bounce &gt; burned_OOS &gt; tournament &gt; 1.75 &gt; per_share_c</a:t>
-            </a:r>
-          </a:p>
-          <a:p>
-            <a:pPr algn="l"/>
-            <a:r>
-              <a:rPr sz="700" b="0" i="0">
-                <a:solidFill>
-                  <a:srgbClr val="0C1A28"/>
-                </a:solidFill>
-                <a:latin typeface="Courier New"/>
-              </a:rPr>
-              <a:t>7 Tier-0 counterfactual    +0.97¢                   results/tier0/results.json :: pnl_vs_t_reprice_minus_t_bounce &gt; burned_OOS &gt; tournament &gt; 2 &gt; per_share_c</a:t>
             </a:r>
           </a:p>
         </p:txBody>
@@ -18423,7 +18486,7 @@
                 </a:solidFill>
                 <a:latin typeface="Arial" panose="020B0604020202020204" pitchFamily="34" charset="0"/>
               </a:rPr>
-              <a:t>HIDDEN MANIFEST  ·  PAGE 6 OF 10</a:t>
+              <a:t>HIDDEN MANIFEST  ·  PAGE 6 OF 11</a:t>
             </a:r>
           </a:p>
         </p:txBody>
@@ -18458,6 +18521,126 @@
                 </a:solidFill>
                 <a:latin typeface="Courier New"/>
               </a:rPr>
+              <a:t>7 Tier-0 counterfactual    +0.67¢                   results/tier0/results.json :: pnl_vs_t_reprice_minus_t_bounce &gt; burned_OOS &gt; tournament &gt; 0.8 &gt; per_share_c</a:t>
+            </a:r>
+          </a:p>
+          <a:p>
+            <a:pPr algn="l"/>
+            <a:r>
+              <a:rPr sz="700" b="0" i="0">
+                <a:solidFill>
+                  <a:srgbClr val="0C1A28"/>
+                </a:solidFill>
+                <a:latin typeface="Courier New"/>
+              </a:rPr>
+              <a:t>7 Tier-0 counterfactual    +0.73¢                   results/tier0/results.json :: pnl_vs_t_reprice_minus_t_bounce &gt; burned_OOS &gt; tournament &gt; 1 &gt; per_share_c</a:t>
+            </a:r>
+          </a:p>
+          <a:p>
+            <a:pPr algn="l"/>
+            <a:r>
+              <a:rPr sz="700" b="0" i="0">
+                <a:solidFill>
+                  <a:srgbClr val="0C1A28"/>
+                </a:solidFill>
+                <a:latin typeface="Courier New"/>
+              </a:rPr>
+              <a:t>7 Tier-0 counterfactual    +0.78¢                   results/tier0/results.json :: pnl_vs_t_reprice_minus_t_bounce &gt; burned_OOS &gt; tournament &gt; 1.1 &gt; per_share_c</a:t>
+            </a:r>
+          </a:p>
+          <a:p>
+            <a:pPr algn="l"/>
+            <a:r>
+              <a:rPr sz="700" b="0" i="0">
+                <a:solidFill>
+                  <a:srgbClr val="0C1A28"/>
+                </a:solidFill>
+                <a:latin typeface="Courier New"/>
+              </a:rPr>
+              <a:t>7 Tier-0 counterfactual    +0.84¢                   results/tier0/results.json :: pnl_vs_t_reprice_minus_t_bounce &gt; burned_OOS &gt; tournament &gt; 1.2 &gt; per_share_c</a:t>
+            </a:r>
+          </a:p>
+          <a:p>
+            <a:pPr algn="l"/>
+            <a:r>
+              <a:rPr sz="700" b="0" i="0">
+                <a:solidFill>
+                  <a:srgbClr val="0C1A28"/>
+                </a:solidFill>
+                <a:latin typeface="Courier New"/>
+              </a:rPr>
+              <a:t>7 Tier-0 counterfactual    +0.83¢                   results/tier0/results.json :: pnl_vs_t_reprice_minus_t_bounce &gt; burned_OOS &gt; tournament &gt; 1.3 &gt; per_share_c</a:t>
+            </a:r>
+          </a:p>
+          <a:p>
+            <a:pPr algn="l"/>
+            <a:r>
+              <a:rPr sz="700" b="0" i="0">
+                <a:solidFill>
+                  <a:srgbClr val="0C1A28"/>
+                </a:solidFill>
+                <a:latin typeface="Courier New"/>
+              </a:rPr>
+              <a:t>7 Tier-0 counterfactual    +0.83¢                   results/tier0/results.json :: pnl_vs_t_reprice_minus_t_bounce &gt; burned_OOS &gt; tournament &gt; 1.35 &gt; per_share_c</a:t>
+            </a:r>
+          </a:p>
+          <a:p>
+            <a:pPr algn="l"/>
+            <a:r>
+              <a:rPr sz="700" b="0" i="0">
+                <a:solidFill>
+                  <a:srgbClr val="0C1A28"/>
+                </a:solidFill>
+                <a:latin typeface="Courier New"/>
+              </a:rPr>
+              <a:t>7 Tier-0 counterfactual    +0.83¢                   results/tier0/results.json :: pnl_vs_t_reprice_minus_t_bounce &gt; burned_OOS &gt; tournament &gt; 1.4 &gt; per_share_c</a:t>
+            </a:r>
+          </a:p>
+          <a:p>
+            <a:pPr algn="l"/>
+            <a:r>
+              <a:rPr sz="700" b="0" i="0">
+                <a:solidFill>
+                  <a:srgbClr val="0C1A28"/>
+                </a:solidFill>
+                <a:latin typeface="Courier New"/>
+              </a:rPr>
+              <a:t>7 Tier-0 counterfactual    +0.84¢                   results/tier0/results.json :: pnl_vs_t_reprice_minus_t_bounce &gt; burned_OOS &gt; tournament &gt; 1.5 &gt; per_share_c</a:t>
+            </a:r>
+          </a:p>
+          <a:p>
+            <a:pPr algn="l"/>
+            <a:r>
+              <a:rPr sz="700" b="0" i="0">
+                <a:solidFill>
+                  <a:srgbClr val="0C1A28"/>
+                </a:solidFill>
+                <a:latin typeface="Courier New"/>
+              </a:rPr>
+              <a:t>7 Tier-0 counterfactual    +0.93¢                   results/tier0/results.json :: pnl_vs_t_reprice_minus_t_bounce &gt; burned_OOS &gt; tournament &gt; 1.75 &gt; per_share_c</a:t>
+            </a:r>
+          </a:p>
+          <a:p>
+            <a:pPr algn="l"/>
+            <a:r>
+              <a:rPr sz="700" b="0" i="0">
+                <a:solidFill>
+                  <a:srgbClr val="0C1A28"/>
+                </a:solidFill>
+                <a:latin typeface="Courier New"/>
+              </a:rPr>
+              <a:t>7 Tier-0 counterfactual    +0.97¢                   results/tier0/results.json :: pnl_vs_t_reprice_minus_t_bounce &gt; burned_OOS &gt; tournament &gt; 2 &gt; per_share_c</a:t>
+            </a:r>
+          </a:p>
+          <a:p>
+            <a:pPr algn="l"/>
+            <a:r>
+              <a:rPr sz="700" b="0" i="0">
+                <a:solidFill>
+                  <a:srgbClr val="0C1A28"/>
+                </a:solidFill>
+                <a:latin typeface="Courier New"/>
+              </a:rPr>
               <a:t>7 Tier-0 counterfactual    +1.01¢                   results/tier0/results.json :: pnl_vs_t_reprice_minus_t_bounce &gt; burned_OOS &gt; tournament &gt; 2.5 &gt; per_share_c</a:t>
             </a:r>
           </a:p>
@@ -18662,199 +18845,79 @@
                 </a:solidFill>
                 <a:latin typeface="Courier New"/>
               </a:rPr>
-              <a:t>7 Tier-0 counterfactual    $88.8                    results/financials/financials.json :: headline &gt; 9 &gt; net_trading_usd_per_day  [row Tier-0 / IS]</a:t>
-            </a:r>
-          </a:p>
-          <a:p>
-            <a:pPr algn="l"/>
-            <a:r>
-              <a:rPr sz="700" b="0" i="0">
-                <a:solidFill>
-                  <a:srgbClr val="0C1A28"/>
-                </a:solidFill>
-                <a:latin typeface="Courier New"/>
-              </a:rPr>
-              <a:t>7 Tier-0 counterfactual    10                       results/tier0/results.json :: headline_scenario &gt; coverage</a:t>
-            </a:r>
-          </a:p>
-          <a:p>
-            <a:pPr algn="l"/>
-            <a:r>
-              <a:rPr sz="700" b="0" i="0">
-                <a:solidFill>
-                  <a:srgbClr val="0C1A28"/>
-                </a:solidFill>
-                <a:latin typeface="Courier New"/>
-              </a:rPr>
-              <a:t>8 Live engine              60 s                     results/engine/live_market_run.json :: seconds</a:t>
-            </a:r>
-          </a:p>
-          <a:p>
-            <a:pPr algn="l"/>
-            <a:r>
-              <a:rPr sz="700" b="0" i="0">
-                <a:solidFill>
-                  <a:srgbClr val="0C1A28"/>
-                </a:solidFill>
-                <a:latin typeface="Courier New"/>
-              </a:rPr>
-              <a:t>8 Live engine              7,785                    results/engine/live_market_run.json :: feed &gt; msgs</a:t>
-            </a:r>
-          </a:p>
-          <a:p>
-            <a:pPr algn="l"/>
-            <a:r>
-              <a:rPr sz="700" b="0" i="0">
-                <a:solidFill>
-                  <a:srgbClr val="0C1A28"/>
-                </a:solidFill>
-                <a:latin typeface="Courier New"/>
-              </a:rPr>
-              <a:t>8 Live engine              54                       results/engine/live_market_run.json :: feed &gt; assets</a:t>
-            </a:r>
-          </a:p>
-          <a:p>
-            <a:pPr algn="l"/>
-            <a:r>
-              <a:rPr sz="700" b="0" i="0">
-                <a:solidFill>
-                  <a:srgbClr val="0C1A28"/>
-                </a:solidFill>
-                <a:latin typeface="Courier New"/>
-              </a:rPr>
-              <a:t>8 Live engine              27                       results/engine/live_market_run.json :: markets_discovered</a:t>
-            </a:r>
-          </a:p>
-          <a:p>
-            <a:pPr algn="l"/>
-            <a:r>
-              <a:rPr sz="700" b="0" i="0">
-                <a:solidFill>
-                  <a:srgbClr val="0C1A28"/>
-                </a:solidFill>
-                <a:latin typeface="Courier New"/>
-              </a:rPr>
-              <a:t>8 Live engine              65                       results/engine/live_market_run.json :: feed &gt; latency &gt; p50_ms</a:t>
-            </a:r>
-          </a:p>
-          <a:p>
-            <a:pPr algn="l"/>
-            <a:r>
-              <a:rPr sz="700" b="0" i="0">
-                <a:solidFill>
-                  <a:srgbClr val="0C1A28"/>
-                </a:solidFill>
-                <a:latin typeface="Courier New"/>
-              </a:rPr>
-              <a:t>8 Live engine              84                       results/engine/live_market_run.json :: feed &gt; latency &gt; p95_ms</a:t>
-            </a:r>
-          </a:p>
-          <a:p>
-            <a:pPr algn="l"/>
-            <a:r>
-              <a:rPr sz="700" b="0" i="0">
-                <a:solidFill>
-                  <a:srgbClr val="0C1A28"/>
-                </a:solidFill>
-                <a:latin typeface="Courier New"/>
-              </a:rPr>
-              <a:t>8 Live engine              123                      results/engine/live_market_run.json :: feed &gt; latency &gt; p99_ms</a:t>
-            </a:r>
-          </a:p>
-          <a:p>
-            <a:pPr algn="l"/>
-            <a:r>
-              <a:rPr sz="700" b="0" i="0">
-                <a:solidFill>
-                  <a:srgbClr val="0C1A28"/>
-                </a:solidFill>
-                <a:latin typeface="Courier New"/>
-              </a:rPr>
-              <a:t>8 Live engine              0                        results/engine/live_market_run.json :: feed &gt; snapshots_mismatched</a:t>
-            </a:r>
-          </a:p>
-          <a:p>
-            <a:pPr algn="l"/>
-            <a:r>
-              <a:rPr sz="700" b="0" i="0">
-                <a:solidFill>
-                  <a:srgbClr val="0C1A28"/>
-                </a:solidFill>
-                <a:latin typeface="Courier New"/>
-              </a:rPr>
-              <a:t>8 Live engine              8                        results/engine/live_market_run.json :: feed &gt; snapshots_checked</a:t>
-            </a:r>
-          </a:p>
-          <a:p>
-            <a:pPr algn="l"/>
-            <a:r>
-              <a:rPr sz="700" b="0" i="0">
-                <a:solidFill>
-                  <a:srgbClr val="0C1A28"/>
-                </a:solidFill>
-                <a:latin typeface="Courier New"/>
-              </a:rPr>
-              <a:t>8 Live engine              0                        results/engine/live_market_run.json :: feed &gt; gaps</a:t>
-            </a:r>
-          </a:p>
-          <a:p>
-            <a:pPr algn="l"/>
-            <a:r>
-              <a:rPr sz="700" b="0" i="0">
-                <a:solidFill>
-                  <a:srgbClr val="0C1A28"/>
-                </a:solidFill>
-                <a:latin typeface="Courier New"/>
-              </a:rPr>
-              <a:t>8 Live engine              0                        results/engine/live_market_run.json :: reconnects</a:t>
-            </a:r>
-          </a:p>
-          <a:p>
-            <a:pPr algn="l"/>
-            <a:r>
-              <a:rPr sz="700" b="0" i="0">
-                <a:solidFill>
-                  <a:srgbClr val="0C1A28"/>
-                </a:solidFill>
-                <a:latin typeface="Courier New"/>
-              </a:rPr>
-              <a:t>8 Live engine              2 / 34                   results/engine/live_market_run.json :: what_if_tally  [sum SEND* / SKIP*]</a:t>
-            </a:r>
-          </a:p>
-          <a:p>
-            <a:pPr algn="l"/>
-            <a:r>
-              <a:rPr sz="700" b="0" i="0">
-                <a:solidFill>
-                  <a:srgbClr val="0C1A28"/>
-                </a:solidFill>
-                <a:latin typeface="Courier New"/>
-              </a:rPr>
-              <a:t>8 Live engine              0                        results/engine/live_market_run.json :: orders_sent</a:t>
-            </a:r>
-          </a:p>
-          <a:p>
-            <a:pPr algn="l"/>
-            <a:r>
-              <a:rPr sz="700" b="0" i="0">
-                <a:solidFill>
-                  <a:srgbClr val="0C1A28"/>
-                </a:solidFill>
-                <a:latin typeface="Courier New"/>
-              </a:rPr>
-              <a:t>8 Live engine              PAPER TRADING - LIVE MAR results/live/summary.json :: label</a:t>
-            </a:r>
-          </a:p>
-          <a:p>
-            <a:pPr algn="l"/>
-            <a:r>
-              <a:rPr sz="700" b="0" i="0">
-                <a:solidFill>
-                  <a:srgbClr val="0C1A28"/>
-                </a:solidFill>
-                <a:latin typeface="Courier New"/>
-              </a:rPr>
-              <a:t>8 Live engine              QUOTING (paper)          results/live/summary.json :: status</a:t>
+              <a:t>7 Tier-0 counterfactual    −0.22¢                   results/tier0_v3/blind.json :: sets &gt; u2_is &gt; primary &gt; per_share_c</a:t>
+            </a:r>
+          </a:p>
+          <a:p>
+            <a:pPr algn="l"/>
+            <a:r>
+              <a:rPr sz="700" b="0" i="0">
+                <a:solidFill>
+                  <a:srgbClr val="0C1A28"/>
+                </a:solidFill>
+                <a:latin typeface="Courier New"/>
+              </a:rPr>
+              <a:t>7 Tier-0 counterfactual    −0.52¢                   results/tier0_v3/blind.json :: sets &gt; u2_oos &gt; primary &gt; per_share_c</a:t>
+            </a:r>
+          </a:p>
+          <a:p>
+            <a:pPr algn="l"/>
+            <a:r>
+              <a:rPr sz="700" b="0" i="0">
+                <a:solidFill>
+                  <a:srgbClr val="0C1A28"/>
+                </a:solidFill>
+                <a:latin typeface="Courier New"/>
+              </a:rPr>
+              <a:t>7 Tier-0 counterfactual    +0.68¢                   results/tier0_v3/blind.json :: sets &gt; burned_oos &gt; primary &gt; per_share_c</a:t>
+            </a:r>
+          </a:p>
+          <a:p>
+            <a:pPr algn="l"/>
+            <a:r>
+              <a:rPr sz="700" b="0" i="0">
+                <a:solidFill>
+                  <a:srgbClr val="0C1A28"/>
+                </a:solidFill>
+                <a:latin typeface="Courier New"/>
+              </a:rPr>
+              <a:t>7 Tier-0 counterfactual    −0.44                    results/tier0_v3/blind.json :: sets &gt; burned_oos &gt; primary &gt; per_share_ci95_c_lo</a:t>
+            </a:r>
+          </a:p>
+          <a:p>
+            <a:pPr algn="l"/>
+            <a:r>
+              <a:rPr sz="700" b="0" i="0">
+                <a:solidFill>
+                  <a:srgbClr val="0C1A28"/>
+                </a:solidFill>
+                <a:latin typeface="Courier New"/>
+              </a:rPr>
+              <a:t>7 Tier-0 counterfactual    1.74                     results/tier0_v3/blind.json :: sets &gt; burned_oos &gt; primary &gt; per_share_ci95_c_hi</a:t>
+            </a:r>
+          </a:p>
+          <a:p>
+            <a:pPr algn="l"/>
+            <a:r>
+              <a:rPr sz="700" b="0" i="0">
+                <a:solidFill>
+                  <a:srgbClr val="0C1A28"/>
+                </a:solidFill>
+                <a:latin typeface="Courier New"/>
+              </a:rPr>
+              <a:t>7 Tier-0 counterfactual    FAIL                     results/tier0_v3/blind.json :: verdicts &gt; U2 (primary, test b) &gt; overall</a:t>
+            </a:r>
+          </a:p>
+          <a:p>
+            <a:pPr algn="l"/>
+            <a:r>
+              <a:rPr sz="700" b="0" i="0">
+                <a:solidFill>
+                  <a:srgbClr val="0C1A28"/>
+                </a:solidFill>
+                <a:latin typeface="Courier New"/>
+              </a:rPr>
+              <a:t>7 Tier-0 counterfactual    FAIL                     results/tier0_v3/blind.json :: sets &gt; burned_oos &gt; reading &gt; verdict</a:t>
             </a:r>
           </a:p>
         </p:txBody>
@@ -19048,7 +19111,7 @@
                 </a:solidFill>
                 <a:latin typeface="Arial" panose="020B0604020202020204" pitchFamily="34" charset="0"/>
               </a:rPr>
-              <a:t>HIDDEN MANIFEST  ·  PAGE 7 OF 10</a:t>
+              <a:t>HIDDEN MANIFEST  ·  PAGE 7 OF 11</a:t>
             </a:r>
           </a:p>
         </p:txBody>
@@ -19083,19 +19146,247 @@
                 </a:solidFill>
                 <a:latin typeface="Courier New"/>
               </a:rPr>
-              <a:t>8 Live engine              20261003T193534Z         results/live/summary.json :: run</a:t>
-            </a:r>
-          </a:p>
-          <a:p>
-            <a:pPr algn="l"/>
-            <a:r>
-              <a:rPr sz="700" b="0" i="0">
-                <a:solidFill>
-                  <a:srgbClr val="0C1A28"/>
-                </a:solidFill>
-                <a:latin typeface="Courier New"/>
-              </a:rPr>
-              <a:t>8 Live engine              2026-10-03 20:19 UTC     results/live/summary.json :: now</a:t>
+              <a:t>7 Tier-0 counterfactual    $88.8                    results/financials/financials.json :: headline &gt; 9 &gt; net_trading_usd_per_day  [row Tier-0 / IS]</a:t>
+            </a:r>
+          </a:p>
+          <a:p>
+            <a:pPr algn="l"/>
+            <a:r>
+              <a:rPr sz="700" b="0" i="0">
+                <a:solidFill>
+                  <a:srgbClr val="0C1A28"/>
+                </a:solidFill>
+                <a:latin typeface="Courier New"/>
+              </a:rPr>
+              <a:t>7 Tier-0 counterfactual    10                       results/tier0/results.json :: headline_scenario &gt; coverage</a:t>
+            </a:r>
+          </a:p>
+          <a:p>
+            <a:pPr algn="l"/>
+            <a:r>
+              <a:rPr sz="700" b="0" i="0">
+                <a:solidFill>
+                  <a:srgbClr val="0C1A28"/>
+                </a:solidFill>
+                <a:latin typeface="Courier New"/>
+              </a:rPr>
+              <a:t>8 Live engine              60 s                     results/engine/live_market_run.json :: seconds</a:t>
+            </a:r>
+          </a:p>
+          <a:p>
+            <a:pPr algn="l"/>
+            <a:r>
+              <a:rPr sz="700" b="0" i="0">
+                <a:solidFill>
+                  <a:srgbClr val="0C1A28"/>
+                </a:solidFill>
+                <a:latin typeface="Courier New"/>
+              </a:rPr>
+              <a:t>8 Live engine              7,785                    results/engine/live_market_run.json :: feed &gt; msgs</a:t>
+            </a:r>
+          </a:p>
+          <a:p>
+            <a:pPr algn="l"/>
+            <a:r>
+              <a:rPr sz="700" b="0" i="0">
+                <a:solidFill>
+                  <a:srgbClr val="0C1A28"/>
+                </a:solidFill>
+                <a:latin typeface="Courier New"/>
+              </a:rPr>
+              <a:t>8 Live engine              54                       results/engine/live_market_run.json :: feed &gt; assets</a:t>
+            </a:r>
+          </a:p>
+          <a:p>
+            <a:pPr algn="l"/>
+            <a:r>
+              <a:rPr sz="700" b="0" i="0">
+                <a:solidFill>
+                  <a:srgbClr val="0C1A28"/>
+                </a:solidFill>
+                <a:latin typeface="Courier New"/>
+              </a:rPr>
+              <a:t>8 Live engine              27                       results/engine/live_market_run.json :: markets_discovered</a:t>
+            </a:r>
+          </a:p>
+          <a:p>
+            <a:pPr algn="l"/>
+            <a:r>
+              <a:rPr sz="700" b="0" i="0">
+                <a:solidFill>
+                  <a:srgbClr val="0C1A28"/>
+                </a:solidFill>
+                <a:latin typeface="Courier New"/>
+              </a:rPr>
+              <a:t>8 Live engine              65                       results/engine/live_market_run.json :: feed &gt; latency &gt; p50_ms</a:t>
+            </a:r>
+          </a:p>
+          <a:p>
+            <a:pPr algn="l"/>
+            <a:r>
+              <a:rPr sz="700" b="0" i="0">
+                <a:solidFill>
+                  <a:srgbClr val="0C1A28"/>
+                </a:solidFill>
+                <a:latin typeface="Courier New"/>
+              </a:rPr>
+              <a:t>8 Live engine              84                       results/engine/live_market_run.json :: feed &gt; latency &gt; p95_ms</a:t>
+            </a:r>
+          </a:p>
+          <a:p>
+            <a:pPr algn="l"/>
+            <a:r>
+              <a:rPr sz="700" b="0" i="0">
+                <a:solidFill>
+                  <a:srgbClr val="0C1A28"/>
+                </a:solidFill>
+                <a:latin typeface="Courier New"/>
+              </a:rPr>
+              <a:t>8 Live engine              123                      results/engine/live_market_run.json :: feed &gt; latency &gt; p99_ms</a:t>
+            </a:r>
+          </a:p>
+          <a:p>
+            <a:pPr algn="l"/>
+            <a:r>
+              <a:rPr sz="700" b="0" i="0">
+                <a:solidFill>
+                  <a:srgbClr val="0C1A28"/>
+                </a:solidFill>
+                <a:latin typeface="Courier New"/>
+              </a:rPr>
+              <a:t>8 Live engine              0                        results/engine/live_market_run.json :: feed &gt; snapshots_mismatched</a:t>
+            </a:r>
+          </a:p>
+          <a:p>
+            <a:pPr algn="l"/>
+            <a:r>
+              <a:rPr sz="700" b="0" i="0">
+                <a:solidFill>
+                  <a:srgbClr val="0C1A28"/>
+                </a:solidFill>
+                <a:latin typeface="Courier New"/>
+              </a:rPr>
+              <a:t>8 Live engine              8                        results/engine/live_market_run.json :: feed &gt; snapshots_checked</a:t>
+            </a:r>
+          </a:p>
+          <a:p>
+            <a:pPr algn="l"/>
+            <a:r>
+              <a:rPr sz="700" b="0" i="0">
+                <a:solidFill>
+                  <a:srgbClr val="0C1A28"/>
+                </a:solidFill>
+                <a:latin typeface="Courier New"/>
+              </a:rPr>
+              <a:t>8 Live engine              0                        results/engine/live_market_run.json :: feed &gt; gaps</a:t>
+            </a:r>
+          </a:p>
+          <a:p>
+            <a:pPr algn="l"/>
+            <a:r>
+              <a:rPr sz="700" b="0" i="0">
+                <a:solidFill>
+                  <a:srgbClr val="0C1A28"/>
+                </a:solidFill>
+                <a:latin typeface="Courier New"/>
+              </a:rPr>
+              <a:t>8 Live engine              0                        results/engine/live_market_run.json :: reconnects</a:t>
+            </a:r>
+          </a:p>
+          <a:p>
+            <a:pPr algn="l"/>
+            <a:r>
+              <a:rPr sz="700" b="0" i="0">
+                <a:solidFill>
+                  <a:srgbClr val="0C1A28"/>
+                </a:solidFill>
+                <a:latin typeface="Courier New"/>
+              </a:rPr>
+              <a:t>8 Live engine              2 / 34                   results/engine/live_market_run.json :: what_if_tally  [sum SEND* / SKIP*]</a:t>
+            </a:r>
+          </a:p>
+          <a:p>
+            <a:pPr algn="l"/>
+            <a:r>
+              <a:rPr sz="700" b="0" i="0">
+                <a:solidFill>
+                  <a:srgbClr val="0C1A28"/>
+                </a:solidFill>
+                <a:latin typeface="Courier New"/>
+              </a:rPr>
+              <a:t>8 Live engine              0                        results/engine/live_market_run.json :: orders_sent</a:t>
+            </a:r>
+          </a:p>
+          <a:p>
+            <a:pPr algn="l"/>
+            <a:r>
+              <a:rPr sz="700" b="0" i="0">
+                <a:solidFill>
+                  <a:srgbClr val="0C1A28"/>
+                </a:solidFill>
+                <a:latin typeface="Courier New"/>
+              </a:rPr>
+              <a:t>8 Live engine              PAPER TRADING - LIVE MAR results/live/summary.json :: label</a:t>
+            </a:r>
+          </a:p>
+          <a:p>
+            <a:pPr algn="l"/>
+            <a:r>
+              <a:rPr sz="700" b="0" i="0">
+                <a:solidFill>
+                  <a:srgbClr val="0C1A28"/>
+                </a:solidFill>
+                <a:latin typeface="Courier New"/>
+              </a:rPr>
+              <a:t>8 Live engine              WARMING UP               results/live/summary.json :: status, run, started_process, now, counters  [+ STOPPED_&lt;run&gt; marker and file age; 1970 'now' or…</a:t>
+            </a:r>
+          </a:p>
+          <a:p>
+            <a:pPr algn="l"/>
+            <a:r>
+              <a:rPr sz="700" b="0" i="0">
+                <a:solidFill>
+                  <a:srgbClr val="0C1A28"/>
+                </a:solidFill>
+                <a:latin typeface="Courier New"/>
+              </a:rPr>
+              <a:t>8 Live engine              warm-up: waiting for tra results/live/summary.json :: status</a:t>
+            </a:r>
+          </a:p>
+          <a:p>
+            <a:pPr algn="l"/>
+            <a:r>
+              <a:rPr sz="700" b="0" i="0">
+                <a:solidFill>
+                  <a:srgbClr val="0C1A28"/>
+                </a:solidFill>
+                <a:latin typeface="Courier New"/>
+              </a:rPr>
+              <a:t>8 Live engine              20261003T204812Z         results/live/summary.json :: run</a:t>
+            </a:r>
+          </a:p>
+          <a:p>
+            <a:pPr algn="l"/>
+            <a:r>
+              <a:rPr sz="700" b="0" i="0">
+                <a:solidFill>
+                  <a:srgbClr val="0C1A28"/>
+                </a:solidFill>
+                <a:latin typeface="Courier New"/>
+              </a:rPr>
+              <a:t>8 Live engine              2026-10-03 20:48 UTC     results/live/summary.json :: started_process</a:t>
+            </a:r>
+          </a:p>
+          <a:p>
+            <a:pPr algn="l"/>
+            <a:r>
+              <a:rPr sz="700" b="0" i="0">
+                <a:solidFill>
+                  <a:srgbClr val="0C1A28"/>
+                </a:solidFill>
+                <a:latin typeface="Courier New"/>
+              </a:rPr>
+              <a:t>8 Live engine              2026-10-03 21:32 UTC     results/live/summary.json :: now  [file modification time when now is 1970]</a:t>
             </a:r>
           </a:p>
           <a:p>
@@ -19155,30 +19446,6 @@
                 </a:solidFill>
                 <a:latin typeface="Courier New"/>
               </a:rPr>
-              <a:t>8 Live engine              25,982                   results/live/summary.json :: counters  [sum msg_*]</a:t>
-            </a:r>
-          </a:p>
-          <a:p>
-            <a:pPr algn="l"/>
-            <a:r>
-              <a:rPr sz="700" b="0" i="0">
-                <a:solidFill>
-                  <a:srgbClr val="0C1A28"/>
-                </a:solidFill>
-                <a:latin typeface="Courier New"/>
-              </a:rPr>
-              <a:t>8 Live engine              0                        results/live/summary.json :: matches_in_play</a:t>
-            </a:r>
-          </a:p>
-          <a:p>
-            <a:pPr algn="l"/>
-            <a:r>
-              <a:rPr sz="700" b="0" i="0">
-                <a:solidFill>
-                  <a:srgbClr val="0C1A28"/>
-                </a:solidFill>
-                <a:latin typeface="Courier New"/>
-              </a:rPr>
               <a:t>9 Risk + liquidity + finan $1,000                   results/engine/demo_run.json :: risk_config &gt; max_order_usd</a:t>
             </a:r>
           </a:p>
@@ -19276,210 +19543,6 @@
                 <a:latin typeface="Courier New"/>
               </a:rPr>
               <a:t>9 Risk + liquidity + finan $9.4k                    results/v2/causal.json :: causal/is_eval/slip0.0 &gt; peak_locked_usd</a:t>
-            </a:r>
-          </a:p>
-          <a:p>
-            <a:pPr algn="l"/>
-            <a:r>
-              <a:rPr sz="700" b="0" i="0">
-                <a:solidFill>
-                  <a:srgbClr val="0C1A28"/>
-                </a:solidFill>
-                <a:latin typeface="Courier New"/>
-              </a:rPr>
-              <a:t>9 Risk + liquidity + finan $7.2k                    results/v2/note_metrics.json :: is &gt; usd_traded_per_day</a:t>
-            </a:r>
-          </a:p>
-          <a:p>
-            <a:pPr algn="l"/>
-            <a:r>
-              <a:rPr sz="700" b="0" i="0">
-                <a:solidFill>
-                  <a:srgbClr val="0C1A28"/>
-                </a:solidFill>
-                <a:latin typeface="Courier New"/>
-              </a:rPr>
-              <a:t>9 Risk + liquidity + finan 18.1%                    results/risk/risk_stats.json :: liquidity_capital &gt; v2_share_of_fast_tier_usd_is_pct  [max over months]</a:t>
-            </a:r>
-          </a:p>
-          <a:p>
-            <a:pPr algn="l"/>
-            <a:r>
-              <a:rPr sz="700" b="0" i="0">
-                <a:solidFill>
-                  <a:srgbClr val="0C1A28"/>
-                </a:solidFill>
-                <a:latin typeface="Courier New"/>
-              </a:rPr>
-              <a:t>9 Risk + liquidity + finan $82.3k                   results/financials/financials.json :: strategies &gt; v2 &gt; ceiling &gt; IS &gt; fast_tier_qualified_print_usd_per_day</a:t>
-            </a:r>
-          </a:p>
-          <a:p>
-            <a:pPr algn="l"/>
-            <a:r>
-              <a:rPr sz="700" b="0" i="0">
-                <a:solidFill>
-                  <a:srgbClr val="0C1A28"/>
-                </a:solidFill>
-                <a:latin typeface="Courier New"/>
-              </a:rPr>
-              <a:t>9 Risk + liquidity + finan 41.7%                    results/risk/risk_stats.json :: concentration &gt; is_eval &gt; wallet &gt; top1_share_of_net_pct</a:t>
-            </a:r>
-          </a:p>
-          <a:p>
-            <a:pPr algn="l"/>
-            <a:r>
-              <a:rPr sz="700" b="0" i="0">
-                <a:solidFill>
-                  <a:srgbClr val="0C1A28"/>
-                </a:solidFill>
-                <a:latin typeface="Courier New"/>
-              </a:rPr>
-              <a:t>9 Risk + liquidity + finan +$196                    results/financials/financials.json :: headline &gt; 0 &gt; net_trading_usd_per_day  [row v2 ( / IS]</a:t>
-            </a:r>
-          </a:p>
-          <a:p>
-            <a:pPr algn="l"/>
-            <a:r>
-              <a:rPr sz="700" b="0" i="0">
-                <a:solidFill>
-                  <a:srgbClr val="0C1A28"/>
-                </a:solidFill>
-                <a:latin typeface="Courier New"/>
-              </a:rPr>
-              <a:t>9 Risk + liquidity + finan $167                     results/financials/financials.json :: headline &gt; 0 &gt; fixed_cost_usd_per_day &gt; central  [row v2 ( / IS]</a:t>
-            </a:r>
-          </a:p>
-          <a:p>
-            <a:pPr algn="l"/>
-            <a:r>
-              <a:rPr sz="700" b="0" i="0">
-                <a:solidFill>
-                  <a:srgbClr val="0C1A28"/>
-                </a:solidFill>
-                <a:latin typeface="Courier New"/>
-              </a:rPr>
-              <a:t>9 Risk + liquidity + finan +$29                     results/financials/financials.json :: headline &gt; 0 &gt; net_after_costs_usd_per_day &gt; central  [row v2 ( / IS]</a:t>
-            </a:r>
-          </a:p>
-          <a:p>
-            <a:pPr algn="l"/>
-            <a:r>
-              <a:rPr sz="700" b="0" i="0">
-                <a:solidFill>
-                  <a:srgbClr val="0C1A28"/>
-                </a:solidFill>
-                <a:latin typeface="Courier New"/>
-              </a:rPr>
-              <a:t>9 Risk + liquidity + finan +$179                    results/financials/financials.json :: headline &gt; 1 &gt; net_trading_usd_per_day  [row v2 ( / IS, current 1 s / 5% regime only]</a:t>
-            </a:r>
-          </a:p>
-          <a:p>
-            <a:pPr algn="l"/>
-            <a:r>
-              <a:rPr sz="700" b="0" i="0">
-                <a:solidFill>
-                  <a:srgbClr val="0C1A28"/>
-                </a:solidFill>
-                <a:latin typeface="Courier New"/>
-              </a:rPr>
-              <a:t>9 Risk + liquidity + finan $167                     results/financials/financials.json :: headline &gt; 1 &gt; fixed_cost_usd_per_day &gt; central  [row v2 ( / IS, current 1 s / 5% regim…</a:t>
-            </a:r>
-          </a:p>
-          <a:p>
-            <a:pPr algn="l"/>
-            <a:r>
-              <a:rPr sz="700" b="0" i="0">
-                <a:solidFill>
-                  <a:srgbClr val="0C1A28"/>
-                </a:solidFill>
-                <a:latin typeface="Courier New"/>
-              </a:rPr>
-              <a:t>9 Risk + liquidity + finan +$12                     results/financials/financials.json :: headline &gt; 1 &gt; net_after_costs_usd_per_day &gt; central  [row v2 ( / IS, current 1 s / 5% …</a:t>
-            </a:r>
-          </a:p>
-          <a:p>
-            <a:pPr algn="l"/>
-            <a:r>
-              <a:rPr sz="700" b="0" i="0">
-                <a:solidFill>
-                  <a:srgbClr val="0C1A28"/>
-                </a:solidFill>
-                <a:latin typeface="Courier New"/>
-              </a:rPr>
-              <a:t>9 Risk + liquidity + finan +$92                     results/financials/financials.json :: headline &gt; 2 &gt; net_trading_usd_per_day  [row v2 ( / OOS (burned, non-blind)]</a:t>
-            </a:r>
-          </a:p>
-          <a:p>
-            <a:pPr algn="l"/>
-            <a:r>
-              <a:rPr sz="700" b="0" i="0">
-                <a:solidFill>
-                  <a:srgbClr val="0C1A28"/>
-                </a:solidFill>
-                <a:latin typeface="Courier New"/>
-              </a:rPr>
-              <a:t>9 Risk + liquidity + finan $167                     results/financials/financials.json :: headline &gt; 2 &gt; fixed_cost_usd_per_day &gt; central  [row v2 ( / OOS (burned, non-blind)]</a:t>
-            </a:r>
-          </a:p>
-          <a:p>
-            <a:pPr algn="l"/>
-            <a:r>
-              <a:rPr sz="700" b="0" i="0">
-                <a:solidFill>
-                  <a:srgbClr val="0C1A28"/>
-                </a:solidFill>
-                <a:latin typeface="Courier New"/>
-              </a:rPr>
-              <a:t>9 Risk + liquidity + finan −$75                     results/financials/financials.json :: headline &gt; 2 &gt; net_after_costs_usd_per_day &gt; central  [row v2 ( / OOS (burned, non-blin…</a:t>
-            </a:r>
-          </a:p>
-          <a:p>
-            <a:pPr algn="l"/>
-            <a:r>
-              <a:rPr sz="700" b="0" i="0">
-                <a:solidFill>
-                  <a:srgbClr val="0C1A28"/>
-                </a:solidFill>
-                <a:latin typeface="Courier New"/>
-              </a:rPr>
-              <a:t>9 Risk + liquidity + finan −$9                      results/financials/financials.json :: headline &gt; 13 &gt; net_trading_usd_per_day  [row Maker / OOS (blind)]</a:t>
-            </a:r>
-          </a:p>
-          <a:p>
-            <a:pPr algn="l"/>
-            <a:r>
-              <a:rPr sz="700" b="0" i="0">
-                <a:solidFill>
-                  <a:srgbClr val="0C1A28"/>
-                </a:solidFill>
-                <a:latin typeface="Courier New"/>
-              </a:rPr>
-              <a:t>9 Risk + liquidity + finan $3                       results/financials/financials.json :: headline &gt; 13 &gt; fixed_cost_usd_per_day &gt; central  [row Maker / OOS (blind)]</a:t>
-            </a:r>
-          </a:p>
-          <a:p>
-            <a:pPr algn="l"/>
-            <a:r>
-              <a:rPr sz="700" b="0" i="0">
-                <a:solidFill>
-                  <a:srgbClr val="0C1A28"/>
-                </a:solidFill>
-                <a:latin typeface="Courier New"/>
-              </a:rPr>
-              <a:t>9 Risk + liquidity + finan −$12                     results/financials/financials.json :: headline &gt; 13 &gt; net_after_costs_usd_per_day &gt; central  [row Maker / OOS (blind)]</a:t>
-            </a:r>
-          </a:p>
-          <a:p>
-            <a:pPr algn="l"/>
-            <a:r>
-              <a:rPr sz="700" b="0" i="0">
-                <a:solidFill>
-                  <a:srgbClr val="0C1A28"/>
-                </a:solidFill>
-                <a:latin typeface="Courier New"/>
-              </a:rPr>
-              <a:t>9 Risk + liquidity + finan +$89                     results/financials/financials.json :: headline &gt; 9 &gt; net_trading_usd_per_day  [row Tier-0 / IS]</a:t>
             </a:r>
           </a:p>
         </p:txBody>
@@ -19673,7 +19736,7 @@
                 </a:solidFill>
                 <a:latin typeface="Arial" panose="020B0604020202020204" pitchFamily="34" charset="0"/>
               </a:rPr>
-              <a:t>HIDDEN MANIFEST  ·  PAGE 8 OF 10</a:t>
+              <a:t>HIDDEN MANIFEST  ·  PAGE 8 OF 11</a:t>
             </a:r>
           </a:p>
         </p:txBody>
@@ -19708,6 +19771,210 @@
                 </a:solidFill>
                 <a:latin typeface="Courier New"/>
               </a:rPr>
+              <a:t>9 Risk + liquidity + finan $7.2k                    results/v2/note_metrics.json :: is &gt; usd_traded_per_day</a:t>
+            </a:r>
+          </a:p>
+          <a:p>
+            <a:pPr algn="l"/>
+            <a:r>
+              <a:rPr sz="700" b="0" i="0">
+                <a:solidFill>
+                  <a:srgbClr val="0C1A28"/>
+                </a:solidFill>
+                <a:latin typeface="Courier New"/>
+              </a:rPr>
+              <a:t>9 Risk + liquidity + finan 18.1%                    results/risk/risk_stats.json :: liquidity_capital &gt; v2_share_of_fast_tier_usd_is_pct  [max over months]</a:t>
+            </a:r>
+          </a:p>
+          <a:p>
+            <a:pPr algn="l"/>
+            <a:r>
+              <a:rPr sz="700" b="0" i="0">
+                <a:solidFill>
+                  <a:srgbClr val="0C1A28"/>
+                </a:solidFill>
+                <a:latin typeface="Courier New"/>
+              </a:rPr>
+              <a:t>9 Risk + liquidity + finan $82.3k                   results/financials/financials.json :: strategies &gt; v2 &gt; ceiling &gt; IS &gt; fast_tier_qualified_print_usd_per_day</a:t>
+            </a:r>
+          </a:p>
+          <a:p>
+            <a:pPr algn="l"/>
+            <a:r>
+              <a:rPr sz="700" b="0" i="0">
+                <a:solidFill>
+                  <a:srgbClr val="0C1A28"/>
+                </a:solidFill>
+                <a:latin typeface="Courier New"/>
+              </a:rPr>
+              <a:t>9 Risk + liquidity + finan 41.7%                    results/risk/risk_stats.json :: concentration &gt; is_eval &gt; wallet &gt; top1_share_of_net_pct</a:t>
+            </a:r>
+          </a:p>
+          <a:p>
+            <a:pPr algn="l"/>
+            <a:r>
+              <a:rPr sz="700" b="0" i="0">
+                <a:solidFill>
+                  <a:srgbClr val="0C1A28"/>
+                </a:solidFill>
+                <a:latin typeface="Courier New"/>
+              </a:rPr>
+              <a:t>9 Risk + liquidity + finan +$196                    results/financials/financials.json :: headline &gt; 0 &gt; net_trading_usd_per_day  [row v2 ( / IS]</a:t>
+            </a:r>
+          </a:p>
+          <a:p>
+            <a:pPr algn="l"/>
+            <a:r>
+              <a:rPr sz="700" b="0" i="0">
+                <a:solidFill>
+                  <a:srgbClr val="0C1A28"/>
+                </a:solidFill>
+                <a:latin typeface="Courier New"/>
+              </a:rPr>
+              <a:t>9 Risk + liquidity + finan $167                     results/financials/financials.json :: headline &gt; 0 &gt; fixed_cost_usd_per_day &gt; central  [row v2 ( / IS]</a:t>
+            </a:r>
+          </a:p>
+          <a:p>
+            <a:pPr algn="l"/>
+            <a:r>
+              <a:rPr sz="700" b="0" i="0">
+                <a:solidFill>
+                  <a:srgbClr val="0C1A28"/>
+                </a:solidFill>
+                <a:latin typeface="Courier New"/>
+              </a:rPr>
+              <a:t>9 Risk + liquidity + finan +$29                     results/financials/financials.json :: headline &gt; 0 &gt; net_after_costs_usd_per_day &gt; central  [row v2 ( / IS]</a:t>
+            </a:r>
+          </a:p>
+          <a:p>
+            <a:pPr algn="l"/>
+            <a:r>
+              <a:rPr sz="700" b="0" i="0">
+                <a:solidFill>
+                  <a:srgbClr val="0C1A28"/>
+                </a:solidFill>
+                <a:latin typeface="Courier New"/>
+              </a:rPr>
+              <a:t>9 Risk + liquidity + finan +$179                    results/financials/financials.json :: headline &gt; 1 &gt; net_trading_usd_per_day  [row v2 ( / IS, current 1 s / 5% regime only]</a:t>
+            </a:r>
+          </a:p>
+          <a:p>
+            <a:pPr algn="l"/>
+            <a:r>
+              <a:rPr sz="700" b="0" i="0">
+                <a:solidFill>
+                  <a:srgbClr val="0C1A28"/>
+                </a:solidFill>
+                <a:latin typeface="Courier New"/>
+              </a:rPr>
+              <a:t>9 Risk + liquidity + finan $167                     results/financials/financials.json :: headline &gt; 1 &gt; fixed_cost_usd_per_day &gt; central  [row v2 ( / IS, current 1 s / 5% regim…</a:t>
+            </a:r>
+          </a:p>
+          <a:p>
+            <a:pPr algn="l"/>
+            <a:r>
+              <a:rPr sz="700" b="0" i="0">
+                <a:solidFill>
+                  <a:srgbClr val="0C1A28"/>
+                </a:solidFill>
+                <a:latin typeface="Courier New"/>
+              </a:rPr>
+              <a:t>9 Risk + liquidity + finan +$12                     results/financials/financials.json :: headline &gt; 1 &gt; net_after_costs_usd_per_day &gt; central  [row v2 ( / IS, current 1 s / 5% …</a:t>
+            </a:r>
+          </a:p>
+          <a:p>
+            <a:pPr algn="l"/>
+            <a:r>
+              <a:rPr sz="700" b="0" i="0">
+                <a:solidFill>
+                  <a:srgbClr val="0C1A28"/>
+                </a:solidFill>
+                <a:latin typeface="Courier New"/>
+              </a:rPr>
+              <a:t>9 Risk + liquidity + finan +$92                     results/financials/financials.json :: headline &gt; 2 &gt; net_trading_usd_per_day  [row v2 ( / OOS (burned, non-blind)]</a:t>
+            </a:r>
+          </a:p>
+          <a:p>
+            <a:pPr algn="l"/>
+            <a:r>
+              <a:rPr sz="700" b="0" i="0">
+                <a:solidFill>
+                  <a:srgbClr val="0C1A28"/>
+                </a:solidFill>
+                <a:latin typeface="Courier New"/>
+              </a:rPr>
+              <a:t>9 Risk + liquidity + finan $167                     results/financials/financials.json :: headline &gt; 2 &gt; fixed_cost_usd_per_day &gt; central  [row v2 ( / OOS (burned, non-blind)]</a:t>
+            </a:r>
+          </a:p>
+          <a:p>
+            <a:pPr algn="l"/>
+            <a:r>
+              <a:rPr sz="700" b="0" i="0">
+                <a:solidFill>
+                  <a:srgbClr val="0C1A28"/>
+                </a:solidFill>
+                <a:latin typeface="Courier New"/>
+              </a:rPr>
+              <a:t>9 Risk + liquidity + finan −$75                     results/financials/financials.json :: headline &gt; 2 &gt; net_after_costs_usd_per_day &gt; central  [row v2 ( / OOS (burned, non-blin…</a:t>
+            </a:r>
+          </a:p>
+          <a:p>
+            <a:pPr algn="l"/>
+            <a:r>
+              <a:rPr sz="700" b="0" i="0">
+                <a:solidFill>
+                  <a:srgbClr val="0C1A28"/>
+                </a:solidFill>
+                <a:latin typeface="Courier New"/>
+              </a:rPr>
+              <a:t>9 Risk + liquidity + finan −$9                      results/financials/financials.json :: headline &gt; 13 &gt; net_trading_usd_per_day  [row Maker / OOS (blind)]</a:t>
+            </a:r>
+          </a:p>
+          <a:p>
+            <a:pPr algn="l"/>
+            <a:r>
+              <a:rPr sz="700" b="0" i="0">
+                <a:solidFill>
+                  <a:srgbClr val="0C1A28"/>
+                </a:solidFill>
+                <a:latin typeface="Courier New"/>
+              </a:rPr>
+              <a:t>9 Risk + liquidity + finan $3                       results/financials/financials.json :: headline &gt; 13 &gt; fixed_cost_usd_per_day &gt; central  [row Maker / OOS (blind)]</a:t>
+            </a:r>
+          </a:p>
+          <a:p>
+            <a:pPr algn="l"/>
+            <a:r>
+              <a:rPr sz="700" b="0" i="0">
+                <a:solidFill>
+                  <a:srgbClr val="0C1A28"/>
+                </a:solidFill>
+                <a:latin typeface="Courier New"/>
+              </a:rPr>
+              <a:t>9 Risk + liquidity + finan −$12                     results/financials/financials.json :: headline &gt; 13 &gt; net_after_costs_usd_per_day &gt; central  [row Maker / OOS (blind)]</a:t>
+            </a:r>
+          </a:p>
+          <a:p>
+            <a:pPr algn="l"/>
+            <a:r>
+              <a:rPr sz="700" b="0" i="0">
+                <a:solidFill>
+                  <a:srgbClr val="0C1A28"/>
+                </a:solidFill>
+                <a:latin typeface="Courier New"/>
+              </a:rPr>
+              <a:t>9 Risk + liquidity + finan +$89                     results/financials/financials.json :: headline &gt; 9 &gt; net_trading_usd_per_day  [row Tier-0 / IS]</a:t>
+            </a:r>
+          </a:p>
+          <a:p>
+            <a:pPr algn="l"/>
+            <a:r>
+              <a:rPr sz="700" b="0" i="0">
+                <a:solidFill>
+                  <a:srgbClr val="0C1A28"/>
+                </a:solidFill>
+                <a:latin typeface="Courier New"/>
+              </a:rPr>
               <a:t>9 Risk + liquidity + finan $4,149                   results/financials/financials.json :: headline &gt; 9 &gt; fixed_cost_usd_per_day &gt; central  [row Tier-0 / IS]</a:t>
             </a:r>
           </a:p>
@@ -19744,6 +20011,18 @@
                 </a:solidFill>
                 <a:latin typeface="Courier New"/>
               </a:rPr>
+              <a:t>10 Close                   2026-10-04 11:30 UTC     HYPOTHESIS_V2.md :: Forward test 'planned ~&lt;date&gt; UTC'</a:t>
+            </a:r>
+          </a:p>
+          <a:p>
+            <a:pPr algn="l"/>
+            <a:r>
+              <a:rPr sz="700" b="0" i="0">
+                <a:solidFill>
+                  <a:srgbClr val="0C1A28"/>
+                </a:solidFill>
+                <a:latin typeface="Courier New"/>
+              </a:rPr>
               <a:t>10 Close                   pending                  results/v2/forward.json  [forward test]</a:t>
             </a:r>
           </a:p>
@@ -19756,7 +20035,7 @@
                 </a:solidFill>
                 <a:latin typeface="Courier New"/>
               </a:rPr>
-              <a:t>10 Close                   QUOTING (paper)          results/live/summary.json :: status</a:t>
+              <a:t>10 Close                   warming up (started 2026 results/live/summary.json :: status, run, started_process, now, counters  [+ STOPPED_&lt;run&gt; marker and file age; 1970 'now' or…</a:t>
             </a:r>
           </a:p>
           <a:p>
@@ -19889,222 +20168,6 @@
                 <a:latin typeface="Courier New"/>
               </a:rPr>
               <a:t>12 Q2                      11,307                   results/expand/results.json :: universe &gt; u2_markets</a:t>
-            </a:r>
-          </a:p>
-          <a:p>
-            <a:pPr algn="l"/>
-            <a:r>
-              <a:rPr sz="700" b="0" i="0">
-                <a:solidFill>
-                  <a:srgbClr val="0C1A28"/>
-                </a:solidFill>
-                <a:latin typeface="Courier New"/>
-              </a:rPr>
-              <a:t>12 Q2                      45                       results/oos_peeks.log  [non-empty lines]</a:t>
-            </a:r>
-          </a:p>
-          <a:p>
-            <a:pPr algn="l"/>
-            <a:r>
-              <a:rPr sz="700" b="0" i="0">
-                <a:solidFill>
-                  <a:srgbClr val="0C1A28"/>
-                </a:solidFill>
-                <a:latin typeface="Courier New"/>
-              </a:rPr>
-              <a:t>13 Q3                      16.8                     results/summary.json :: v2_onset_superseded &gt; is_eval &gt; sharpe_ann</a:t>
-            </a:r>
-          </a:p>
-          <a:p>
-            <a:pPr algn="l"/>
-            <a:r>
-              <a:rPr sz="700" b="0" i="0">
-                <a:solidFill>
-                  <a:srgbClr val="0C1A28"/>
-                </a:solidFill>
-                <a:latin typeface="Courier New"/>
-              </a:rPr>
-              <a:t>13 Q3                      14.5                     results/v2/causal.json :: causal/is_eval/slip0.0 &gt; sharpe_ann</a:t>
-            </a:r>
-          </a:p>
-          <a:p>
-            <a:pPr algn="l"/>
-            <a:r>
-              <a:rPr sz="700" b="0" i="0">
-                <a:solidFill>
-                  <a:srgbClr val="0C1A28"/>
-                </a:solidFill>
-                <a:latin typeface="Courier New"/>
-              </a:rPr>
-              <a:t>13 Q3                      270                      results/v2/causal.json :: causal/is_eval/slip0.0  [n_trades / days]</a:t>
-            </a:r>
-          </a:p>
-          <a:p>
-            <a:pPr algn="l"/>
-            <a:r>
-              <a:rPr sz="700" b="0" i="0">
-                <a:solidFill>
-                  <a:srgbClr val="0C1A28"/>
-                </a:solidFill>
-                <a:latin typeface="Courier New"/>
-              </a:rPr>
-              <a:t>13 Q3                      0.53                     results/v2/note_metrics.json :: is &gt; skew</a:t>
-            </a:r>
-          </a:p>
-          <a:p>
-            <a:pPr algn="l"/>
-            <a:r>
-              <a:rPr sz="700" b="0" i="0">
-                <a:solidFill>
-                  <a:srgbClr val="0C1A28"/>
-                </a:solidFill>
-                <a:latin typeface="Courier New"/>
-              </a:rPr>
-              <a:t>13 Q3                      4.3                      results/v2/note_metrics.json :: is &gt; kurtosis_pearson</a:t>
-            </a:r>
-          </a:p>
-          <a:p>
-            <a:pPr algn="l"/>
-            <a:r>
-              <a:rPr sz="700" b="0" i="0">
-                <a:solidFill>
-                  <a:srgbClr val="0C1A28"/>
-                </a:solidFill>
-                <a:latin typeface="Courier New"/>
-              </a:rPr>
-              <a:t>13 Q3                      −1.9%                    results/v2/note_metrics.json :: is &gt; worst_day_pct</a:t>
-            </a:r>
-          </a:p>
-          <a:p>
-            <a:pPr algn="l"/>
-            <a:r>
-              <a:rPr sz="700" b="0" i="0">
-                <a:solidFill>
-                  <a:srgbClr val="0C1A28"/>
-                </a:solidFill>
-                <a:latin typeface="Courier New"/>
-              </a:rPr>
-              <a:t>13 Q3                      9.8                      results/v2/causal.json :: causal/is_eval/slip0.005 &gt; sharpe_ann</a:t>
-            </a:r>
-          </a:p>
-          <a:p>
-            <a:pPr algn="l"/>
-            <a:r>
-              <a:rPr sz="700" b="0" i="0">
-                <a:solidFill>
-                  <a:srgbClr val="0C1A28"/>
-                </a:solidFill>
-                <a:latin typeface="Courier New"/>
-              </a:rPr>
-              <a:t>13 Q3                      4.3                      results/v2/causal.json :: causal/is_eval/slip0.01 &gt; sharpe_ann</a:t>
-            </a:r>
-          </a:p>
-          <a:p>
-            <a:pPr algn="l"/>
-            <a:r>
-              <a:rPr sz="700" b="0" i="0">
-                <a:solidFill>
-                  <a:srgbClr val="0C1A28"/>
-                </a:solidFill>
-                <a:latin typeface="Courier New"/>
-              </a:rPr>
-              <a:t>13 Q3                      3.0                      results/v2/note_metrics.json :: is &gt; costs_x2_sharpe</a:t>
-            </a:r>
-          </a:p>
-          <a:p>
-            <a:pPr algn="l"/>
-            <a:r>
-              <a:rPr sz="700" b="0" i="0">
-                <a:solidFill>
-                  <a:srgbClr val="0C1A28"/>
-                </a:solidFill>
-                <a:latin typeface="Courier New"/>
-              </a:rPr>
-              <a:t>13 Q3                      6.7                      results/v2/causal.json :: causal/burned_oos/slip0.0 &gt; sharpe_ann</a:t>
-            </a:r>
-          </a:p>
-          <a:p>
-            <a:pPr algn="l"/>
-            <a:r>
-              <a:rPr sz="700" b="0" i="0">
-                <a:solidFill>
-                  <a:srgbClr val="0C1A28"/>
-                </a:solidFill>
-                <a:latin typeface="Courier New"/>
-              </a:rPr>
-              <a:t>13 Q3                      [1.9, 12.3]              results/rigor/rigor.json :: bootstrap &gt; v2_oos &gt; sharpe_ann_ci95</a:t>
-            </a:r>
-          </a:p>
-          <a:p>
-            <a:pPr algn="l"/>
-            <a:r>
-              <a:rPr sz="700" b="0" i="0">
-                <a:solidFill>
-                  <a:srgbClr val="0C1A28"/>
-                </a:solidFill>
-                <a:latin typeface="Courier New"/>
-              </a:rPr>
-              <a:t>13 Q3                      100                      results/engine/demo_run.json :: risk_config &gt; net_cap_shares</a:t>
-            </a:r>
-          </a:p>
-          <a:p>
-            <a:pPr algn="l"/>
-            <a:r>
-              <a:rPr sz="700" b="0" i="0">
-                <a:solidFill>
-                  <a:srgbClr val="0C1A28"/>
-                </a:solidFill>
-                <a:latin typeface="Courier New"/>
-              </a:rPr>
-              <a:t>14 Q4                      120 bps                  results/v2/note_metrics.json :: is &gt; fee_bps_of_notional</a:t>
-            </a:r>
-          </a:p>
-          <a:p>
-            <a:pPr algn="l"/>
-            <a:r>
-              <a:rPr sz="700" b="0" i="0">
-                <a:solidFill>
-                  <a:srgbClr val="0C1A28"/>
-                </a:solidFill>
-                <a:latin typeface="Courier New"/>
-              </a:rPr>
-              <a:t>14 Q4                      179 bps                  results/v2/note_metrics.json :: burned_oos &gt; fee_bps_of_notional</a:t>
-            </a:r>
-          </a:p>
-          <a:p>
-            <a:pPr algn="l"/>
-            <a:r>
-              <a:rPr sz="700" b="0" i="0">
-                <a:solidFill>
-                  <a:srgbClr val="0C1A28"/>
-                </a:solidFill>
-                <a:latin typeface="Courier New"/>
-              </a:rPr>
-              <a:t>14 Q4                      +0.77¢                   results/v2/cost_stress.json :: is_eval/fee_x2 &gt; per_share_c</a:t>
-            </a:r>
-          </a:p>
-          <a:p>
-            <a:pPr algn="l"/>
-            <a:r>
-              <a:rPr sz="700" b="0" i="0">
-                <a:solidFill>
-                  <a:srgbClr val="0C1A28"/>
-                </a:solidFill>
-                <a:latin typeface="Courier New"/>
-              </a:rPr>
-              <a:t>14 Q4                      7/7                      results/v2/cost_stress.json :: is_eval/fee_x2  [months_positive/months_total]</a:t>
-            </a:r>
-          </a:p>
-          <a:p>
-            <a:pPr algn="l"/>
-            <a:r>
-              <a:rPr sz="700" b="0" i="0">
-                <a:solidFill>
-                  <a:srgbClr val="0C1A28"/>
-                </a:solidFill>
-                <a:latin typeface="Courier New"/>
-              </a:rPr>
-              <a:t>14 Q4                      −0.34¢                   results/v2/cost_stress.json :: burned_oos/fee_x2 &gt; per_share_c</a:t>
             </a:r>
           </a:p>
         </p:txBody>
@@ -20298,7 +20361,7 @@
                 </a:solidFill>
                 <a:latin typeface="Arial" panose="020B0604020202020204" pitchFamily="34" charset="0"/>
               </a:rPr>
-              <a:t>HIDDEN MANIFEST  ·  PAGE 9 OF 10</a:t>
+              <a:t>HIDDEN MANIFEST  ·  PAGE 9 OF 11</a:t>
             </a:r>
           </a:p>
         </p:txBody>
@@ -20333,6 +20396,234 @@
                 </a:solidFill>
                 <a:latin typeface="Courier New"/>
               </a:rPr>
+              <a:t>12 Q2                      65                       results/oos_peeks.log  [non-empty lines]</a:t>
+            </a:r>
+          </a:p>
+          <a:p>
+            <a:pPr algn="l"/>
+            <a:r>
+              <a:rPr sz="700" b="0" i="0">
+                <a:solidFill>
+                  <a:srgbClr val="0C1A28"/>
+                </a:solidFill>
+                <a:latin typeface="Courier New"/>
+              </a:rPr>
+              <a:t>12 Q2                      2026-10-04 11:30 UTC     HYPOTHESIS_V2.md :: Forward test 'planned ~&lt;date&gt; UTC'</a:t>
+            </a:r>
+          </a:p>
+          <a:p>
+            <a:pPr algn="l"/>
+            <a:r>
+              <a:rPr sz="700" b="0" i="0">
+                <a:solidFill>
+                  <a:srgbClr val="0C1A28"/>
+                </a:solidFill>
+                <a:latin typeface="Courier New"/>
+              </a:rPr>
+              <a:t>13 Q3                      16.8                     results/summary.json :: v2_onset_superseded &gt; is_eval &gt; sharpe_ann</a:t>
+            </a:r>
+          </a:p>
+          <a:p>
+            <a:pPr algn="l"/>
+            <a:r>
+              <a:rPr sz="700" b="0" i="0">
+                <a:solidFill>
+                  <a:srgbClr val="0C1A28"/>
+                </a:solidFill>
+                <a:latin typeface="Courier New"/>
+              </a:rPr>
+              <a:t>13 Q3                      14.5                     results/v2/causal.json :: causal/is_eval/slip0.0 &gt; sharpe_ann</a:t>
+            </a:r>
+          </a:p>
+          <a:p>
+            <a:pPr algn="l"/>
+            <a:r>
+              <a:rPr sz="700" b="0" i="0">
+                <a:solidFill>
+                  <a:srgbClr val="0C1A28"/>
+                </a:solidFill>
+                <a:latin typeface="Courier New"/>
+              </a:rPr>
+              <a:t>13 Q3                      270                      results/v2/causal.json :: causal/is_eval/slip0.0  [n_trades / days]</a:t>
+            </a:r>
+          </a:p>
+          <a:p>
+            <a:pPr algn="l"/>
+            <a:r>
+              <a:rPr sz="700" b="0" i="0">
+                <a:solidFill>
+                  <a:srgbClr val="0C1A28"/>
+                </a:solidFill>
+                <a:latin typeface="Courier New"/>
+              </a:rPr>
+              <a:t>13 Q3                      0.53                     results/v2/note_metrics.json :: is &gt; skew</a:t>
+            </a:r>
+          </a:p>
+          <a:p>
+            <a:pPr algn="l"/>
+            <a:r>
+              <a:rPr sz="700" b="0" i="0">
+                <a:solidFill>
+                  <a:srgbClr val="0C1A28"/>
+                </a:solidFill>
+                <a:latin typeface="Courier New"/>
+              </a:rPr>
+              <a:t>13 Q3                      4.3                      results/v2/note_metrics.json :: is &gt; kurtosis_pearson</a:t>
+            </a:r>
+          </a:p>
+          <a:p>
+            <a:pPr algn="l"/>
+            <a:r>
+              <a:rPr sz="700" b="0" i="0">
+                <a:solidFill>
+                  <a:srgbClr val="0C1A28"/>
+                </a:solidFill>
+                <a:latin typeface="Courier New"/>
+              </a:rPr>
+              <a:t>13 Q3                      −1.9%                    results/v2/note_metrics.json :: is &gt; worst_day_pct</a:t>
+            </a:r>
+          </a:p>
+          <a:p>
+            <a:pPr algn="l"/>
+            <a:r>
+              <a:rPr sz="700" b="0" i="0">
+                <a:solidFill>
+                  <a:srgbClr val="0C1A28"/>
+                </a:solidFill>
+                <a:latin typeface="Courier New"/>
+              </a:rPr>
+              <a:t>13 Q3                      9.8                      results/v2/causal.json :: causal/is_eval/slip0.005 &gt; sharpe_ann</a:t>
+            </a:r>
+          </a:p>
+          <a:p>
+            <a:pPr algn="l"/>
+            <a:r>
+              <a:rPr sz="700" b="0" i="0">
+                <a:solidFill>
+                  <a:srgbClr val="0C1A28"/>
+                </a:solidFill>
+                <a:latin typeface="Courier New"/>
+              </a:rPr>
+              <a:t>13 Q3                      4.3                      results/v2/causal.json :: causal/is_eval/slip0.01 &gt; sharpe_ann</a:t>
+            </a:r>
+          </a:p>
+          <a:p>
+            <a:pPr algn="l"/>
+            <a:r>
+              <a:rPr sz="700" b="0" i="0">
+                <a:solidFill>
+                  <a:srgbClr val="0C1A28"/>
+                </a:solidFill>
+                <a:latin typeface="Courier New"/>
+              </a:rPr>
+              <a:t>13 Q3                      3.0                      results/v2/note_metrics.json :: is &gt; costs_x2_sharpe</a:t>
+            </a:r>
+          </a:p>
+          <a:p>
+            <a:pPr algn="l"/>
+            <a:r>
+              <a:rPr sz="700" b="0" i="0">
+                <a:solidFill>
+                  <a:srgbClr val="0C1A28"/>
+                </a:solidFill>
+                <a:latin typeface="Courier New"/>
+              </a:rPr>
+              <a:t>13 Q3                      6.7                      results/v2/causal.json :: causal/burned_oos/slip0.0 &gt; sharpe_ann</a:t>
+            </a:r>
+          </a:p>
+          <a:p>
+            <a:pPr algn="l"/>
+            <a:r>
+              <a:rPr sz="700" b="0" i="0">
+                <a:solidFill>
+                  <a:srgbClr val="0C1A28"/>
+                </a:solidFill>
+                <a:latin typeface="Courier New"/>
+              </a:rPr>
+              <a:t>13 Q3                      [1.9, 12.3]              results/rigor/rigor.json :: bootstrap &gt; v2_oos &gt; sharpe_ann_ci95</a:t>
+            </a:r>
+          </a:p>
+          <a:p>
+            <a:pPr algn="l"/>
+            <a:r>
+              <a:rPr sz="700" b="0" i="0">
+                <a:solidFill>
+                  <a:srgbClr val="0C1A28"/>
+                </a:solidFill>
+                <a:latin typeface="Courier New"/>
+              </a:rPr>
+              <a:t>13 Q3                      100                      results/engine/demo_run.json :: risk_config &gt; net_cap_shares</a:t>
+            </a:r>
+          </a:p>
+          <a:p>
+            <a:pPr algn="l"/>
+            <a:r>
+              <a:rPr sz="700" b="0" i="0">
+                <a:solidFill>
+                  <a:srgbClr val="0C1A28"/>
+                </a:solidFill>
+                <a:latin typeface="Courier New"/>
+              </a:rPr>
+              <a:t>14 Q4                      120 bps                  results/v2/note_metrics.json :: is &gt; fee_bps_of_notional</a:t>
+            </a:r>
+          </a:p>
+          <a:p>
+            <a:pPr algn="l"/>
+            <a:r>
+              <a:rPr sz="700" b="0" i="0">
+                <a:solidFill>
+                  <a:srgbClr val="0C1A28"/>
+                </a:solidFill>
+                <a:latin typeface="Courier New"/>
+              </a:rPr>
+              <a:t>14 Q4                      179 bps                  results/v2/note_metrics.json :: burned_oos &gt; fee_bps_of_notional</a:t>
+            </a:r>
+          </a:p>
+          <a:p>
+            <a:pPr algn="l"/>
+            <a:r>
+              <a:rPr sz="700" b="0" i="0">
+                <a:solidFill>
+                  <a:srgbClr val="0C1A28"/>
+                </a:solidFill>
+                <a:latin typeface="Courier New"/>
+              </a:rPr>
+              <a:t>14 Q4                      +0.77¢                   results/v2/cost_stress.json :: is_eval/fee_x2 &gt; per_share_c</a:t>
+            </a:r>
+          </a:p>
+          <a:p>
+            <a:pPr algn="l"/>
+            <a:r>
+              <a:rPr sz="700" b="0" i="0">
+                <a:solidFill>
+                  <a:srgbClr val="0C1A28"/>
+                </a:solidFill>
+                <a:latin typeface="Courier New"/>
+              </a:rPr>
+              <a:t>14 Q4                      7/7                      results/v2/cost_stress.json :: is_eval/fee_x2  [months_positive/months_total]</a:t>
+            </a:r>
+          </a:p>
+          <a:p>
+            <a:pPr algn="l"/>
+            <a:r>
+              <a:rPr sz="700" b="0" i="0">
+                <a:solidFill>
+                  <a:srgbClr val="0C1A28"/>
+                </a:solidFill>
+                <a:latin typeface="Courier New"/>
+              </a:rPr>
+              <a:t>14 Q4                      −0.34¢                   results/v2/cost_stress.json :: burned_oos/fee_x2 &gt; per_share_c</a:t>
+            </a:r>
+          </a:p>
+          <a:p>
+            <a:pPr algn="l"/>
+            <a:r>
+              <a:rPr sz="700" b="0" i="0">
+                <a:solidFill>
+                  <a:srgbClr val="0C1A28"/>
+                </a:solidFill>
+                <a:latin typeface="Courier New"/>
+              </a:rPr>
               <a:t>14 Q4                      [−0.86, 0.19]            results/v2/cost_stress.json :: burned_oos/fee_x2 &gt; per_share_ci_c</a:t>
             </a:r>
           </a:p>
@@ -20502,234 +20793,6 @@
                 <a:latin typeface="Courier New"/>
               </a:rPr>
               <a:t>16 Q6                      [1.79, 2.53]             results/expand/results.json :: fast_minus_others_u2 &gt; u2_oos &gt; ci_c</a:t>
-            </a:r>
-          </a:p>
-          <a:p>
-            <a:pPr algn="l"/>
-            <a:r>
-              <a:rPr sz="700" b="0" i="0">
-                <a:solidFill>
-                  <a:srgbClr val="0C1A28"/>
-                </a:solidFill>
-                <a:latin typeface="Courier New"/>
-              </a:rPr>
-              <a:t>16 Q6                      3.1 s                    results/tier0/results.json :: timing &gt; calibrated_stamp_lag_s (inference)</a:t>
-            </a:r>
-          </a:p>
-          <a:p>
-            <a:pPr algn="l"/>
-            <a:r>
-              <a:rPr sz="700" b="0" i="0">
-                <a:solidFill>
-                  <a:srgbClr val="0C1A28"/>
-                </a:solidFill>
-                <a:latin typeface="Courier New"/>
-              </a:rPr>
-              <a:t>17 Q7                      3,386                    results/rigor/rigor.json :: psr_dsr &gt; N &gt; all_NOTE_s8</a:t>
-            </a:r>
-          </a:p>
-          <a:p>
-            <a:pPr algn="l"/>
-            <a:r>
-              <a:rPr sz="700" b="0" i="0">
-                <a:solidFill>
-                  <a:srgbClr val="0C1A28"/>
-                </a:solidFill>
-                <a:latin typeface="Courier New"/>
-              </a:rPr>
-              <a:t>17 Q7                      44                       results/rigor/rigor.json :: psr_dsr &gt; N &gt; H1_H6</a:t>
-            </a:r>
-          </a:p>
-          <a:p>
-            <a:pPr algn="l"/>
-            <a:r>
-              <a:rPr sz="700" b="0" i="0">
-                <a:solidFill>
-                  <a:srgbClr val="0C1A28"/>
-                </a:solidFill>
-                <a:latin typeface="Courier New"/>
-              </a:rPr>
-              <a:t>17 Q7                      40                       results/rigor/rigor.json :: sharpe_moments &gt; v2_oos &gt; T_days</a:t>
-            </a:r>
-          </a:p>
-          <a:p>
-            <a:pPr algn="l"/>
-            <a:r>
-              <a:rPr sz="700" b="0" i="0">
-                <a:solidFill>
-                  <a:srgbClr val="0C1A28"/>
-                </a:solidFill>
-                <a:latin typeface="Courier New"/>
-              </a:rPr>
-              <a:t>17 Q7                      1.00                     results/rigor/rigor.json :: psr_dsr &gt; rows &gt; [series=v2_is] &gt; dsr &gt; N3386/sizing_grid_55 &gt; dsr</a:t>
-            </a:r>
-          </a:p>
-          <a:p>
-            <a:pPr algn="l"/>
-            <a:r>
-              <a:rPr sz="700" b="0" i="0">
-                <a:solidFill>
-                  <a:srgbClr val="0C1A28"/>
-                </a:solidFill>
-                <a:latin typeface="Courier New"/>
-              </a:rPr>
-              <a:t>17 Q7                      0.481                    results/rigor/rigor.json :: psr_dsr &gt; rows &gt; [series=v2_oos] &gt; dsr &gt; N44/null &gt; dsr</a:t>
-            </a:r>
-          </a:p>
-          <a:p>
-            <a:pPr algn="l"/>
-            <a:r>
-              <a:rPr sz="700" b="0" i="0">
-                <a:solidFill>
-                  <a:srgbClr val="0C1A28"/>
-                </a:solidFill>
-                <a:latin typeface="Courier New"/>
-              </a:rPr>
-              <a:t>17 Q7                      0.075                    results/rigor/rigor.json :: psr_dsr &gt; rows &gt; [series=v2_oos] &gt; dsr &gt; N3386/null &gt; dsr</a:t>
-            </a:r>
-          </a:p>
-          <a:p>
-            <a:pPr algn="l"/>
-            <a:r>
-              <a:rPr sz="700" b="0" i="0">
-                <a:solidFill>
-                  <a:srgbClr val="0C1A28"/>
-                </a:solidFill>
-                <a:latin typeface="Courier New"/>
-              </a:rPr>
-              <a:t>17 Q7                      0.0%                     results/rigor/rigor.json :: pbo_cscv &gt; sizing_55_res_actual_sharpe &gt; pbo</a:t>
-            </a:r>
-          </a:p>
-          <a:p>
-            <a:pPr algn="l"/>
-            <a:r>
-              <a:rPr sz="700" b="0" i="0">
-                <a:solidFill>
-                  <a:srgbClr val="0C1A28"/>
-                </a:solidFill>
-                <a:latin typeface="Courier New"/>
-              </a:rPr>
-              <a:t>17 Q7                      15.4%                    results/rigor/rigor.json :: pbo_cscv &gt; lowloss_24_sharpe &gt; pbo</a:t>
-            </a:r>
-          </a:p>
-          <a:p>
-            <a:pPr algn="l"/>
-            <a:r>
-              <a:rPr sz="700" b="0" i="0">
-                <a:solidFill>
-                  <a:srgbClr val="0C1A28"/>
-                </a:solidFill>
-                <a:latin typeface="Courier New"/>
-              </a:rPr>
-              <a:t>17 Q7                      42.0%                    results/rigor/rigor.json :: pbo_cscv &gt; lowloss_24_selection_rule &gt; pbo</a:t>
-            </a:r>
-          </a:p>
-          <a:p>
-            <a:pPr algn="l"/>
-            <a:r>
-              <a:rPr sz="700" b="0" i="0">
-                <a:solidFill>
-                  <a:srgbClr val="0C1A28"/>
-                </a:solidFill>
-                <a:latin typeface="Courier New"/>
-              </a:rPr>
-              <a:t>18 Q8                      2,617                    results/v2/note_metrics.json :: holdout &gt; oos_matches</a:t>
-            </a:r>
-          </a:p>
-          <a:p>
-            <a:pPr algn="l"/>
-            <a:r>
-              <a:rPr sz="700" b="0" i="0">
-                <a:solidFill>
-                  <a:srgbClr val="0C1A28"/>
-                </a:solidFill>
-                <a:latin typeface="Courier New"/>
-              </a:rPr>
-              <a:t>18 Q8                      13,084                   results/v2/note_metrics.json :: holdout &gt; matches</a:t>
-            </a:r>
-          </a:p>
-          <a:p>
-            <a:pPr algn="l"/>
-            <a:r>
-              <a:rPr sz="700" b="0" i="0">
-                <a:solidFill>
-                  <a:srgbClr val="0C1A28"/>
-                </a:solidFill>
-                <a:latin typeface="Courier New"/>
-              </a:rPr>
-              <a:t>18 Q8                      21%                      results/v2/note_metrics.json :: holdout &gt; oos_share_of_volume</a:t>
-            </a:r>
-          </a:p>
-          <a:p>
-            <a:pPr algn="l"/>
-            <a:r>
-              <a:rPr sz="700" b="0" i="0">
-                <a:solidFill>
-                  <a:srgbClr val="0C1A28"/>
-                </a:solidFill>
-                <a:latin typeface="Courier New"/>
-              </a:rPr>
-              <a:t>18 Q8                      39                       results/v2/note_metrics.json :: holdout &gt; oos_days</a:t>
-            </a:r>
-          </a:p>
-          <a:p>
-            <a:pPr algn="l"/>
-            <a:r>
-              <a:rPr sz="700" b="0" i="0">
-                <a:solidFill>
-                  <a:srgbClr val="0C1A28"/>
-                </a:solidFill>
-                <a:latin typeface="Courier New"/>
-              </a:rPr>
-              <a:t>18 Q8                      360                      results/v2/note_metrics.json :: holdout &gt; span_days</a:t>
-            </a:r>
-          </a:p>
-          <a:p>
-            <a:pPr algn="l"/>
-            <a:r>
-              <a:rPr sz="700" b="0" i="0">
-                <a:solidFill>
-                  <a:srgbClr val="0C1A28"/>
-                </a:solidFill>
-                <a:latin typeface="Courier New"/>
-              </a:rPr>
-              <a:t>18 Q8                      2026-07-23               results/v2/note_metrics.json :: holdout &gt; time_based_20pct_start</a:t>
-            </a:r>
-          </a:p>
-          <a:p>
-            <a:pPr algn="l"/>
-            <a:r>
-              <a:rPr sz="700" b="0" i="0">
-                <a:solidFill>
-                  <a:srgbClr val="0C1A28"/>
-                </a:solidFill>
-                <a:latin typeface="Courier New"/>
-              </a:rPr>
-              <a:t>18 Q8                      −1.96¢                   results/risk/risk_stats.json :: universe_volume_filter &gt; burned_oos &gt; $5-20k &gt; per_share_c</a:t>
-            </a:r>
-          </a:p>
-          <a:p>
-            <a:pPr algn="l"/>
-            <a:r>
-              <a:rPr sz="700" b="0" i="0">
-                <a:solidFill>
-                  <a:srgbClr val="0C1A28"/>
-                </a:solidFill>
-                <a:latin typeface="Courier New"/>
-              </a:rPr>
-              <a:t>18 Q8                      11,307                   results/expand/results.json :: universe &gt; u2_markets</a:t>
-            </a:r>
-          </a:p>
-          <a:p>
-            <a:pPr algn="l"/>
-            <a:r>
-              <a:rPr sz="700" b="0" i="0">
-                <a:solidFill>
-                  <a:srgbClr val="0C1A28"/>
-                </a:solidFill>
-                <a:latin typeface="Courier New"/>
-              </a:rPr>
-              <a:t>18 Q8                      20%                      results/v2/note_metrics.json :: holdout  [oos_matches / matches]</a:t>
             </a:r>
           </a:p>
         </p:txBody>
@@ -21482,7 +21545,7 @@
                 </a:solidFill>
                 <a:latin typeface="Arial" panose="020B0604020202020204" pitchFamily="34" charset="0"/>
               </a:rPr>
-              <a:t>HIDDEN MANIFEST  ·  PAGE 10 OF 10</a:t>
+              <a:t>HIDDEN MANIFEST  ·  PAGE 10 OF 11</a:t>
             </a:r>
           </a:p>
         </p:txBody>
@@ -21517,6 +21580,246 @@
                 </a:solidFill>
                 <a:latin typeface="Courier New"/>
               </a:rPr>
+              <a:t>16 Q6                      3.1 s                    results/tier0/results.json :: timing &gt; calibrated_stamp_lag_s (inference)</a:t>
+            </a:r>
+          </a:p>
+          <a:p>
+            <a:pPr algn="l"/>
+            <a:r>
+              <a:rPr sz="700" b="0" i="0">
+                <a:solidFill>
+                  <a:srgbClr val="0C1A28"/>
+                </a:solidFill>
+                <a:latin typeface="Courier New"/>
+              </a:rPr>
+              <a:t>17 Q7                      3,410                    results/rigor/rigor.json :: psr_dsr &gt; N &gt; all_plus_v2safe_grid  [NOTE section 8 counts 3,386; plus the 24-variant v2-safe gri…</a:t>
+            </a:r>
+          </a:p>
+          <a:p>
+            <a:pPr algn="l"/>
+            <a:r>
+              <a:rPr sz="700" b="0" i="0">
+                <a:solidFill>
+                  <a:srgbClr val="0C1A28"/>
+                </a:solidFill>
+                <a:latin typeface="Courier New"/>
+              </a:rPr>
+              <a:t>17 Q7                      44                       results/rigor/rigor.json :: psr_dsr &gt; N &gt; H1_H6</a:t>
+            </a:r>
+          </a:p>
+          <a:p>
+            <a:pPr algn="l"/>
+            <a:r>
+              <a:rPr sz="700" b="0" i="0">
+                <a:solidFill>
+                  <a:srgbClr val="0C1A28"/>
+                </a:solidFill>
+                <a:latin typeface="Courier New"/>
+              </a:rPr>
+              <a:t>17 Q7                      40                       results/rigor/rigor.json :: sharpe_moments &gt; v2_oos &gt; T_days</a:t>
+            </a:r>
+          </a:p>
+          <a:p>
+            <a:pPr algn="l"/>
+            <a:r>
+              <a:rPr sz="700" b="0" i="0">
+                <a:solidFill>
+                  <a:srgbClr val="0C1A28"/>
+                </a:solidFill>
+                <a:latin typeface="Courier New"/>
+              </a:rPr>
+              <a:t>17 Q7                      0.997                    results/rigor/rigor.json :: psr_dsr &gt; rows &gt; [series=v2_is] &gt; dsr_min_N3410</a:t>
+            </a:r>
+          </a:p>
+          <a:p>
+            <a:pPr algn="l"/>
+            <a:r>
+              <a:rPr sz="700" b="0" i="0">
+                <a:solidFill>
+                  <a:srgbClr val="0C1A28"/>
+                </a:solidFill>
+                <a:latin typeface="Courier New"/>
+              </a:rPr>
+              <a:t>17 Q7                      0.481                    results/rigor/rigor.json :: psr_dsr &gt; rows &gt; [series=v2_oos] &gt; dsr_min_N44</a:t>
+            </a:r>
+          </a:p>
+          <a:p>
+            <a:pPr algn="l"/>
+            <a:r>
+              <a:rPr sz="700" b="0" i="0">
+                <a:solidFill>
+                  <a:srgbClr val="0C1A28"/>
+                </a:solidFill>
+                <a:latin typeface="Courier New"/>
+              </a:rPr>
+              <a:t>17 Q7                      0.075                    results/rigor/rigor.json :: psr_dsr &gt; rows &gt; [series=v2_oos] &gt; dsr_min_N3410</a:t>
+            </a:r>
+          </a:p>
+          <a:p>
+            <a:pPr algn="l"/>
+            <a:r>
+              <a:rPr sz="700" b="0" i="0">
+                <a:solidFill>
+                  <a:srgbClr val="0C1A28"/>
+                </a:solidFill>
+                <a:latin typeface="Courier New"/>
+              </a:rPr>
+              <a:t>17 Q7                      0.0%                     results/rigor/rigor.json :: pbo_cscv &gt; sizing_55_res_actual_sharpe &gt; pbo</a:t>
+            </a:r>
+          </a:p>
+          <a:p>
+            <a:pPr algn="l"/>
+            <a:r>
+              <a:rPr sz="700" b="0" i="0">
+                <a:solidFill>
+                  <a:srgbClr val="0C1A28"/>
+                </a:solidFill>
+                <a:latin typeface="Courier New"/>
+              </a:rPr>
+              <a:t>17 Q7                      15.4%                    results/rigor/rigor.json :: pbo_cscv &gt; lowloss_24_sharpe &gt; pbo</a:t>
+            </a:r>
+          </a:p>
+          <a:p>
+            <a:pPr algn="l"/>
+            <a:r>
+              <a:rPr sz="700" b="0" i="0">
+                <a:solidFill>
+                  <a:srgbClr val="0C1A28"/>
+                </a:solidFill>
+                <a:latin typeface="Courier New"/>
+              </a:rPr>
+              <a:t>17 Q7                      42.0%                    results/rigor/rigor.json :: pbo_cscv &gt; lowloss_24_selection_rule &gt; pbo</a:t>
+            </a:r>
+          </a:p>
+          <a:p>
+            <a:pPr algn="l"/>
+            <a:r>
+              <a:rPr sz="700" b="0" i="0">
+                <a:solidFill>
+                  <a:srgbClr val="0C1A28"/>
+                </a:solidFill>
+                <a:latin typeface="Courier New"/>
+              </a:rPr>
+              <a:t>18 Q8                      2,617                    results/v2/note_metrics.json :: holdout &gt; oos_matches</a:t>
+            </a:r>
+          </a:p>
+          <a:p>
+            <a:pPr algn="l"/>
+            <a:r>
+              <a:rPr sz="700" b="0" i="0">
+                <a:solidFill>
+                  <a:srgbClr val="0C1A28"/>
+                </a:solidFill>
+                <a:latin typeface="Courier New"/>
+              </a:rPr>
+              <a:t>18 Q8                      13,084                   results/v2/note_metrics.json :: holdout &gt; matches</a:t>
+            </a:r>
+          </a:p>
+          <a:p>
+            <a:pPr algn="l"/>
+            <a:r>
+              <a:rPr sz="700" b="0" i="0">
+                <a:solidFill>
+                  <a:srgbClr val="0C1A28"/>
+                </a:solidFill>
+                <a:latin typeface="Courier New"/>
+              </a:rPr>
+              <a:t>18 Q8                      21%                      results/v2/note_metrics.json :: holdout &gt; oos_share_of_volume</a:t>
+            </a:r>
+          </a:p>
+          <a:p>
+            <a:pPr algn="l"/>
+            <a:r>
+              <a:rPr sz="700" b="0" i="0">
+                <a:solidFill>
+                  <a:srgbClr val="0C1A28"/>
+                </a:solidFill>
+                <a:latin typeface="Courier New"/>
+              </a:rPr>
+              <a:t>18 Q8                      38.7                     results/v2/note_metrics.json :: holdout &gt; oos_days</a:t>
+            </a:r>
+          </a:p>
+          <a:p>
+            <a:pPr algn="l"/>
+            <a:r>
+              <a:rPr sz="700" b="0" i="0">
+                <a:solidFill>
+                  <a:srgbClr val="0C1A28"/>
+                </a:solidFill>
+                <a:latin typeface="Courier New"/>
+              </a:rPr>
+              <a:t>18 Q8                      40                       results/v2/causal.json :: causal/burned_oos/slip0.0 &gt; days  [UTC dates with trades in the burned OOS window]</a:t>
+            </a:r>
+          </a:p>
+          <a:p>
+            <a:pPr algn="l"/>
+            <a:r>
+              <a:rPr sz="700" b="0" i="0">
+                <a:solidFill>
+                  <a:srgbClr val="0C1A28"/>
+                </a:solidFill>
+                <a:latin typeface="Courier New"/>
+              </a:rPr>
+              <a:t>18 Q8                      360                      results/v2/note_metrics.json :: holdout &gt; span_days</a:t>
+            </a:r>
+          </a:p>
+          <a:p>
+            <a:pPr algn="l"/>
+            <a:r>
+              <a:rPr sz="700" b="0" i="0">
+                <a:solidFill>
+                  <a:srgbClr val="0C1A28"/>
+                </a:solidFill>
+                <a:latin typeface="Courier New"/>
+              </a:rPr>
+              <a:t>18 Q8                      2026-07-23               results/v2/note_metrics.json :: holdout &gt; time_based_20pct_start</a:t>
+            </a:r>
+          </a:p>
+          <a:p>
+            <a:pPr algn="l"/>
+            <a:r>
+              <a:rPr sz="700" b="0" i="0">
+                <a:solidFill>
+                  <a:srgbClr val="0C1A28"/>
+                </a:solidFill>
+                <a:latin typeface="Courier New"/>
+              </a:rPr>
+              <a:t>18 Q8                      −1.96¢                   results/risk/risk_stats.json :: universe_volume_filter &gt; burned_oos &gt; $5-20k &gt; per_share_c</a:t>
+            </a:r>
+          </a:p>
+          <a:p>
+            <a:pPr algn="l"/>
+            <a:r>
+              <a:rPr sz="700" b="0" i="0">
+                <a:solidFill>
+                  <a:srgbClr val="0C1A28"/>
+                </a:solidFill>
+                <a:latin typeface="Courier New"/>
+              </a:rPr>
+              <a:t>18 Q8                      11,307                   results/expand/results.json :: universe &gt; u2_markets</a:t>
+            </a:r>
+          </a:p>
+          <a:p>
+            <a:pPr algn="l"/>
+            <a:r>
+              <a:rPr sz="700" b="0" i="0">
+                <a:solidFill>
+                  <a:srgbClr val="0C1A28"/>
+                </a:solidFill>
+                <a:latin typeface="Courier New"/>
+              </a:rPr>
+              <a:t>18 Q8                      20%                      results/v2/note_metrics.json :: holdout  [oos_matches / matches]</a:t>
+            </a:r>
+          </a:p>
+          <a:p>
+            <a:pPr algn="l"/>
+            <a:r>
+              <a:rPr sz="700" b="0" i="0">
+                <a:solidFill>
+                  <a:srgbClr val="0C1A28"/>
+                </a:solidFill>
+                <a:latin typeface="Courier New"/>
+              </a:rPr>
               <a:t>18 Q8                      $5k                      results/risk/risk_stats.json :: universe_volume_filter &gt; note  [volume threshold quoted in the note field]</a:t>
             </a:r>
           </a:p>
@@ -21674,54 +21977,6 @@
                 <a:latin typeface="Courier New"/>
               </a:rPr>
               <a:t>20 Q10                     27%                      results/tracking/summary.json :: early_call &gt; precision_recall_test_snapshot &gt; 50ms &gt; recall</a:t>
-            </a:r>
-          </a:p>
-          <a:p>
-            <a:pPr algn="l"/>
-            <a:r>
-              <a:rPr sz="700" b="0" i="0">
-                <a:solidFill>
-                  <a:srgbClr val="0C1A28"/>
-                </a:solidFill>
-                <a:latin typeface="Courier New"/>
-              </a:rPr>
-              <a:t>20 Q10                     74%                      results/tracking/summary.json :: early_call &gt; precision_recall_test_snapshot &gt; 50ms &gt; precision_wilson95</a:t>
-            </a:r>
-          </a:p>
-          <a:p>
-            <a:pPr algn="l"/>
-            <a:r>
-              <a:rPr sz="700" b="0" i="0">
-                <a:solidFill>
-                  <a:srgbClr val="0C1A28"/>
-                </a:solidFill>
-                <a:latin typeface="Courier New"/>
-              </a:rPr>
-              <a:t>20 Q10                     0.7–1.2 m                results/tennis_tracking/summary.json :: headline &gt; labels &gt; median_landing_err_cm &gt; learned  [33–300 ms]</a:t>
-            </a:r>
-          </a:p>
-          <a:p>
-            <a:pPr algn="l"/>
-            <a:r>
-              <a:rPr sz="700" b="0" i="0">
-                <a:solidFill>
-                  <a:srgbClr val="0C1A28"/>
-                </a:solidFill>
-                <a:latin typeface="Courier New"/>
-              </a:rPr>
-              <a:t>20 Q10                     1.1 s                    results/tier0/results.json :: pnl_vs_t_reprice_minus_t_bounce &gt; burned_OOS &gt; stamp_breakeven_B_s</a:t>
-            </a:r>
-          </a:p>
-          <a:p>
-            <a:pPr algn="l"/>
-            <a:r>
-              <a:rPr sz="700" b="0" i="0">
-                <a:solidFill>
-                  <a:srgbClr val="0C1A28"/>
-                </a:solidFill>
-                <a:latin typeface="Courier New"/>
-              </a:rPr>
-              <a:t>20 Q10                     100 ms                   results/engine/demo_run.json :: latency_budget &gt; [stage 'vision…'] &gt; ms</a:t>
             </a:r>
           </a:p>
         </p:txBody>
@@ -21792,6 +22047,271 @@
                 <a:latin typeface="Arial" panose="020B0604020202020204" pitchFamily="34" charset="0"/>
               </a:rPr>
               <a:t>30</a:t>
+            </a:fld>
+          </a:p>
+        </p:txBody>
+      </p:sp>
+    </p:spTree>
+  </p:cSld>
+  <p:clrMapOvr>
+    <a:masterClrMapping/>
+  </p:clrMapOvr>
+</p:sld>
+</file>
+
+<file path=ppt/slides/slide31.xml><?xml version="1.0" encoding="utf-8"?>
+<p:sld xmlns:a="http://schemas.openxmlformats.org/drawingml/2006/main" xmlns:p="http://schemas.openxmlformats.org/presentationml/2006/main" xmlns:r="http://schemas.openxmlformats.org/officeDocument/2006/relationships" show="0">
+  <p:cSld>
+    <p:spTree>
+      <p:nvGrpSpPr>
+        <p:cNvPr id="1" name=""/>
+        <p:cNvGrpSpPr/>
+        <p:nvPr/>
+      </p:nvGrpSpPr>
+      <p:grpSpPr/>
+      <p:sp>
+        <p:nvSpPr>
+          <p:cNvPr id="2" name="Title 1"/>
+          <p:cNvSpPr>
+            <a:spLocks noGrp="1"/>
+          </p:cNvSpPr>
+          <p:nvPr>
+            <p:ph type="title"/>
+          </p:nvPr>
+        </p:nvSpPr>
+        <p:spPr/>
+        <p:txBody>
+          <a:bodyPr lIns="0" tIns="0" rIns="0" bIns="0"/>
+          <a:lstStyle/>
+          <a:p>
+            <a:r>
+              <a:rPr sz="2600" b="1" i="0">
+                <a:solidFill>
+                  <a:srgbClr val="0C1A28"/>
+                </a:solidFill>
+                <a:latin typeface="Arial Narrow" panose="020B0606020202030204" pitchFamily="34" charset="0"/>
+              </a:rPr>
+              <a:t>Every number on screen, and where it was read</a:t>
+            </a:r>
+          </a:p>
+        </p:txBody>
+      </p:sp>
+      <p:sp>
+        <p:nvSpPr>
+          <p:cNvPr id="3" name="Motif: ball"/>
+          <p:cNvSpPr/>
+          <p:nvPr/>
+        </p:nvSpPr>
+        <p:spPr>
+          <a:xfrm>
+            <a:off x="548640" y="457200"/>
+            <a:ext cx="137160" cy="137160"/>
+          </a:xfrm>
+          <a:prstGeom prst="ellipse">
+            <a:avLst/>
+          </a:prstGeom>
+          <a:solidFill>
+            <a:srgbClr val="D1432F"/>
+          </a:solidFill>
+          <a:ln>
+            <a:noFill/>
+          </a:ln>
+          <a:effectLst/>
+        </p:spPr>
+        <p:style>
+          <a:lnRef idx="1">
+            <a:schemeClr val="accent1"/>
+          </a:lnRef>
+          <a:fillRef idx="3">
+            <a:schemeClr val="accent1"/>
+          </a:fillRef>
+          <a:effectRef idx="2">
+            <a:schemeClr val="accent1"/>
+          </a:effectRef>
+          <a:fontRef idx="minor">
+            <a:schemeClr val="lt1"/>
+          </a:fontRef>
+        </p:style>
+        <p:txBody>
+          <a:bodyPr rtlCol="0" anchor="ctr"/>
+          <a:lstStyle/>
+          <a:p>
+            <a:pPr algn="ctr"/>
+          </a:p>
+        </p:txBody>
+      </p:sp>
+      <p:sp>
+        <p:nvSpPr>
+          <p:cNvPr id="4" name="Eyebrow"/>
+          <p:cNvSpPr txBox="1"/>
+          <p:nvPr/>
+        </p:nvSpPr>
+        <p:spPr>
+          <a:xfrm>
+            <a:off x="795528" y="365760"/>
+            <a:ext cx="10847527" cy="310896"/>
+          </a:xfrm>
+          <a:prstGeom prst="rect">
+            <a:avLst/>
+          </a:prstGeom>
+          <a:noFill/>
+        </p:spPr>
+        <p:txBody>
+          <a:bodyPr wrap="square" anchor="ctr" lIns="0" tIns="0" rIns="0" bIns="0">
+            <a:noAutofit/>
+          </a:bodyPr>
+          <a:lstStyle/>
+          <a:p>
+            <a:pPr algn="l"/>
+            <a:r>
+              <a:rPr sz="1200" b="1" i="0" spc="150">
+                <a:solidFill>
+                  <a:srgbClr val="27598B"/>
+                </a:solidFill>
+                <a:latin typeface="Arial" panose="020B0604020202020204" pitchFamily="34" charset="0"/>
+              </a:rPr>
+              <a:t>HIDDEN MANIFEST  ·  PAGE 11 OF 11</a:t>
+            </a:r>
+          </a:p>
+        </p:txBody>
+      </p:sp>
+      <p:sp>
+        <p:nvSpPr>
+          <p:cNvPr id="5" name="Manifest"/>
+          <p:cNvSpPr txBox="1"/>
+          <p:nvPr/>
+        </p:nvSpPr>
+        <p:spPr>
+          <a:xfrm>
+            <a:off x="548640" y="1554480"/>
+            <a:ext cx="11094415" cy="4846320"/>
+          </a:xfrm>
+          <a:prstGeom prst="rect">
+            <a:avLst/>
+          </a:prstGeom>
+          <a:noFill/>
+        </p:spPr>
+        <p:txBody>
+          <a:bodyPr wrap="square" anchor="t" lIns="0" tIns="0" rIns="0" bIns="0">
+            <a:noAutofit/>
+          </a:bodyPr>
+          <a:lstStyle/>
+          <a:p>
+            <a:pPr algn="l"/>
+            <a:r>
+              <a:rPr sz="700" b="0" i="0">
+                <a:solidFill>
+                  <a:srgbClr val="0C1A28"/>
+                </a:solidFill>
+                <a:latin typeface="Courier New"/>
+              </a:rPr>
+              <a:t>20 Q10                     74%                      results/tracking/summary.json :: early_call &gt; precision_recall_test_snapshot &gt; 50ms &gt; precision_wilson95</a:t>
+            </a:r>
+          </a:p>
+          <a:p>
+            <a:pPr algn="l"/>
+            <a:r>
+              <a:rPr sz="700" b="0" i="0">
+                <a:solidFill>
+                  <a:srgbClr val="0C1A28"/>
+                </a:solidFill>
+                <a:latin typeface="Courier New"/>
+              </a:rPr>
+              <a:t>20 Q10                     0.7–1.2 m                results/tennis_tracking/summary.json :: headline &gt; labels &gt; median_landing_err_cm &gt; learned  [33–300 ms]</a:t>
+            </a:r>
+          </a:p>
+          <a:p>
+            <a:pPr algn="l"/>
+            <a:r>
+              <a:rPr sz="700" b="0" i="0">
+                <a:solidFill>
+                  <a:srgbClr val="0C1A28"/>
+                </a:solidFill>
+                <a:latin typeface="Courier New"/>
+              </a:rPr>
+              <a:t>20 Q10                     1.1 s                    results/tier0/results.json :: pnl_vs_t_reprice_minus_t_bounce &gt; burned_OOS &gt; stamp_breakeven_B_s</a:t>
+            </a:r>
+          </a:p>
+          <a:p>
+            <a:pPr algn="l"/>
+            <a:r>
+              <a:rPr sz="700" b="0" i="0">
+                <a:solidFill>
+                  <a:srgbClr val="0C1A28"/>
+                </a:solidFill>
+                <a:latin typeface="Courier New"/>
+              </a:rPr>
+              <a:t>20 Q10                     158 ms                   results/engine/demo_run.json :: latency_budget &gt; [stage 'vision…'] &gt; ms</a:t>
+            </a:r>
+          </a:p>
+        </p:txBody>
+      </p:sp>
+      <p:sp>
+        <p:nvSpPr>
+          <p:cNvPr id="6" name="Footer"/>
+          <p:cNvSpPr txBox="1"/>
+          <p:nvPr/>
+        </p:nvSpPr>
+        <p:spPr>
+          <a:xfrm>
+            <a:off x="548640" y="6455664"/>
+            <a:ext cx="5486400" cy="237744"/>
+          </a:xfrm>
+          <a:prstGeom prst="rect">
+            <a:avLst/>
+          </a:prstGeom>
+          <a:noFill/>
+        </p:spPr>
+        <p:txBody>
+          <a:bodyPr wrap="square" anchor="ctr" lIns="0" tIns="0" rIns="0" bIns="0">
+            <a:noAutofit/>
+          </a:bodyPr>
+          <a:lstStyle/>
+          <a:p>
+            <a:pPr algn="l"/>
+            <a:r>
+              <a:rPr sz="1000" b="0" i="0">
+                <a:solidFill>
+                  <a:srgbClr val="566676"/>
+                </a:solidFill>
+                <a:latin typeface="Arial" panose="020B0604020202020204" pitchFamily="34" charset="0"/>
+              </a:rPr>
+              <a:t>COURTSIDE  ·  Gator Quant Hacks 2026  ·  Systematic Trading</a:t>
+            </a:r>
+          </a:p>
+        </p:txBody>
+      </p:sp>
+      <p:sp>
+        <p:nvSpPr>
+          <p:cNvPr id="7" name="Slide number"/>
+          <p:cNvSpPr txBox="1"/>
+          <p:nvPr/>
+        </p:nvSpPr>
+        <p:spPr>
+          <a:xfrm>
+            <a:off x="10728655" y="6455664"/>
+            <a:ext cx="914400" cy="237744"/>
+          </a:xfrm>
+          <a:prstGeom prst="rect">
+            <a:avLst/>
+          </a:prstGeom>
+          <a:noFill/>
+        </p:spPr>
+        <p:txBody>
+          <a:bodyPr wrap="square" anchor="ctr" lIns="0" tIns="0" rIns="0" bIns="0">
+            <a:noAutofit/>
+          </a:bodyPr>
+          <a:lstStyle/>
+          <a:p>
+            <a:pPr algn="r"/>
+            <a:fld id="{B6F15528-21DE-4FAA-801E-634DDDAF4B2B}" type="slidenum">
+              <a:rPr lang="en-US" sz="1000" dirty="0">
+                <a:solidFill>
+                  <a:srgbClr val="566676"/>
+                </a:solidFill>
+                <a:latin typeface="Arial" panose="020B0604020202020204" pitchFamily="34" charset="0"/>
+              </a:rPr>
+              <a:t>31</a:t>
             </a:fld>
           </a:p>
         </p:txBody>
@@ -21968,7 +22488,7 @@
       </p:sp>
       <p:pic>
         <p:nvPicPr>
-          <p:cNvPr id="6" name="Video: real-footage early calls">
+          <p:cNvPr id="6" name="Video: COURTSIDE engine demo">
             <a:hlinkClick r:id="" action="ppaction://media"/>
           </p:cNvPr>
           <p:cNvPicPr>
@@ -22029,7 +22549,7 @@
                 </a:solidFill>
                 <a:latin typeface="Arial" panose="020B0604020202020204" pitchFamily="34" charset="0"/>
               </a:rPr>
-              <a:t>Real 120 fps table-tennis footage: OpenTTGames (lab.osai.ai), CC BY-NC-SA 4.0. </a:t>
+              <a:t>Real 120 fps table-tennis footage: OpenTTGames (lab.osai.ai), adapted (overlays added), CC BY-NC-SA 4.0. </a:t>
             </a:r>
             <a:r>
               <a:rPr sz="1100" b="0" i="0">
@@ -22038,7 +22558,7 @@
                 </a:solidFill>
                 <a:latin typeface="Arial" panose="020B0604020202020204" pitchFamily="34" charset="0"/>
               </a:rPr>
-              <a:t>Held-out games, frozen model, run on HiPerGator; clips selected for presentation.</a:t>
+              <a:t>COURTSIDE engine demo (results/engine/engine_live_demo.mp4): streaming vision on held-out frames → paper order. Paper only.</a:t>
             </a:r>
           </a:p>
         </p:txBody>
@@ -22143,7 +22663,7 @@
                 </a:solidFill>
                 <a:latin typeface="Arial Narrow" panose="020B0606020202030204" pitchFamily="34" charset="0"/>
               </a:rPr>
-              <a:t>97.7%</a:t>
+              <a:t>94.0%</a:t>
             </a:r>
           </a:p>
         </p:txBody>
@@ -22178,7 +22698,7 @@
                 </a:solidFill>
                 <a:latin typeface="Arial" panose="020B0604020202020204" pitchFamily="34" charset="0"/>
               </a:rPr>
-              <a:t>of labelled held-out frames tracked within 5 px (ball found in 99.7%)</a:t>
+              <a:t>of 6,833 labelled held-out test frames within 5 px (ball found in 96.7%)</a:t>
             </a:r>
           </a:p>
         </p:txBody>
@@ -22213,7 +22733,7 @@
                 </a:solidFill>
                 <a:latin typeface="Arial Narrow" panose="020B0606020202030204" pitchFamily="34" charset="0"/>
               </a:rPr>
-              <a:t>100 ms</a:t>
+              <a:t>158 ms</a:t>
             </a:r>
           </a:p>
         </p:txBody>
@@ -22248,7 +22768,7 @@
                 </a:solidFill>
                 <a:latin typeface="Arial" panose="020B0604020202020204" pitchFamily="34" charset="0"/>
               </a:rPr>
-              <a:t>vision processing per call, median (p90 153 ms). The laptop sustains 51 fps, below 120: a venue box needs a GPU</a:t>
+              <a:t>vision processing per call, median (p90 219 ms). The laptop sustains 51 fps, below 120: a venue box needs a GPU</a:t>
             </a:r>
           </a:p>
         </p:txBody>
@@ -22359,7 +22879,7 @@
                                   <p:childTnLst>
                                     <p:cmd type="call" cmd="playFrom(0.0)">
                                       <p:cBhvr>
-                                        <p:cTn id="6" dur="15580" fill="hold"/>
+                                        <p:cTn id="6" dur="39933" fill="hold"/>
                                         <p:tgtEl>
                                           <p:spTgt spid="6"/>
                                         </p:tgtEl>
@@ -23082,7 +23602,7 @@
                           </a:solidFill>
                           <a:latin typeface="Arial" panose="020B0604020202020204" pitchFamily="34" charset="0"/>
                         </a:rPr>
-                        <a:t>runs once, tomorrow</a:t>
+                        <a:t>runs once, planned 2026-10-04 11:30 UTC</a:t>
                       </a:r>
                     </a:p>
                     <a:p>
@@ -24111,7 +24631,7 @@
                 </a:solidFill>
                 <a:latin typeface="Arial Narrow" panose="020B0606020202030204" pitchFamily="34" charset="0"/>
               </a:rPr>
-              <a:t>1.00</a:t>
+              <a:t>0.997</a:t>
             </a:r>
           </a:p>
         </p:txBody>
@@ -24146,7 +24666,7 @@
                 </a:solidFill>
                 <a:latin typeface="Arial" panose="020B0604020202020204" pitchFamily="34" charset="0"/>
               </a:rPr>
-              <a:t>deflated Sharpe, in sample, N = 3,386 trials</a:t>
+              <a:t>deflated Sharpe, in sample, N = 3,410 trials</a:t>
             </a:r>
           </a:p>
         </p:txBody>
@@ -24270,7 +24790,7 @@
                 </a:solidFill>
                 <a:latin typeface="Arial" panose="020B0604020202020204" pitchFamily="34" charset="0"/>
               </a:rPr>
-              <a:t>deflated Sharpe, burned OOS at N = 3,386 (0.481 at N = 44): 40 days can't rule out luck</a:t>
+              <a:t>deflated Sharpe, burned OOS at N = 3,410 (0.481 at N = 44): 40 days can't rule out luck</a:t>
             </a:r>
           </a:p>
         </p:txBody>
@@ -24567,8 +25087,8 @@
           <p:nvPr/>
         </p:nvGraphicFramePr>
         <p:xfrm>
-          <a:off x="5440680" y="1901952"/>
-          <a:ext cx="6202375" cy="4023360"/>
+          <a:off x="5440680" y="1828800"/>
+          <a:ext cx="6202375" cy="3867912"/>
         </p:xfrm>
         <a:graphic>
           <a:graphicData uri="http://schemas.openxmlformats.org/drawingml/2006/table">
@@ -24581,7 +25101,7 @@
                 <a:gridCol w="2377440"/>
                 <a:gridCol w="1143000"/>
               </a:tblGrid>
-              <a:tr h="365760">
+              <a:tr h="329184">
                 <a:tc>
                   <a:txBody>
                     <a:bodyPr wrap="square"/>
@@ -24694,7 +25214,7 @@
                   </a:tcPr>
                 </a:tc>
               </a:tr>
-              <a:tr h="457200">
+              <a:tr h="393192">
                 <a:tc>
                   <a:txBody>
                     <a:bodyPr wrap="square"/>
@@ -24702,7 +25222,7 @@
                     <a:p>
                       <a:pPr algn="l"/>
                       <a:r>
-                        <a:rPr sz="1200" b="0" i="0">
+                        <a:rPr sz="1100" b="0" i="0">
                           <a:solidFill>
                             <a:srgbClr val="0C1A28"/>
                           </a:solidFill>
@@ -24737,7 +25257,7 @@
                     <a:p>
                       <a:pPr algn="l"/>
                       <a:r>
-                        <a:rPr sz="1200" b="0" i="0">
+                        <a:rPr sz="1100" b="0" i="0">
                           <a:solidFill>
                             <a:srgbClr val="0C1A28"/>
                           </a:solidFill>
@@ -24772,7 +25292,7 @@
                     <a:p>
                       <a:pPr algn="l"/>
                       <a:r>
-                        <a:rPr sz="1200" b="1" i="0">
+                        <a:rPr sz="1100" b="1" i="0">
                           <a:solidFill>
                             <a:srgbClr val="27598B"/>
                           </a:solidFill>
@@ -24803,7 +25323,7 @@
                   </a:tcPr>
                 </a:tc>
               </a:tr>
-              <a:tr h="457200">
+              <a:tr h="393192">
                 <a:tc>
                   <a:txBody>
                     <a:bodyPr wrap="square"/>
@@ -24811,7 +25331,7 @@
                     <a:p>
                       <a:pPr algn="l"/>
                       <a:r>
-                        <a:rPr sz="1200" b="0" i="0">
+                        <a:rPr sz="1100" b="0" i="0">
                           <a:solidFill>
                             <a:srgbClr val="0C1A28"/>
                           </a:solidFill>
@@ -24846,7 +25366,7 @@
                     <a:p>
                       <a:pPr algn="l"/>
                       <a:r>
-                        <a:rPr sz="1200" b="0" i="0">
+                        <a:rPr sz="1100" b="0" i="0">
                           <a:solidFill>
                             <a:srgbClr val="0C1A28"/>
                           </a:solidFill>
@@ -24881,7 +25401,7 @@
                     <a:p>
                       <a:pPr algn="l"/>
                       <a:r>
-                        <a:rPr sz="1200" b="1" i="0">
+                        <a:rPr sz="1100" b="1" i="0">
                           <a:solidFill>
                             <a:srgbClr val="566676"/>
                           </a:solidFill>
@@ -24910,7 +25430,7 @@
                   </a:tcPr>
                 </a:tc>
               </a:tr>
-              <a:tr h="457200">
+              <a:tr h="393192">
                 <a:tc>
                   <a:txBody>
                     <a:bodyPr wrap="square"/>
@@ -24918,7 +25438,7 @@
                     <a:p>
                       <a:pPr algn="l"/>
                       <a:r>
-                        <a:rPr sz="1200" b="0" i="0">
+                        <a:rPr sz="1100" b="0" i="0">
                           <a:solidFill>
                             <a:srgbClr val="0C1A28"/>
                           </a:solidFill>
@@ -24953,7 +25473,7 @@
                     <a:p>
                       <a:pPr algn="l"/>
                       <a:r>
-                        <a:rPr sz="1200" b="0" i="0">
+                        <a:rPr sz="1100" b="0" i="0">
                           <a:solidFill>
                             <a:srgbClr val="0C1A28"/>
                           </a:solidFill>
@@ -24988,7 +25508,7 @@
                     <a:p>
                       <a:pPr algn="l"/>
                       <a:r>
-                        <a:rPr sz="1200" b="1" i="0">
+                        <a:rPr sz="1100" b="1" i="0">
                           <a:solidFill>
                             <a:srgbClr val="D1432F"/>
                           </a:solidFill>
@@ -25019,7 +25539,7 @@
                   </a:tcPr>
                 </a:tc>
               </a:tr>
-              <a:tr h="457200">
+              <a:tr h="393192">
                 <a:tc>
                   <a:txBody>
                     <a:bodyPr wrap="square"/>
@@ -25027,7 +25547,7 @@
                     <a:p>
                       <a:pPr algn="l"/>
                       <a:r>
-                        <a:rPr sz="1200" b="0" i="0">
+                        <a:rPr sz="1100" b="0" i="0">
                           <a:solidFill>
                             <a:srgbClr val="0C1A28"/>
                           </a:solidFill>
@@ -25062,7 +25582,7 @@
                     <a:p>
                       <a:pPr algn="l"/>
                       <a:r>
-                        <a:rPr sz="1200" b="0" i="0">
+                        <a:rPr sz="1100" b="0" i="0">
                           <a:solidFill>
                             <a:srgbClr val="0C1A28"/>
                           </a:solidFill>
@@ -25097,7 +25617,7 @@
                     <a:p>
                       <a:pPr algn="l"/>
                       <a:r>
-                        <a:rPr sz="1200" b="1" i="0">
+                        <a:rPr sz="1100" b="1" i="0">
                           <a:solidFill>
                             <a:srgbClr val="27598B"/>
                           </a:solidFill>
@@ -25128,7 +25648,7 @@
                   </a:tcPr>
                 </a:tc>
               </a:tr>
-              <a:tr h="457200">
+              <a:tr h="393192">
                 <a:tc>
                   <a:txBody>
                     <a:bodyPr wrap="square"/>
@@ -25136,7 +25656,7 @@
                     <a:p>
                       <a:pPr algn="l"/>
                       <a:r>
-                        <a:rPr sz="1200" b="0" i="0">
+                        <a:rPr sz="1100" b="0" i="0">
                           <a:solidFill>
                             <a:srgbClr val="0C1A28"/>
                           </a:solidFill>
@@ -25171,7 +25691,7 @@
                     <a:p>
                       <a:pPr algn="l"/>
                       <a:r>
-                        <a:rPr sz="1200" b="0" i="0">
+                        <a:rPr sz="1100" b="0" i="0">
                           <a:solidFill>
                             <a:srgbClr val="0C1A28"/>
                           </a:solidFill>
@@ -25206,7 +25726,7 @@
                     <a:p>
                       <a:pPr algn="l"/>
                       <a:r>
-                        <a:rPr sz="1200" b="1" i="0">
+                        <a:rPr sz="1100" b="1" i="0">
                           <a:solidFill>
                             <a:srgbClr val="D1432F"/>
                           </a:solidFill>
@@ -25237,7 +25757,7 @@
                   </a:tcPr>
                 </a:tc>
               </a:tr>
-              <a:tr h="457200">
+              <a:tr h="393192">
                 <a:tc>
                   <a:txBody>
                     <a:bodyPr wrap="square"/>
@@ -25245,7 +25765,7 @@
                     <a:p>
                       <a:pPr algn="l"/>
                       <a:r>
-                        <a:rPr sz="1200" b="0" i="0">
+                        <a:rPr sz="1100" b="0" i="0">
                           <a:solidFill>
                             <a:srgbClr val="0C1A28"/>
                           </a:solidFill>
@@ -25280,7 +25800,7 @@
                     <a:p>
                       <a:pPr algn="l"/>
                       <a:r>
-                        <a:rPr sz="1200" b="0" i="0">
+                        <a:rPr sz="1100" b="0" i="0">
                           <a:solidFill>
                             <a:srgbClr val="0C1A28"/>
                           </a:solidFill>
@@ -25315,7 +25835,7 @@
                     <a:p>
                       <a:pPr algn="l"/>
                       <a:r>
-                        <a:rPr sz="1200" b="1" i="0">
+                        <a:rPr sz="1100" b="1" i="0">
                           <a:solidFill>
                             <a:srgbClr val="D1432F"/>
                           </a:solidFill>
@@ -25346,7 +25866,7 @@
                   </a:tcPr>
                 </a:tc>
               </a:tr>
-              <a:tr h="457200">
+              <a:tr h="393192">
                 <a:tc>
                   <a:txBody>
                     <a:bodyPr wrap="square"/>
@@ -25354,7 +25874,116 @@
                     <a:p>
                       <a:pPr algn="l"/>
                       <a:r>
-                        <a:rPr sz="1200" b="0" i="0">
+                        <a:rPr sz="1100" b="0" i="0">
+                          <a:solidFill>
+                            <a:srgbClr val="0C1A28"/>
+                          </a:solidFill>
+                          <a:latin typeface="Arial" panose="020B0604020202020204" pitchFamily="34" charset="0"/>
+                        </a:rPr>
+                        <a:t>Tier-0 v3, frozen (counterfactual*): unseen markets IS / OOS; burned OOS</a:t>
+                      </a:r>
+                    </a:p>
+                  </a:txBody>
+                  <a:tcPr marL="91440" marR="91440" marT="27432" marB="27432" anchor="ctr">
+                    <a:lnL w="9525">
+                      <a:noFill/>
+                    </a:lnL>
+                    <a:lnR w="9525">
+                      <a:noFill/>
+                    </a:lnR>
+                    <a:lnT w="9525">
+                      <a:noFill/>
+                    </a:lnT>
+                    <a:lnB w="9525">
+                      <a:solidFill>
+                        <a:srgbClr val="D3DCE5"/>
+                      </a:solidFill>
+                    </a:lnB>
+                    <a:noFill/>
+                  </a:tcPr>
+                </a:tc>
+                <a:tc>
+                  <a:txBody>
+                    <a:bodyPr wrap="square"/>
+                    <a:lstStyle/>
+                    <a:p>
+                      <a:pPr algn="l"/>
+                      <a:r>
+                        <a:rPr sz="1100" b="0" i="0">
+                          <a:solidFill>
+                            <a:srgbClr val="0C1A28"/>
+                          </a:solidFill>
+                          <a:latin typeface="Arial" panose="020B0604020202020204" pitchFamily="34" charset="0"/>
+                        </a:rPr>
+                        <a:t>−0.22¢ / −0.52¢; burned +0.68¢ [−0.44, 1.74]</a:t>
+                      </a:r>
+                    </a:p>
+                  </a:txBody>
+                  <a:tcPr marL="91440" marR="91440" marT="27432" marB="27432" anchor="ctr">
+                    <a:lnL w="9525">
+                      <a:noFill/>
+                    </a:lnL>
+                    <a:lnR w="9525">
+                      <a:noFill/>
+                    </a:lnR>
+                    <a:lnT w="9525">
+                      <a:noFill/>
+                    </a:lnT>
+                    <a:lnB w="9525">
+                      <a:solidFill>
+                        <a:srgbClr val="D3DCE5"/>
+                      </a:solidFill>
+                    </a:lnB>
+                    <a:noFill/>
+                  </a:tcPr>
+                </a:tc>
+                <a:tc>
+                  <a:txBody>
+                    <a:bodyPr wrap="square"/>
+                    <a:lstStyle/>
+                    <a:p>
+                      <a:pPr algn="l"/>
+                      <a:r>
+                        <a:rPr sz="1100" b="1" i="0">
+                          <a:solidFill>
+                            <a:srgbClr val="D1432F"/>
+                          </a:solidFill>
+                          <a:latin typeface="Arial" panose="020B0604020202020204" pitchFamily="34" charset="0"/>
+                        </a:rPr>
+                        <a:t>FAIL</a:t>
+                      </a:r>
+                    </a:p>
+                  </a:txBody>
+                  <a:tcPr marL="91440" marR="91440" marT="27432" marB="27432" anchor="ctr">
+                    <a:lnL w="9525">
+                      <a:noFill/>
+                    </a:lnL>
+                    <a:lnR w="9525">
+                      <a:noFill/>
+                    </a:lnR>
+                    <a:lnT w="9525">
+                      <a:noFill/>
+                    </a:lnT>
+                    <a:lnB w="9525">
+                      <a:solidFill>
+                        <a:srgbClr val="D3DCE5"/>
+                      </a:solidFill>
+                    </a:lnB>
+                    <a:solidFill>
+                      <a:srgbClr val="FBEAE6"/>
+                    </a:solidFill>
+                  </a:tcPr>
+                </a:tc>
+              </a:tr>
+              <a:tr h="393192">
+                <a:tc>
+                  <a:txBody>
+                    <a:bodyPr wrap="square"/>
+                    <a:lstStyle/>
+                    <a:p>
+                      <a:pPr algn="l"/>
+                      <a:r>
+                        <a:rPr sz="1100" b="0" i="0">
                           <a:solidFill>
                             <a:srgbClr val="0C1A28"/>
                           </a:solidFill>
@@ -25389,7 +26018,7 @@
                     <a:p>
                       <a:pPr algn="l"/>
                       <a:r>
-                        <a:rPr sz="1200" b="0" i="0">
+                        <a:rPr sz="1100" b="0" i="0">
                           <a:solidFill>
                             <a:srgbClr val="0C1A28"/>
                           </a:solidFill>
@@ -25424,7 +26053,7 @@
                     <a:p>
                       <a:pPr algn="l"/>
                       <a:r>
-                        <a:rPr sz="1200" b="1" i="0">
+                        <a:rPr sz="1100" b="1" i="0">
                           <a:solidFill>
                             <a:srgbClr val="D1432F"/>
                           </a:solidFill>
@@ -25455,7 +26084,7 @@
                   </a:tcPr>
                 </a:tc>
               </a:tr>
-              <a:tr h="457200">
+              <a:tr h="393192">
                 <a:tc>
                   <a:txBody>
                     <a:bodyPr wrap="square"/>
@@ -25463,7 +26092,7 @@
                     <a:p>
                       <a:pPr algn="l"/>
                       <a:r>
-                        <a:rPr sz="1200" b="0" i="0">
+                        <a:rPr sz="1100" b="0" i="0">
                           <a:solidFill>
                             <a:srgbClr val="0C1A28"/>
                           </a:solidFill>
@@ -25496,13 +26125,13 @@
                     <a:p>
                       <a:pPr algn="l"/>
                       <a:r>
-                        <a:rPr sz="1200" b="0" i="0">
+                        <a:rPr sz="1100" b="0" i="0">
                           <a:solidFill>
                             <a:srgbClr val="0C1A28"/>
                           </a:solidFill>
                           <a:latin typeface="Arial" panose="020B0604020202020204" pitchFamily="34" charset="0"/>
                         </a:rPr>
-                        <a:t>tomorrow</a:t>
+                        <a:t>planned 2026-10-04 11:30 UTC</a:t>
                       </a:r>
                     </a:p>
                   </a:txBody>
@@ -25529,7 +26158,7 @@
                     <a:p>
                       <a:pPr algn="l"/>
                       <a:r>
-                        <a:rPr sz="1200" b="1" i="0">
+                        <a:rPr sz="1100" b="1" i="0">
                           <a:solidFill>
                             <a:srgbClr val="566676"/>
                           </a:solidFill>
@@ -25568,8 +26197,8 @@
         </p:nvSpPr>
         <p:spPr>
           <a:xfrm>
-            <a:off x="5440680" y="5943600"/>
-            <a:ext cx="6202375" cy="411480"/>
+            <a:off x="5440680" y="5815584"/>
+            <a:ext cx="6202375" cy="566928"/>
           </a:xfrm>
           <a:prstGeom prst="rect">
             <a:avLst/>
@@ -25584,13 +26213,25 @@
           <a:p>
             <a:pPr algn="l"/>
             <a:r>
-              <a:rPr sz="1150" b="0" i="0">
+              <a:rPr sz="1050" b="0" i="0">
                 <a:solidFill>
                   <a:srgbClr val="566676"/>
                 </a:solidFill>
                 <a:latin typeface="Arial" panose="020B0604020202020204" pitchFamily="34" charset="0"/>
               </a:rPr>
-              <a:t>Every look at held-out data is logged: 45 lines in results/oos_peeks.log. Failures stay in the record.</a:t>
+              <a:t>Every look at held-out data is logged (65 lines at build time). Failures stay in the record.</a:t>
+            </a:r>
+          </a:p>
+          <a:p>
+            <a:pPr algn="l"/>
+            <a:r>
+              <a:rPr sz="950" b="0" i="0">
+                <a:solidFill>
+                  <a:srgbClr val="D1432F"/>
+                </a:solidFill>
+                <a:latin typeface="Arial" panose="020B0604020202020204" pitchFamily="34" charset="0"/>
+              </a:rPr>
+              <a:t>* COUNTERFACTUAL: assumes a licensed live feed + courtside camera (not purchased); parameters measured</a:t>
             </a:r>
           </a:p>
         </p:txBody>
@@ -25878,12 +26519,12 @@
         </p:nvSpPr>
         <p:spPr>
           <a:xfrm>
-            <a:off x="548640" y="2103120"/>
-            <a:ext cx="3931920" cy="1645920"/>
+            <a:off x="548640" y="2029968"/>
+            <a:ext cx="3931920" cy="1371600"/>
           </a:xfrm>
           <a:prstGeom prst="roundRect">
             <a:avLst>
-              <a:gd name="adj" fmla="val 4444"/>
+              <a:gd name="adj" fmla="val 5333"/>
             </a:avLst>
           </a:prstGeom>
           <a:solidFill>
@@ -25932,8 +26573,8 @@
         </p:nvSpPr>
         <p:spPr>
           <a:xfrm>
-            <a:off x="749808" y="2194560"/>
-            <a:ext cx="3566160" cy="1463040"/>
+            <a:off x="749808" y="2084832"/>
+            <a:ext cx="3566160" cy="1261872"/>
           </a:xfrm>
           <a:prstGeom prst="rect">
             <a:avLst/>
@@ -26016,12 +26657,12 @@
         </p:nvSpPr>
         <p:spPr>
           <a:xfrm>
-            <a:off x="548640" y="3886200"/>
-            <a:ext cx="3931920" cy="1645920"/>
+            <a:off x="548640" y="3511296"/>
+            <a:ext cx="3931920" cy="1371600"/>
           </a:xfrm>
           <a:prstGeom prst="roundRect">
             <a:avLst>
-              <a:gd name="adj" fmla="val 4444"/>
+              <a:gd name="adj" fmla="val 5333"/>
             </a:avLst>
           </a:prstGeom>
           <a:solidFill>
@@ -26070,8 +26711,8 @@
         </p:nvSpPr>
         <p:spPr>
           <a:xfrm>
-            <a:off x="749808" y="3977639"/>
-            <a:ext cx="3566160" cy="1463040"/>
+            <a:off x="749808" y="3566160"/>
+            <a:ext cx="3566160" cy="1261872"/>
           </a:xfrm>
           <a:prstGeom prst="rect">
             <a:avLst/>
@@ -26201,14 +26842,60 @@
       </p:graphicFrame>
       <p:sp>
         <p:nvSpPr>
-          <p:cNvPr id="13" name="T0 reading"/>
+          <p:cNvPr id="13" name="T0 v3 card"/>
+          <p:cNvSpPr/>
+          <p:nvPr/>
+        </p:nvSpPr>
+        <p:spPr>
+          <a:xfrm>
+            <a:off x="548640" y="4992624"/>
+            <a:ext cx="3931920" cy="1170432"/>
+          </a:xfrm>
+          <a:prstGeom prst="roundRect">
+            <a:avLst>
+              <a:gd name="adj" fmla="val 6250"/>
+            </a:avLst>
+          </a:prstGeom>
+          <a:solidFill>
+            <a:srgbClr val="FBEAE6"/>
+          </a:solidFill>
+          <a:ln>
+            <a:noFill/>
+          </a:ln>
+          <a:effectLst/>
+        </p:spPr>
+        <p:style>
+          <a:lnRef idx="1">
+            <a:schemeClr val="accent1"/>
+          </a:lnRef>
+          <a:fillRef idx="3">
+            <a:schemeClr val="accent1"/>
+          </a:fillRef>
+          <a:effectRef idx="2">
+            <a:schemeClr val="accent1"/>
+          </a:effectRef>
+          <a:fontRef idx="minor">
+            <a:schemeClr val="lt1"/>
+          </a:fontRef>
+        </p:style>
+        <p:txBody>
+          <a:bodyPr rtlCol="0" anchor="ctr"/>
+          <a:lstStyle/>
+          <a:p>
+            <a:pPr algn="ctr"/>
+          </a:p>
+        </p:txBody>
+      </p:sp>
+      <p:sp>
+        <p:nvSpPr>
+          <p:cNvPr id="14" name="T0 v3 text"/>
           <p:cNvSpPr txBox="1"/>
           <p:nvPr/>
         </p:nvSpPr>
         <p:spPr>
           <a:xfrm>
-            <a:off x="4754879" y="5349240"/>
-            <a:ext cx="6888175" cy="1005840"/>
+            <a:off x="749808" y="5047488"/>
+            <a:ext cx="3566160" cy="1060704"/>
           </a:xfrm>
           <a:prstGeom prst="rect">
             <a:avLst/>
@@ -26216,6 +26903,81 @@
           <a:noFill/>
         </p:spPr>
         <p:txBody>
+          <a:bodyPr wrap="square" anchor="ctr" lIns="0" tIns="0" rIns="0" bIns="0">
+            <a:noAutofit/>
+          </a:bodyPr>
+          <a:lstStyle/>
+          <a:p>
+            <a:pPr algn="l"/>
+            <a:r>
+              <a:rPr sz="1050" b="1" i="0" spc="110">
+                <a:solidFill>
+                  <a:srgbClr val="D1432F"/>
+                </a:solidFill>
+                <a:latin typeface="Arial" panose="020B0604020202020204" pitchFamily="34" charset="0"/>
+              </a:rPr>
+              <a:t>THEN: FROZEN v3, BLIND TESTS</a:t>
+            </a:r>
+          </a:p>
+          <a:p>
+            <a:pPr algn="l">
+              <a:spcBef>
+                <a:spcPts val="200"/>
+              </a:spcBef>
+            </a:pPr>
+            <a:r>
+              <a:rPr sz="1200" b="1" i="0">
+                <a:solidFill>
+                  <a:srgbClr val="0C1A28"/>
+                </a:solidFill>
+                <a:latin typeface="Arial" panose="020B0604020202020204" pitchFamily="34" charset="0"/>
+              </a:rPr>
+              <a:t>Unseen markets −0.22¢ (IS period), −0.52¢ (OOS period): FAIL</a:t>
+            </a:r>
+          </a:p>
+          <a:p>
+            <a:pPr algn="l"/>
+            <a:r>
+              <a:rPr sz="1200" b="0" i="0">
+                <a:solidFill>
+                  <a:srgbClr val="0C1A28"/>
+                </a:solidFill>
+                <a:latin typeface="Arial" panose="020B0604020202020204" pitchFamily="34" charset="0"/>
+              </a:rPr>
+              <a:t>Burned OOS +0.68¢ [−0.44, 1.74]: FAIL, the interval includes 0</a:t>
+            </a:r>
+          </a:p>
+          <a:p>
+            <a:pPr algn="l"/>
+            <a:r>
+              <a:rPr sz="950" b="0" i="0">
+                <a:solidFill>
+                  <a:srgbClr val="566676"/>
+                </a:solidFill>
+                <a:latin typeface="Courier New"/>
+              </a:rPr>
+              <a:t>results/tier0_v3/blind.json</a:t>
+            </a:r>
+          </a:p>
+        </p:txBody>
+      </p:sp>
+      <p:sp>
+        <p:nvSpPr>
+          <p:cNvPr id="15" name="T0 reading"/>
+          <p:cNvSpPr txBox="1"/>
+          <p:nvPr/>
+        </p:nvSpPr>
+        <p:spPr>
+          <a:xfrm>
+            <a:off x="4754879" y="5349240"/>
+            <a:ext cx="6888175" cy="1005840"/>
+          </a:xfrm>
+          <a:prstGeom prst="rect">
+            <a:avLst/>
+          </a:prstGeom>
+          <a:noFill/>
+        </p:spPr>
+        <p:txBody>
           <a:bodyPr wrap="square" anchor="t" lIns="0" tIns="0" rIns="0" bIns="0">
             <a:noAutofit/>
           </a:bodyPr>
@@ -26238,7 +27000,7 @@
                 </a:solidFill>
                 <a:latin typeface="Arial" panose="020B0604020202020204" pitchFamily="34" charset="0"/>
               </a:rPr>
-              <a:t>how long after the bounce the book reprices. Under the stamp reading the edge is negative below 1.1 s.</a:t>
+              <a:t>how long after the bounce the book reprices. Under the stamp reading the edge is negative below 1.1 s; our pre-registered estimate, 0.68 s, falls in that zone.</a:t>
             </a:r>
           </a:p>
           <a:p>
@@ -26261,7 +27023,7 @@
       </p:sp>
       <p:sp>
         <p:nvSpPr>
-          <p:cNvPr id="14" name="Footer"/>
+          <p:cNvPr id="16" name="Footer"/>
           <p:cNvSpPr txBox="1"/>
           <p:nvPr/>
         </p:nvSpPr>
@@ -26296,7 +27058,7 @@
       </p:sp>
       <p:sp>
         <p:nvSpPr>
-          <p:cNvPr id="15" name="Slide number"/>
+          <p:cNvPr id="17" name="Slide number"/>
           <p:cNvSpPr txBox="1"/>
           <p:nvPr/>
         </p:nvSpPr>
@@ -26369,7 +27131,7 @@
                 </a:solidFill>
                 <a:latin typeface="Arial Narrow" panose="020B0606020202030204" pitchFamily="34" charset="0"/>
               </a:rPr>
-              <a:t>End to end on live Polymarket books, paper only</a:t>
+              <a:t>Live books, paper orders; full chain on a recorded book</a:t>
             </a:r>
           </a:p>
         </p:txBody>
@@ -26448,7 +27210,7 @@
                 </a:solidFill>
                 <a:latin typeface="Arial" panose="020B0604020202020204" pitchFamily="34" charset="0"/>
               </a:rPr>
-              <a:t>07  ·  THE ENGINE, END TO END (PAPER ONLY)</a:t>
+              <a:t>07  ·  THE ENGINE (PAPER ONLY)</a:t>
             </a:r>
           </a:p>
         </p:txBody>
@@ -27127,7 +27889,7 @@
       </p:sp>
       <p:sp>
         <p:nvSpPr>
-          <p:cNvPr id="8" name="Label: LIVE PAPER SESSION (TONI"/>
+          <p:cNvPr id="8" name="Label: LIVE PAPER SESSION (2026"/>
           <p:cNvSpPr txBox="1"/>
           <p:nvPr/>
         </p:nvSpPr>
@@ -27155,7 +27917,7 @@
                 </a:solidFill>
                 <a:latin typeface="Arial" panose="020B0604020202020204" pitchFamily="34" charset="0"/>
               </a:rPr>
-              <a:t>LIVE PAPER SESSION (TONIGHT)</a:t>
+              <a:t>LIVE PAPER SESSION (2026-10-03)</a:t>
             </a:r>
           </a:p>
         </p:txBody>
@@ -27258,17 +28020,33 @@
           <a:p>
             <a:pPr algn="l">
               <a:spcBef>
-                <a:spcPts val="400"/>
+                <a:spcPts val="800"/>
               </a:spcBef>
             </a:pPr>
             <a:r>
+              <a:rPr sz="2000" b="1" i="0">
+                <a:solidFill>
+                  <a:srgbClr val="F07A66"/>
+                </a:solidFill>
+                <a:latin typeface="Arial Narrow" panose="020B0606020202030204" pitchFamily="34" charset="0"/>
+              </a:rPr>
+              <a:t>WARMING UP</a:t>
+            </a:r>
+          </a:p>
+          <a:p>
+            <a:pPr algn="l">
+              <a:spcBef>
+                <a:spcPts val="200"/>
+              </a:spcBef>
+            </a:pPr>
+            <a:r>
               <a:rPr sz="1050" b="0" i="0">
                 <a:solidFill>
                   <a:srgbClr val="9FB3C8"/>
                 </a:solidFill>
                 <a:latin typeface="Arial" panose="020B0604020202020204" pitchFamily="34" charset="0"/>
               </a:rPr>
-              <a:t>Run 20261003T193534Z  ·  as of 2026-10-03 20:19 UTC</a:t>
+              <a:t>Run 20261003T204812Z  ·  started 2026-10-03 20:48 UTC  ·  as of 2026-10-03 21:32 UTC</a:t>
             </a:r>
           </a:p>
           <a:p>
@@ -27293,7 +28071,7 @@
                 </a:solidFill>
                 <a:latin typeface="Arial" panose="020B0604020202020204" pitchFamily="34" charset="0"/>
               </a:rPr>
-              <a:t>QUOTING (paper)</a:t>
+              <a:t>warm-up: waiting for trades (0 seen)</a:t>
             </a:r>
           </a:p>
           <a:p>
@@ -27303,45 +28081,13 @@
               </a:spcBef>
             </a:pPr>
             <a:r>
-              <a:rPr sz="1250" b="1" i="0">
+              <a:rPr sz="1150" b="0" i="0">
                 <a:solidFill>
                   <a:srgbClr val="FFFFFF"/>
                 </a:solidFill>
                 <a:latin typeface="Arial" panose="020B0604020202020204" pitchFamily="34" charset="0"/>
               </a:rPr>
-              <a:t>Primary book: 0 fills, P&amp;L +$0.00 on $10,000 paper capital</a:t>
-            </a:r>
-          </a:p>
-          <a:p>
-            <a:pPr algn="l">
-              <a:spcBef>
-                <a:spcPts val="300"/>
-              </a:spcBef>
-            </a:pPr>
-            <a:r>
-              <a:rPr sz="1150" b="0" i="0">
-                <a:solidFill>
-                  <a:srgbClr val="FFFFFF"/>
-                </a:solidFill>
-                <a:latin typeface="Arial" panose="020B0604020202020204" pitchFamily="34" charset="0"/>
-              </a:rPr>
-              <a:t>Taker control: 0 fills</a:t>
-            </a:r>
-          </a:p>
-          <a:p>
-            <a:pPr algn="l">
-              <a:spcBef>
-                <a:spcPts val="600"/>
-              </a:spcBef>
-            </a:pPr>
-            <a:r>
-              <a:rPr sz="1100" b="0" i="0">
-                <a:solidFill>
-                  <a:srgbClr val="9FB3C8"/>
-                </a:solidFill>
-                <a:latin typeface="Arial" panose="020B0604020202020204" pitchFamily="34" charset="0"/>
-              </a:rPr>
-              <a:t>25,982 book messages · 0 match(es) in play</a:t>
+              <a:t>No quotes yet: quoting starts after a warm-up check on 50 public trades. Fills and P&amp;L appear once it quotes.</a:t>
             </a:r>
           </a:p>
           <a:p>

--- a/docs/deck/courtside.pptx
+++ b/docs/deck/courtside.pptx
@@ -2104,7 +2104,7 @@
           <a:p/>
           <a:p>
             <a:r>
-              <a:t>[Status at build time: forward test pending; live session warming up (started 2026-10-03 20:48 UTC).]</a:t>
+              <a:t>[Status at build time: forward test pending; live session finished (started 2026-10-03 20:48 UTC).]</a:t>
             </a:r>
           </a:p>
           <a:p>
@@ -2317,7 +2317,7 @@
           </a:p>
           <a:p>
             <a:r>
-              <a:t>- All 73 looks at held-out data are in results/oos_peeks.log.</a:t>
+              <a:t>- All 77 looks at held-out data are in results/oos_peeks.log.</a:t>
             </a:r>
           </a:p>
           <a:p/>
@@ -3543,7 +3543,7 @@
           </a:p>
           <a:p>
             <a:r>
-              <a:t>- Measured end to end, in one process: our footage over WebRTC into the vision engine, a call, a paper order on a live tennis book. Video in → order ready: 54 ms on a laptop (24 traces). With a simulated 1 s feed, the network (65 ms) and the venue's 1 s hold: 2,119 ms, under 3,000 ms.</a:t>
+              <a:t>- Measured end to end, in one process: our footage over WebRTC into the vision engine, a call, a paper order on a live tennis book. Video in → order ready: 54 ms on a laptop (24 traces). With a simulated 1 s feed, the network (65 ms) and the venue's 1 s hold: 2,119 ms, under 3,000 ms. Conditions: CV fed at 10 frames/s, every frame (12x slow motion; the laptop cannot run 120 fps in real time); all 24 orders were timing probes: the rule and the risk check declined every call on pre-match books.</a:t>
             </a:r>
           </a:p>
           <a:p>
@@ -3650,7 +3650,7 @@
           </a:p>
           <a:p>
             <a:r>
-              <a:t>- The CV book at 1 s uses $13.8k–$22.6k at a 100-share net cap; the limit is the stale depth on each point, and a 1,000-share cap loses held out (−$51/day even at V = 0). The full grid is in results/capacity/capacity.json.</a:t>
+              <a:t>- The CV book at 1 s (post hoc 3.14 s lag, 10 matches a day) runs up to $28.5k–$40.2k held out ($55.3k–$73.3k in sample) before its Sharpe halves; the range is how we share stale depth with the fast tier. Every match: $65.0k–$96.9k. Pre-registered lag: Sharpe 0.8 held out, no capacity.</a:t>
             </a:r>
           </a:p>
           <a:p>
@@ -4073,7 +4073,7 @@
           <a:p/>
           <a:p>
             <a:r>
-              <a:t>The one clean test left is the forward run, planned for 2026-10-04 11:30 UTC. Every look is logged (73 lines in the peek log at build time).</a:t>
+              <a:t>The one clean test left is the forward run, planned for 2026-10-04 11:30 UTC. Every look is logged (77 lines in the peek log at build time).</a:t>
             </a:r>
           </a:p>
           <a:p/>
@@ -4283,7 +4283,7 @@
           <a:p/>
           <a:p>
             <a:r>
-              <a:t>The strip at the bottom answers the organizers' first question, whether we can trade inside three seconds. It is measured end to end in one process: our own footage streamed over WebRTC into the vision engine, a call, a paper order built against a live tennis book, the measured network time to the venue, and the venue's one-second hold, plus a simulated one-second feed. Our own part is tens of milliseconds; the feed and the venue hold dominate. Three seconds is not the real bar, though: the call has to beat the umpire's stamp by about nine-tenths of a second.</a:t>
+              <a:t>The strip at the bottom answers the organizers' first question, whether we can trade inside three seconds. It is measured end to end in one process: our own footage streamed over WebRTC into the vision engine, a call, a paper order built against a live tennis book, the measured network time to the venue, and the venue's one-second hold, plus a simulated one-second feed. Our own part is tens of milliseconds; the feed and the venue hold dominate. Two conditions go with it: the laptop vision engine was fed ten frames a second, every frame, twelve times slower than real time, because it cannot run 120 frames a second live; and every order was a timing probe, because the rule and the risk check declined every call on the pre-match books. Three seconds is not the real bar, though: the call has to beat the umpire's stamp by about nine-tenths of a second.</a:t>
             </a:r>
           </a:p>
           <a:p/>
@@ -4295,7 +4295,7 @@
           <a:p/>
           <a:p>
             <a:r>
-              <a:t>The live paper session (our pre-registered maker plus a taker control) was warming up at build time. Status: warm-up: waiting for trades (3 seen). Primary book: 0 fills, P&amp;L +$0.00. It is a plumbing check; that strategy already failed its blind test.</a:t>
+              <a:t>The live paper session (our pre-registered maker plus a taker control) was finished at build time. Status: final. Primary book: 0 fills, P&amp;L +$0.00. It is a plumbing check; that strategy already failed its blind test.</a:t>
             </a:r>
           </a:p>
           <a:p/>
@@ -8452,7 +8452,7 @@
                 </a:solidFill>
                 <a:latin typeface="Arial" panose="020B0604020202020204" pitchFamily="34" charset="0"/>
               </a:rPr>
-              <a:t>warming up (started 2026-10-03 20:48 UTC)</a:t>
+              <a:t>finished (started 2026-10-03 20:48 UTC)</a:t>
             </a:r>
           </a:p>
           <a:p>
@@ -9385,7 +9385,7 @@
                 </a:solidFill>
                 <a:latin typeface="Arial" panose="020B0604020202020204" pitchFamily="34" charset="0"/>
               </a:rPr>
-              <a:t>All 73 looks at held-out data are in results/oos_peeks.log.</a:t>
+              <a:t>All 77 looks at held-out data are in results/oos_peeks.log.</a:t>
             </a:r>
           </a:p>
         </p:txBody>
@@ -9546,7 +9546,7 @@
                 </a:solidFill>
                 <a:latin typeface="Arial Narrow" panose="020B0606020202030204" pitchFamily="34" charset="0"/>
               </a:rPr>
-              <a:t>73</a:t>
+              <a:t>77</a:t>
             </a:r>
           </a:p>
           <a:p>
@@ -16964,7 +16964,7 @@
                 </a:solidFill>
                 <a:latin typeface="Arial" panose="020B0604020202020204" pitchFamily="34" charset="0"/>
               </a:rPr>
-              <a:t>our footage over WebRTC into the vision engine, a call, a paper order on a live tennis book. Video in → order ready: 54 ms on a laptop (24 traces). With a simulated 1 s feed, the network (65 ms) and the venue's 1 s hold: 2,119 ms, under 3,000 ms.</a:t>
+              <a:t>our footage over WebRTC into the vision engine, a call, a paper order on a live tennis book. Video in → order ready: 54 ms on a laptop (24 traces). With a simulated 1 s feed, the network (65 ms) and the venue's 1 s hold: 2,119 ms, under 3,000 ms. Conditions: CV fed at 10 frames/s, every frame (12x slow motion; the laptop cannot run 120 fps in real time); all 24 orders were timing probes: the rule and the risk check declined every call on pre-match books.</a:t>
             </a:r>
           </a:p>
           <a:p>
@@ -17174,7 +17174,7 @@
                 </a:solidFill>
                 <a:latin typeface="Arial" panose="020B0604020202020204" pitchFamily="34" charset="0"/>
               </a:rPr>
-              <a:t>frame → executable order, p50, incl. simulated 1 s feed and 1 s venue hold</a:t>
+              <a:t>frame → executable order, p50, incl. simulated 1 s feed and 1 s venue hold (timing probes; CV fed at 10 frames/s)</a:t>
             </a:r>
           </a:p>
           <a:p>
@@ -17562,7 +17562,7 @@
                 </a:solidFill>
                 <a:latin typeface="Arial" panose="020B0604020202020204" pitchFamily="34" charset="0"/>
               </a:rPr>
-              <a:t>uses $13.8k–$22.6k at a 100-share net cap; the limit is the stale depth on each point, and a 1,000-share cap loses held out (−$51/day even at V = 0). The full grid is in results/capacity/capacity.json.</a:t>
+              <a:t>(post hoc 3.14 s lag, 10 matches a day) runs up to $28.5k–$40.2k held out ($55.3k–$73.3k in sample) before its Sharpe halves; the range is how we share stale depth with the fast tier. Every match: $65.0k–$96.9k. Pre-registered lag: Sharpe 0.8 held out, no capacity.</a:t>
             </a:r>
           </a:p>
           <a:p>
@@ -17754,7 +17754,7 @@
                 </a:solidFill>
                 <a:latin typeface="Arial Narrow" panose="020B0606020202030204" pitchFamily="34" charset="0"/>
               </a:rPr>
-              <a:t>$1,644</a:t>
+              <a:t>$28.5k–$40.2k</a:t>
             </a:r>
           </a:p>
           <a:p>
@@ -17766,7 +17766,7 @@
                 </a:solidFill>
                 <a:latin typeface="Arial" panose="020B0604020202020204" pitchFamily="34" charset="0"/>
               </a:rPr>
-              <a:t>most the 1 s book can pay for data a month (post hoc)</a:t>
+              <a:t>capital where the CV book's held-out Sharpe halves (1 s feed, post hoc lag)</a:t>
             </a:r>
           </a:p>
           <a:p>
@@ -17782,7 +17782,7 @@
                 </a:solidFill>
                 <a:latin typeface="Arial Narrow" panose="020B0606020202030204" pitchFamily="34" charset="0"/>
               </a:rPr>
-              <a:t>$55</a:t>
+              <a:t>$1,644</a:t>
             </a:r>
           </a:p>
           <a:p>
@@ -17794,7 +17794,7 @@
                 </a:solidFill>
                 <a:latin typeface="Arial" panose="020B0604020202020204" pitchFamily="34" charset="0"/>
               </a:rPr>
-              <a:t>same, pre-registered</a:t>
+              <a:t>most the 1 s book can pay for data a month (post hoc)</a:t>
             </a:r>
           </a:p>
           <a:p>
@@ -20695,7 +20695,7 @@
                 </a:solidFill>
                 <a:latin typeface="Courier New"/>
               </a:rPr>
-              <a:t>6 Rigor                    73                       results/oos_peeks.log  [non-empty lines at build time]</a:t>
+              <a:t>6 Rigor                    77                       results/oos_peeks.log  [non-empty lines at build time]</a:t>
             </a:r>
           </a:p>
           <a:p>
@@ -22480,19 +22480,19 @@
                 </a:solidFill>
                 <a:latin typeface="Courier New"/>
               </a:rPr>
-              <a:t>8 Live engine              WARMING UP               results/live/summary.json :: status, run, started_process, now, counters  [+ STOPPED_&lt;run&gt; marker and file age; 1970 'now' or…</a:t>
-            </a:r>
-          </a:p>
-          <a:p>
-            <a:pPr algn="l"/>
-            <a:r>
-              <a:rPr sz="700" b="0" i="0">
-                <a:solidFill>
-                  <a:srgbClr val="0C1A28"/>
-                </a:solidFill>
-                <a:latin typeface="Courier New"/>
-              </a:rPr>
-              <a:t>8 Live engine              warm-up: waiting for tra results/live/summary.json :: status</a:t>
+              <a:t>8 Live engine              FINISHED                 results/live/summary.json :: status, run, started_process, now, counters  [+ STOPPED_&lt;run&gt; marker and file age; 1970 'now' or…</a:t>
+            </a:r>
+          </a:p>
+          <a:p>
+            <a:pPr algn="l"/>
+            <a:r>
+              <a:rPr sz="700" b="0" i="0">
+                <a:solidFill>
+                  <a:srgbClr val="0C1A28"/>
+                </a:solidFill>
+                <a:latin typeface="Courier New"/>
+              </a:rPr>
+              <a:t>8 Live engine              final                    results/live/summary.json :: status</a:t>
             </a:r>
           </a:p>
           <a:p>
@@ -22528,7 +22528,7 @@
                 </a:solidFill>
                 <a:latin typeface="Courier New"/>
               </a:rPr>
-              <a:t>8 Live engine              2026-10-03 23:26 UTC     results/live/summary.json :: now  [file modification time when now is 1970]</a:t>
+              <a:t>8 Live engine              2026-10-04 02:18 UTC     results/live/summary.json :: now  [file modification time when now is 1970]</a:t>
             </a:r>
           </a:p>
           <a:p>
@@ -22588,6 +22588,30 @@
                 </a:solidFill>
                 <a:latin typeface="Courier New"/>
               </a:rPr>
+              <a:t>8 Live engine              133,717                  results/live/summary.json :: counters  [sum msg_*]</a:t>
+            </a:r>
+          </a:p>
+          <a:p>
+            <a:pPr algn="l"/>
+            <a:r>
+              <a:rPr sz="700" b="0" i="0">
+                <a:solidFill>
+                  <a:srgbClr val="0C1A28"/>
+                </a:solidFill>
+                <a:latin typeface="Courier New"/>
+              </a:rPr>
+              <a:t>8 Live engine              4                        results/live/summary.json :: matches_in_play</a:t>
+            </a:r>
+          </a:p>
+          <a:p>
+            <a:pPr algn="l"/>
+            <a:r>
+              <a:rPr sz="700" b="0" i="0">
+                <a:solidFill>
+                  <a:srgbClr val="0C1A28"/>
+                </a:solidFill>
+                <a:latin typeface="Courier New"/>
+              </a:rPr>
               <a:t>8 Live engine              4.6 ms                   results/engine/online_vs_offline.json :: headline &gt; fp16_cl_fuse_compile_b1_realtime &gt; stream &gt; after_startup &gt; call_ready_ms…</a:t>
             </a:r>
           </a:p>
@@ -22672,6 +22696,18 @@
                 </a:solidFill>
                 <a:latin typeface="Courier New"/>
               </a:rPr>
+              <a:t>8 Live engine              CV fed at 10 frames/s, e results/e2e/summary.json :: budget_with_1s_simulated_feed &gt; conditions</a:t>
+            </a:r>
+          </a:p>
+          <a:p>
+            <a:pPr algn="l"/>
+            <a:r>
+              <a:rPr sz="700" b="0" i="0">
+                <a:solidFill>
+                  <a:srgbClr val="0C1A28"/>
+                </a:solidFill>
+                <a:latin typeface="Courier New"/>
+              </a:rPr>
               <a:t>9 Risk + liquidity + finan $1,000                   results/engine/demo_run.json :: risk_config &gt; max_order_usd</a:t>
             </a:r>
           </a:p>
@@ -22709,42 +22745,6 @@
                 <a:latin typeface="Courier New"/>
               </a:rPr>
               <a:t>9 Risk + liquidity + finan $1,000                   results/engine/demo_run.json :: risk_config &gt; daily_stop_usd</a:t>
-            </a:r>
-          </a:p>
-          <a:p>
-            <a:pPr algn="l"/>
-            <a:r>
-              <a:rPr sz="700" b="0" i="0">
-                <a:solidFill>
-                  <a:srgbClr val="0C1A28"/>
-                </a:solidFill>
-                <a:latin typeface="Courier New"/>
-              </a:rPr>
-              <a:t>9 Risk + liquidity + finan 2 s                      results/engine/demo_run.json :: risk_config &gt; feed_stale_ms</a:t>
-            </a:r>
-          </a:p>
-          <a:p>
-            <a:pPr algn="l"/>
-            <a:r>
-              <a:rPr sz="700" b="0" i="0">
-                <a:solidFill>
-                  <a:srgbClr val="0C1A28"/>
-                </a:solidFill>
-                <a:latin typeface="Courier New"/>
-              </a:rPr>
-              <a:t>9 Risk + liquidity + finan 1 s                      results/engine/demo_run.json :: risk_config &gt; vision_stale_ms</a:t>
-            </a:r>
-          </a:p>
-          <a:p>
-            <a:pPr algn="l"/>
-            <a:r>
-              <a:rPr sz="700" b="0" i="0">
-                <a:solidFill>
-                  <a:srgbClr val="0C1A28"/>
-                </a:solidFill>
-                <a:latin typeface="Courier New"/>
-              </a:rPr>
-              <a:t>9 Risk + liquidity + finan $11.17                   results/risk/risk_stats.json :: liquidity_capital &gt; is_eval &gt; usd_per_trade_quantiles &gt; 0.5</a:t>
             </a:r>
           </a:p>
         </p:txBody>
@@ -22973,6 +22973,42 @@
                 </a:solidFill>
                 <a:latin typeface="Courier New"/>
               </a:rPr>
+              <a:t>9 Risk + liquidity + finan 2 s                      results/engine/demo_run.json :: risk_config &gt; feed_stale_ms</a:t>
+            </a:r>
+          </a:p>
+          <a:p>
+            <a:pPr algn="l"/>
+            <a:r>
+              <a:rPr sz="700" b="0" i="0">
+                <a:solidFill>
+                  <a:srgbClr val="0C1A28"/>
+                </a:solidFill>
+                <a:latin typeface="Courier New"/>
+              </a:rPr>
+              <a:t>9 Risk + liquidity + finan 1 s                      results/engine/demo_run.json :: risk_config &gt; vision_stale_ms</a:t>
+            </a:r>
+          </a:p>
+          <a:p>
+            <a:pPr algn="l"/>
+            <a:r>
+              <a:rPr sz="700" b="0" i="0">
+                <a:solidFill>
+                  <a:srgbClr val="0C1A28"/>
+                </a:solidFill>
+                <a:latin typeface="Courier New"/>
+              </a:rPr>
+              <a:t>9 Risk + liquidity + finan $11.17                   results/risk/risk_stats.json :: liquidity_capital &gt; is_eval &gt; usd_per_trade_quantiles &gt; 0.5</a:t>
+            </a:r>
+          </a:p>
+          <a:p>
+            <a:pPr algn="l"/>
+            <a:r>
+              <a:rPr sz="700" b="0" i="0">
+                <a:solidFill>
+                  <a:srgbClr val="0C1A28"/>
+                </a:solidFill>
+                <a:latin typeface="Courier New"/>
+              </a:rPr>
               <a:t>9 Risk + liquidity + finan $28.3k                   results/v2/causal.json :: causal/is_eval/slip0.0 &gt; capital_usd</a:t>
             </a:r>
           </a:p>
@@ -23333,43 +23369,7 @@
                 </a:solidFill>
                 <a:latin typeface="Courier New"/>
               </a:rPr>
-              <a:t>10 Close                   warming up (started 2026 results/live/summary.json :: status, run, started_process, now, counters  [+ STOPPED_&lt;run&gt; marker and file age; 1970 'now' or…</a:t>
-            </a:r>
-          </a:p>
-          <a:p>
-            <a:pPr algn="l"/>
-            <a:r>
-              <a:rPr sz="700" b="0" i="0">
-                <a:solidFill>
-                  <a:srgbClr val="0C1A28"/>
-                </a:solidFill>
-                <a:latin typeface="Courier New"/>
-              </a:rPr>
-              <a:t>10 Close                   v2 (frozen fast-tier boo results/financials/financials.json :: pending</a:t>
-            </a:r>
-          </a:p>
-          <a:p>
-            <a:pPr algn="l"/>
-            <a:r>
-              <a:rPr sz="700" b="0" i="0">
-                <a:solidFill>
-                  <a:srgbClr val="0C1A28"/>
-                </a:solidFill>
-                <a:latin typeface="Courier New"/>
-              </a:rPr>
-              <a:t>11 Q1                      +0.10¢                   results/v2/causal.json :: causal/burned_oos/slip0.005 &gt; per_share_c</a:t>
-            </a:r>
-          </a:p>
-          <a:p>
-            <a:pPr algn="l"/>
-            <a:r>
-              <a:rPr sz="700" b="0" i="0">
-                <a:solidFill>
-                  <a:srgbClr val="0C1A28"/>
-                </a:solidFill>
-                <a:latin typeface="Courier New"/>
-              </a:rPr>
-              <a:t>11 Q1                      [−0.41, 0.63]            results/v2/causal.json :: causal/burned_oos/slip0.005 &gt; per_share_ci_c</a:t>
+              <a:t>10 Close                   finished (started 2026-1 results/live/summary.json :: status, run, started_process, now, counters  [+ STOPPED_&lt;run&gt; marker and file age; 1970 'now' or…</a:t>
             </a:r>
           </a:p>
         </p:txBody>
@@ -23598,6 +23598,42 @@
                 </a:solidFill>
                 <a:latin typeface="Courier New"/>
               </a:rPr>
+              <a:t>10 Close                   v2 (frozen fast-tier boo results/financials/financials.json :: pending</a:t>
+            </a:r>
+          </a:p>
+          <a:p>
+            <a:pPr algn="l"/>
+            <a:r>
+              <a:rPr sz="700" b="0" i="0">
+                <a:solidFill>
+                  <a:srgbClr val="0C1A28"/>
+                </a:solidFill>
+                <a:latin typeface="Courier New"/>
+              </a:rPr>
+              <a:t>11 Q1                      +0.10¢                   results/v2/causal.json :: causal/burned_oos/slip0.005 &gt; per_share_c</a:t>
+            </a:r>
+          </a:p>
+          <a:p>
+            <a:pPr algn="l"/>
+            <a:r>
+              <a:rPr sz="700" b="0" i="0">
+                <a:solidFill>
+                  <a:srgbClr val="0C1A28"/>
+                </a:solidFill>
+                <a:latin typeface="Courier New"/>
+              </a:rPr>
+              <a:t>11 Q1                      [−0.41, 0.63]            results/v2/causal.json :: causal/burned_oos/slip0.005 &gt; per_share_ci_c</a:t>
+            </a:r>
+          </a:p>
+          <a:p>
+            <a:pPr algn="l"/>
+            <a:r>
+              <a:rPr sz="700" b="0" i="0">
+                <a:solidFill>
+                  <a:srgbClr val="0C1A28"/>
+                </a:solidFill>
+                <a:latin typeface="Courier New"/>
+              </a:rPr>
               <a:t>11 Q1                      11/11                    results/summary.json :: is &gt; h6_walkforward (months before universe &gt; oos_start) + oos &gt; h6_walkforward  [follow_res_c &lt; 0]</a:t>
             </a:r>
           </a:p>
@@ -23694,7 +23730,7 @@
                 </a:solidFill>
                 <a:latin typeface="Courier New"/>
               </a:rPr>
-              <a:t>12 Q2                      73                       results/oos_peeks.log  [non-empty lines]</a:t>
+              <a:t>12 Q2                      77                       results/oos_peeks.log  [non-empty lines]</a:t>
             </a:r>
           </a:p>
           <a:p>
@@ -23959,42 +23995,6 @@
                 <a:latin typeface="Courier New"/>
               </a:rPr>
               <a:t>14 Q4                      −0.84¢                   results/v2/cost_stress.json :: burned_oos/costs_x2 &gt; per_share_c</a:t>
-            </a:r>
-          </a:p>
-          <a:p>
-            <a:pPr algn="l"/>
-            <a:r>
-              <a:rPr sz="700" b="0" i="0">
-                <a:solidFill>
-                  <a:srgbClr val="0C1A28"/>
-                </a:solidFill>
-                <a:latin typeface="Courier New"/>
-              </a:rPr>
-              <a:t>14 Q4                      8.2%                     results/financials/financials.json :: strategies &gt; v2 &gt; periods &gt; OOS &gt; breakeven_taker_fee &gt; rate_before_fixed_costs</a:t>
-            </a:r>
-          </a:p>
-          <a:p>
-            <a:pPr algn="l"/>
-            <a:r>
-              <a:rPr sz="700" b="0" i="0">
-                <a:solidFill>
-                  <a:srgbClr val="0C1A28"/>
-                </a:solidFill>
-                <a:latin typeface="Courier New"/>
-              </a:rPr>
-              <a:t>15 Q5                      $2.84B                   results/summary.json :: universe &gt; volume_usd</a:t>
-            </a:r>
-          </a:p>
-          <a:p>
-            <a:pPr algn="l"/>
-            <a:r>
-              <a:rPr sz="700" b="0" i="0">
-                <a:solidFill>
-                  <a:srgbClr val="0C1A28"/>
-                </a:solidFill>
-                <a:latin typeface="Courier New"/>
-              </a:rPr>
-              <a:t>15 Q5                      0                        results/engine/live_market_run.json :: orders_sent</a:t>
             </a:r>
           </a:p>
         </p:txBody>
@@ -24223,6 +24223,42 @@
                 </a:solidFill>
                 <a:latin typeface="Courier New"/>
               </a:rPr>
+              <a:t>14 Q4                      8.2%                     results/financials/financials.json :: strategies &gt; v2 &gt; periods &gt; OOS &gt; breakeven_taker_fee &gt; rate_before_fixed_costs</a:t>
+            </a:r>
+          </a:p>
+          <a:p>
+            <a:pPr algn="l"/>
+            <a:r>
+              <a:rPr sz="700" b="0" i="0">
+                <a:solidFill>
+                  <a:srgbClr val="0C1A28"/>
+                </a:solidFill>
+                <a:latin typeface="Courier New"/>
+              </a:rPr>
+              <a:t>15 Q5                      $2.84B                   results/summary.json :: universe &gt; volume_usd</a:t>
+            </a:r>
+          </a:p>
+          <a:p>
+            <a:pPr algn="l"/>
+            <a:r>
+              <a:rPr sz="700" b="0" i="0">
+                <a:solidFill>
+                  <a:srgbClr val="0C1A28"/>
+                </a:solidFill>
+                <a:latin typeface="Courier New"/>
+              </a:rPr>
+              <a:t>15 Q5                      0                        results/engine/live_market_run.json :: orders_sent</a:t>
+            </a:r>
+          </a:p>
+          <a:p>
+            <a:pPr algn="l"/>
+            <a:r>
+              <a:rPr sz="700" b="0" i="0">
+                <a:solidFill>
+                  <a:srgbClr val="0C1A28"/>
+                </a:solidFill>
+                <a:latin typeface="Courier New"/>
+              </a:rPr>
               <a:t>16 Q6                      11/11                    results/summary.json :: is &gt; h6_walkforward (months before universe &gt; oos_start) + oos &gt; h6_walkforward  [net30_c &gt; 0]</a:t>
             </a:r>
           </a:p>
@@ -24584,42 +24620,6 @@
                 <a:latin typeface="Courier New"/>
               </a:rPr>
               <a:t>19 Q9                      $1.48M                   results/v2/causal.json :: causal/is_eval/slip0.0 &gt; usd_traded</a:t>
-            </a:r>
-          </a:p>
-          <a:p>
-            <a:pPr algn="l"/>
-            <a:r>
-              <a:rPr sz="700" b="0" i="0">
-                <a:solidFill>
-                  <a:srgbClr val="0C1A28"/>
-                </a:solidFill>
-                <a:latin typeface="Courier New"/>
-              </a:rPr>
-              <a:t>19 Q9                      206                      results/v2/causal.json :: causal/is_eval/slip0.0 &gt; days</a:t>
-            </a:r>
-          </a:p>
-          <a:p>
-            <a:pPr algn="l"/>
-            <a:r>
-              <a:rPr sz="700" b="0" i="0">
-                <a:solidFill>
-                  <a:srgbClr val="0C1A28"/>
-                </a:solidFill>
-                <a:latin typeface="Courier New"/>
-              </a:rPr>
-              <a:t>19 Q9                      $28.3k                   results/v2/causal.json :: causal/is_eval/slip0.0 &gt; capital_usd</a:t>
-            </a:r>
-          </a:p>
-          <a:p>
-            <a:pPr algn="l"/>
-            <a:r>
-              <a:rPr sz="700" b="0" i="0">
-                <a:solidFill>
-                  <a:srgbClr val="0C1A28"/>
-                </a:solidFill>
-                <a:latin typeface="Courier New"/>
-              </a:rPr>
-              <a:t>19 Q9                      $11.17                   results/risk/risk_stats.json :: liquidity_capital &gt; is_eval &gt; usd_per_trade_quantiles &gt; 0.5</a:t>
             </a:r>
           </a:p>
         </p:txBody>
@@ -24848,6 +24848,42 @@
                 </a:solidFill>
                 <a:latin typeface="Courier New"/>
               </a:rPr>
+              <a:t>19 Q9                      206                      results/v2/causal.json :: causal/is_eval/slip0.0 &gt; days</a:t>
+            </a:r>
+          </a:p>
+          <a:p>
+            <a:pPr algn="l"/>
+            <a:r>
+              <a:rPr sz="700" b="0" i="0">
+                <a:solidFill>
+                  <a:srgbClr val="0C1A28"/>
+                </a:solidFill>
+                <a:latin typeface="Courier New"/>
+              </a:rPr>
+              <a:t>19 Q9                      $28.3k                   results/v2/causal.json :: causal/is_eval/slip0.0 &gt; capital_usd</a:t>
+            </a:r>
+          </a:p>
+          <a:p>
+            <a:pPr algn="l"/>
+            <a:r>
+              <a:rPr sz="700" b="0" i="0">
+                <a:solidFill>
+                  <a:srgbClr val="0C1A28"/>
+                </a:solidFill>
+                <a:latin typeface="Courier New"/>
+              </a:rPr>
+              <a:t>19 Q9                      $11.17                   results/risk/risk_stats.json :: liquidity_capital &gt; is_eval &gt; usd_per_trade_quantiles &gt; 0.5</a:t>
+            </a:r>
+          </a:p>
+          <a:p>
+            <a:pPr algn="l"/>
+            <a:r>
+              <a:rPr sz="700" b="0" i="0">
+                <a:solidFill>
+                  <a:srgbClr val="0C1A28"/>
+                </a:solidFill>
+                <a:latin typeface="Courier New"/>
+              </a:rPr>
               <a:t>19 Q9                      $82.3k                   results/financials/financials.json :: strategies &gt; v2 &gt; ceiling &gt; IS &gt; fast_tier_qualified_print_usd_per_day</a:t>
             </a:r>
           </a:p>
@@ -25209,42 +25245,6 @@
                 <a:latin typeface="Courier New"/>
               </a:rPr>
               <a:t>20 Q10                     [−0.35, 0.86]            results/redteam/derived.json :: keys &gt; cv.pool482.oos.ci &gt; value</a:t>
-            </a:r>
-          </a:p>
-          <a:p>
-            <a:pPr algn="l"/>
-            <a:r>
-              <a:rPr sz="700" b="0" i="0">
-                <a:solidFill>
-                  <a:srgbClr val="0C1A28"/>
-                </a:solidFill>
-                <a:latin typeface="Courier New"/>
-              </a:rPr>
-              <a:t>23 Q13                     54 ms                    results/e2e/summary.json :: budget_with_1s_simulated_feed &gt; ours_capture_to_order_ready_ms &gt; p50</a:t>
-            </a:r>
-          </a:p>
-          <a:p>
-            <a:pPr algn="l"/>
-            <a:r>
-              <a:rPr sz="700" b="0" i="0">
-                <a:solidFill>
-                  <a:srgbClr val="0C1A28"/>
-                </a:solidFill>
-                <a:latin typeface="Courier New"/>
-              </a:rPr>
-              <a:t>23 Q13                     65 ms                    results/e2e/summary.json :: budget_with_1s_simulated_feed &gt; network_one_way_ms &gt; p50</a:t>
-            </a:r>
-          </a:p>
-          <a:p>
-            <a:pPr algn="l"/>
-            <a:r>
-              <a:rPr sz="700" b="0" i="0">
-                <a:solidFill>
-                  <a:srgbClr val="0C1A28"/>
-                </a:solidFill>
-                <a:latin typeface="Courier New"/>
-              </a:rPr>
-              <a:t>23 Q13                     2,119 ms                 results/e2e/summary.json :: budget_with_1s_simulated_feed &gt; total_ms &gt; p50</a:t>
             </a:r>
           </a:p>
         </p:txBody>
@@ -25473,6 +25473,42 @@
                 </a:solidFill>
                 <a:latin typeface="Courier New"/>
               </a:rPr>
+              <a:t>23 Q13                     54 ms                    results/e2e/summary.json :: budget_with_1s_simulated_feed &gt; ours_capture_to_order_ready_ms &gt; p50</a:t>
+            </a:r>
+          </a:p>
+          <a:p>
+            <a:pPr algn="l"/>
+            <a:r>
+              <a:rPr sz="700" b="0" i="0">
+                <a:solidFill>
+                  <a:srgbClr val="0C1A28"/>
+                </a:solidFill>
+                <a:latin typeface="Courier New"/>
+              </a:rPr>
+              <a:t>23 Q13                     65 ms                    results/e2e/summary.json :: budget_with_1s_simulated_feed &gt; network_one_way_ms &gt; p50</a:t>
+            </a:r>
+          </a:p>
+          <a:p>
+            <a:pPr algn="l"/>
+            <a:r>
+              <a:rPr sz="700" b="0" i="0">
+                <a:solidFill>
+                  <a:srgbClr val="0C1A28"/>
+                </a:solidFill>
+                <a:latin typeface="Courier New"/>
+              </a:rPr>
+              <a:t>23 Q13                     2,119 ms                 results/e2e/summary.json :: budget_with_1s_simulated_feed &gt; total_ms &gt; p50</a:t>
+            </a:r>
+          </a:p>
+          <a:p>
+            <a:pPr algn="l"/>
+            <a:r>
+              <a:rPr sz="700" b="0" i="0">
+                <a:solidFill>
+                  <a:srgbClr val="0C1A28"/>
+                </a:solidFill>
+                <a:latin typeface="Courier New"/>
+              </a:rPr>
               <a:t>23 Q13                     24                       results/e2e/summary.json :: our_pipeline_frame_to_order_ready_ms &gt; n</a:t>
             </a:r>
           </a:p>
@@ -25485,6 +25521,18 @@
                 </a:solidFill>
                 <a:latin typeface="Courier New"/>
               </a:rPr>
+              <a:t>23 Q13                     CV fed at 10 frames/s, e results/e2e/summary.json :: budget_with_1s_simulated_feed &gt; conditions &gt; sentence</a:t>
+            </a:r>
+          </a:p>
+          <a:p>
+            <a:pPr algn="l"/>
+            <a:r>
+              <a:rPr sz="700" b="0" i="0">
+                <a:solidFill>
+                  <a:srgbClr val="0C1A28"/>
+                </a:solidFill>
+                <a:latin typeface="Courier New"/>
+              </a:rPr>
               <a:t>23 Q13                     4.6 ms                   results/engine/online_vs_offline.json :: headline &gt; fp16_cl_fuse_compile_b1_realtime &gt; stream &gt; after_startup &gt; call_ready_ms…</a:t>
             </a:r>
           </a:p>
@@ -25545,7 +25593,43 @@
                 </a:solidFill>
                 <a:latin typeface="Courier New"/>
               </a:rPr>
-              <a:t>24 Q14                     $13.8k–$22.6k            results/redteam/derived.json :: keys &gt; cv.pre.oos.cap / cv.cal.oos.cap</a:t>
+              <a:t>24 Q14                     $28.5k–$40.2k            results/capacity/capacity.json :: answers &gt; cv_prorata / cv &gt; lagcal|phi0.5|cov10|g1|burned_OOS &gt; capital_where_sharpe_halves…</a:t>
+            </a:r>
+          </a:p>
+          <a:p>
+            <a:pPr algn="l"/>
+            <a:r>
+              <a:rPr sz="700" b="0" i="0">
+                <a:solidFill>
+                  <a:srgbClr val="0C1A28"/>
+                </a:solidFill>
+                <a:latin typeface="Courier New"/>
+              </a:rPr>
+              <a:t>24 Q14                     $55.3k–$73.3k            results/capacity/capacity.json :: answers &gt; cv_prorata / cv &gt; lagcal|phi0.5|cov10|g1|IS &gt; capital_where_sharpe_halves_usd</a:t>
+            </a:r>
+          </a:p>
+          <a:p>
+            <a:pPr algn="l"/>
+            <a:r>
+              <a:rPr sz="700" b="0" i="0">
+                <a:solidFill>
+                  <a:srgbClr val="0C1A28"/>
+                </a:solidFill>
+                <a:latin typeface="Courier New"/>
+              </a:rPr>
+              <a:t>24 Q14                     $65.0k–$96.9k            results/capacity/capacity.json :: answers &gt; cv_prorata / cv &gt; lagcal|phi0.5|covall|g1|burned_OOS &gt; capital_where_sharpe_halve…</a:t>
+            </a:r>
+          </a:p>
+          <a:p>
+            <a:pPr algn="l"/>
+            <a:r>
+              <a:rPr sz="700" b="0" i="0">
+                <a:solidFill>
+                  <a:srgbClr val="0C1A28"/>
+                </a:solidFill>
+                <a:latin typeface="Courier New"/>
+              </a:rPr>
+              <a:t>24 Q14                     0.8                      results/capacity/capacity.json :: answers &gt; cv &gt; prereg|phi0.5|cov10|g1|burned_OOS &gt; sharpe_ref_smallest_size</a:t>
             </a:r>
           </a:p>
           <a:p>
@@ -25606,18 +25690,6 @@
                 <a:latin typeface="Courier New"/>
               </a:rPr>
               <a:t>24 Q14                     −$110                    results/redteam/derived.json :: keys &gt; cv.cal.oos.net_central &gt; value</a:t>
-            </a:r>
-          </a:p>
-          <a:p>
-            <a:pPr algn="l"/>
-            <a:r>
-              <a:rPr sz="700" b="0" i="0">
-                <a:solidFill>
-                  <a:srgbClr val="0C1A28"/>
-                </a:solidFill>
-                <a:latin typeface="Courier New"/>
-              </a:rPr>
-              <a:t>24 Q14                     −$51                     results/redteam/derived.json :: keys &gt; cv.netcap1000.oos.usd &gt; value</a:t>
             </a:r>
           </a:p>
         </p:txBody>
@@ -29595,7 +29667,7 @@
                 </a:solidFill>
                 <a:latin typeface="Arial" panose="020B0604020202020204" pitchFamily="34" charset="0"/>
               </a:rPr>
-              <a:t>Every look at held-out data is logged (73 lines at build time). Failures stay in the record.</a:t>
+              <a:t>Every look at held-out data is logged (77 lines at build time). Failures stay in the record.</a:t>
             </a:r>
           </a:p>
           <a:p>
@@ -31490,11 +31562,11 @@
             <a:r>
               <a:rPr sz="2000" b="1" i="0">
                 <a:solidFill>
-                  <a:srgbClr val="F07A66"/>
+                  <a:srgbClr val="8FB0D1"/>
                 </a:solidFill>
                 <a:latin typeface="Arial Narrow" panose="020B0606020202030204" pitchFamily="34" charset="0"/>
               </a:rPr>
-              <a:t>WARMING UP</a:t>
+              <a:t>FINISHED</a:t>
             </a:r>
           </a:p>
           <a:p>
@@ -31510,7 +31582,7 @@
                 </a:solidFill>
                 <a:latin typeface="Arial" panose="020B0604020202020204" pitchFamily="34" charset="0"/>
               </a:rPr>
-              <a:t>Run 20261003T204812Z  ·  started 2026-10-03 20:48 UTC  ·  as of 2026-10-03 23:26 UTC</a:t>
+              <a:t>Run 20261003T204812Z  ·  started 2026-10-03 20:48 UTC  ·  as of 2026-10-04 02:18 UTC</a:t>
             </a:r>
           </a:p>
           <a:p>
@@ -31535,7 +31607,7 @@
                 </a:solidFill>
                 <a:latin typeface="Arial" panose="020B0604020202020204" pitchFamily="34" charset="0"/>
               </a:rPr>
-              <a:t>warm-up: waiting for trades (3 seen)</a:t>
+              <a:t>final</a:t>
             </a:r>
           </a:p>
           <a:p>
@@ -31545,13 +31617,45 @@
               </a:spcBef>
             </a:pPr>
             <a:r>
+              <a:rPr sz="1250" b="1" i="0">
+                <a:solidFill>
+                  <a:srgbClr val="FFFFFF"/>
+                </a:solidFill>
+                <a:latin typeface="Arial" panose="020B0604020202020204" pitchFamily="34" charset="0"/>
+              </a:rPr>
+              <a:t>Primary book: 0 fills, P&amp;L +$0.00 on $10,000 paper capital</a:t>
+            </a:r>
+          </a:p>
+          <a:p>
+            <a:pPr algn="l">
+              <a:spcBef>
+                <a:spcPts val="300"/>
+              </a:spcBef>
+            </a:pPr>
+            <a:r>
               <a:rPr sz="1150" b="0" i="0">
                 <a:solidFill>
                   <a:srgbClr val="FFFFFF"/>
                 </a:solidFill>
                 <a:latin typeface="Arial" panose="020B0604020202020204" pitchFamily="34" charset="0"/>
               </a:rPr>
-              <a:t>No quotes yet: quoting starts after a warm-up check on 50 public trades. Fills and P&amp;L appear once it quotes.</a:t>
+              <a:t>Taker control: 0 fills</a:t>
+            </a:r>
+          </a:p>
+          <a:p>
+            <a:pPr algn="l">
+              <a:spcBef>
+                <a:spcPts val="600"/>
+              </a:spcBef>
+            </a:pPr>
+            <a:r>
+              <a:rPr sz="1100" b="0" i="0">
+                <a:solidFill>
+                  <a:srgbClr val="9FB3C8"/>
+                </a:solidFill>
+                <a:latin typeface="Arial" panose="020B0604020202020204" pitchFamily="34" charset="0"/>
+              </a:rPr>
+              <a:t>133,717 book messages · 4 match(es) in play</a:t>
             </a:r>
           </a:p>
           <a:p>
@@ -31715,7 +31819,7 @@
                 </a:solidFill>
                 <a:latin typeface="Arial" panose="020B0604020202020204" pitchFamily="34" charset="0"/>
               </a:rPr>
-              <a:t>CAN WE TRADE INSIDE 3 s? FRAME → EXECUTABLE PAPER ORDER, MEASURED END TO END (24 ORDER TRACES; ORDER NOT SENT)</a:t>
+              <a:t>CAN WE TRADE INSIDE 3 s? FRAME → EXECUTABLE PAPER ORDER, MEASURED END TO END (24 TIMING PROBES; ORDER NOT SENT)</a:t>
             </a:r>
           </a:p>
         </p:txBody>
@@ -32056,7 +32160,7 @@
         <p:spPr>
           <a:xfrm>
             <a:off x="548640" y="6071616"/>
-            <a:ext cx="11094415" cy="347472"/>
+            <a:ext cx="11094415" cy="384048"/>
           </a:xfrm>
           <a:prstGeom prst="rect">
             <a:avLst/>
@@ -32071,13 +32175,13 @@
           <a:p>
             <a:pPr algn="l"/>
             <a:r>
-              <a:rPr sz="1050" b="0" i="0">
+              <a:rPr sz="950" b="0" i="0">
                 <a:solidFill>
                   <a:srgbClr val="566676"/>
                 </a:solidFill>
                 <a:latin typeface="Arial" panose="020B0604020202020204" pitchFamily="34" charset="0"/>
               </a:rPr>
-              <a:t>Ours, video in → paper order ready: 54 ms (laptop) · network to the venue 65 ms · total 2,119 ms. On a GPU the vision call is ready in 4.6 ms. The real bar is tighter: the call must beat the umpire's stamp by ~0.9 s (slide 7).</a:t>
+              <a:t>Ours, video in → paper order ready: 54 ms (laptop) · network to the venue 65 ms · total 2,119 ms. CV fed at 10 frames/s, every frame (12x slow motion; the laptop cannot run 120 fps in real time); all 24 orders were timing probes: the rule and the risk check declined every call on pre-match books. GPU vision call-ready 4.6 ms. Timing margin is not trading margin: the call must beat the umpire's stamp by ~0.9 s (slide 7).</a:t>
             </a:r>
           </a:p>
         </p:txBody>

--- a/docs/deck/courtside.pptx
+++ b/docs/deck/courtside.pptx
@@ -528,7 +528,7 @@
           </a:p>
           <a:p>
             <a:r>
-              <a:t>We're COURTSIDE, four of us from the University of Florida. Polymarket reprices live tennis about a second after every point. We built computer vision that knows the point is over before the ball lands, and we priced what that speed is worth.</a:t>
+              <a:t>We're COURTSIDE, four of us from the University of Florida. Polymarket reprices live tennis about a second after every point. Our computer vision calls table-tennis points before the ball lands; in simulation, we priced that speed for tennis.</a:t>
             </a:r>
           </a:p>
           <a:p/>
@@ -1176,13 +1176,13 @@
           </a:p>
           <a:p>
             <a:r>
-              <a:t>We tried to break it. 4,219 variants, and every look at held-out data is logged. Every blind test of a tradable book failed: unseen markets, the maker book, the v3 rule, and a replay on nine real order books. Doubling fees erases v2 out of sample. One pre-registered blind test is left, and its result fills that box automatically when it runs.</a:t>
+              <a:t>We tried to break it: 4,219 variants, every held-out look logged. Every blind test of a tradable book failed: unseen markets, the maker book, the v3 rule, a replay on nine real books. Doubled fees erase v2 held out; luck is not ruled out. Our pre-registered forward test was not run in time, and the box says so.</a:t>
             </a:r>
           </a:p>
           <a:p/>
           <a:p>
             <a:r>
-              <a:t>The forward-test box reads results/v2/forward.json at build time; rebuild the deck after the one run (backup Q12 covers reproduction).</a:t>
+              <a:t>The forward-test box follows HYPOTHESIS_V2.md A5 (forward test not run); results/v2/forward.json absent at build time. The video's 'blind tests: 2 pass · 4 fail' also counts two blind tests that are not tradable books (table-tennis H3 precision; v2's unseen markets in sample): every blind test of a tradable book failed.</a:t>
             </a:r>
           </a:p>
         </p:txBody>
@@ -4322,7 +4322,7 @@
         <p:spPr>
           <a:xfrm>
             <a:off x="640080" y="3063240"/>
-            <a:ext cx="9601200" cy="1005840"/>
+            <a:ext cx="10911535" cy="1005840"/>
           </a:xfrm>
           <a:prstGeom prst="rect">
             <a:avLst/>
@@ -4337,25 +4337,25 @@
           <a:p>
             <a:pPr algn="l"/>
             <a:r>
-              <a:rPr sz="2600" b="0" i="0">
+              <a:rPr sz="2400" b="0" i="0">
                 <a:solidFill>
                   <a:srgbClr val="FFFFFF"/>
                 </a:solidFill>
                 <a:latin typeface="Inter"/>
               </a:rPr>
-              <a:t>Computer vision calls the tennis point before the ball lands.</a:t>
+              <a:t>Computer vision calls table-tennis points before the ball lands.</a:t>
             </a:r>
           </a:p>
           <a:p>
             <a:pPr algn="l"/>
             <a:r>
-              <a:rPr sz="2600" b="0" i="0">
+              <a:rPr sz="2400" b="0" i="0">
                 <a:solidFill>
                   <a:srgbClr val="A1A1A6"/>
                 </a:solidFill>
                 <a:latin typeface="Inter"/>
               </a:rPr>
-              <a:t>We measured what that speed is worth on Polymarket.</a:t>
+              <a:t>We priced that speed for Polymarket tennis, in simulation.</a:t>
             </a:r>
           </a:p>
         </p:txBody>
@@ -5419,17 +5419,17 @@
           <a:p>
             <a:pPr algn="l">
               <a:lnSpc>
-                <a:spcPct val="115000"/>
+                <a:spcPct val="110000"/>
               </a:lnSpc>
             </a:pPr>
             <a:r>
-              <a:rPr sz="1100" b="0" i="0">
+              <a:rPr sz="1050" b="0" i="0">
                 <a:solidFill>
                   <a:srgbClr val="A1A1A6"/>
                 </a:solidFill>
                 <a:latin typeface="Inter"/>
               </a:rPr>
-              <a:t>Paper trading only. CV strategy simulated at an assumed feed latency (licensed feed not purchased). Footage: OpenTTGames, CC BY-NC-SA 4.0.</a:t>
+              <a:t>Paper trading only. CV strategy simulated at an assumed feed latency (licensed feed not purchased). Footage: OpenTTGames, CC BY-NC-SA 4.0; tennis rally: “Tennis Players Playing Match” by Gelato Prod, Pexels (Pexels License). Video voice: AI (ElevenLabs).</a:t>
             </a:r>
           </a:p>
         </p:txBody>
@@ -5742,7 +5742,7 @@
                 </a:solidFill>
                 <a:latin typeface="Inter"/>
               </a:rPr>
-              <a:t>Our part is 54 ms on a laptop (vision 4.6 ms p50 on an L4 GPU at 119.9 fps, 0 of 102,120 frames dropped). WebRTC frame to call: 46 ms p50, 67 ms p99. Network: 67 ms from Florida, 2 ms from London; then the venue holds every taker order 1 s.</a:t>
+              <a:t>Our part is 54 ms on a laptop (vision 4.6 ms p50 per frame on an L4 GPU at 119.9 fps, 6.9 ms per emitted call as in the video; 0 of 102,120 frames dropped). WebRTC frame to call: 46 ms p50, 67 ms p99. Network: 67 ms from Florida, 2 ms from London; then the venue holds every taker order 1 s.</a:t>
             </a:r>
           </a:p>
           <a:p>
@@ -5796,7 +5796,7 @@
                 </a:solidFill>
                 <a:latin typeface="Inter"/>
               </a:rPr>
-              <a:t>Evidence: results/e2e/summary.json; results/engine/online_vs_offline.json; results/webrtc/latency.json; paper Fig. 4</a:t>
+              <a:t>Evidence: results/e2e/summary.json; results/engine/online_vs_offline.json; results/webrtc/latency.json; paper Fig. 1</a:t>
             </a:r>
           </a:p>
         </p:txBody>
@@ -6187,7 +6187,7 @@
                 </a:solidFill>
                 <a:latin typeface="Inter"/>
               </a:rPr>
-              <a:t>Evidence: results/capacity/capacity.json; results/alpha/alpha.json::H_capacity; paper Section 7, Fig. A8</a:t>
+              <a:t>Evidence: results/capacity/capacity.json; results/alpha/alpha.json::H_capacity; paper Section 7, Fig. A4</a:t>
             </a:r>
           </a:p>
         </p:txBody>
@@ -6554,7 +6554,7 @@
                 </a:solidFill>
                 <a:latin typeface="Inter"/>
               </a:rPr>
-              <a:t>Evidence: results/home_stream/sub_second_routes.json; results/tier0/latency_sweep.json::sources; paper Table A-ladder</a:t>
+              <a:t>Evidence: results/home_stream/sub_second_routes.json; results/tier0/latency_sweep.json::sources; paper Fig. A3a, Appendix D</a:t>
             </a:r>
           </a:p>
         </p:txBody>
@@ -6921,7 +6921,7 @@
                 </a:solidFill>
                 <a:latin typeface="Inter"/>
               </a:rPr>
-              <a:t>Evidence: results/replay/replay.json; research/v2/tier0/RESULTS.md §8; paper Table 2, Fig. A7</a:t>
+              <a:t>Evidence: results/replay/replay.json; research/v2/tier0/RESULTS.md §8; paper Table A1, Fig. A2</a:t>
             </a:r>
           </a:p>
         </p:txBody>
@@ -8389,7 +8389,7 @@
                 </a:solidFill>
                 <a:latin typeface="Inter"/>
               </a:rPr>
-              <a:t>Evidence: results/v2/cost_stress.json; results/v2/note_metrics.json; paper Table 2</a:t>
+              <a:t>Evidence: results/v2/cost_stress.json; results/v2/note_metrics.json; paper Table 1</a:t>
             </a:r>
           </a:p>
         </p:txBody>
@@ -8756,7 +8756,7 @@
                 </a:solidFill>
                 <a:latin typeface="Inter"/>
               </a:rPr>
-              <a:t>Evidence: results/financials/financials.json; paper Section 7, Table A-costs</a:t>
+              <a:t>Evidence: results/financials/financials.json; paper Section 7, Fig. A5, Appendix D</a:t>
             </a:r>
           </a:p>
         </p:txBody>
@@ -8894,7 +8894,7 @@
                 </a:solidFill>
                 <a:latin typeface="Inter"/>
               </a:rPr>
-              <a:t>measured on public Polymarket books; stamp lag after the point not measured</a:t>
+              <a:t>public Polymarket books · stamp lag not measured · CV calls: table tennis (tennis simulated)</a:t>
             </a:r>
           </a:p>
         </p:txBody>
@@ -10769,7 +10769,7 @@
                 </a:solidFill>
                 <a:latin typeface="Inter"/>
               </a:rPr>
-              <a:t>Evidence: docs/RISK.md; engine/risk/; results/alpha/alpha.json::headline; paper Section 6, Fig. A5</a:t>
+              <a:t>Evidence: docs/RISK.md; engine/risk/; results/alpha/alpha.json::headline; paper Section 6</a:t>
             </a:r>
           </a:p>
         </p:txBody>
@@ -12138,7 +12138,7 @@
                 </a:solidFill>
                 <a:latin typeface="Inter"/>
               </a:rPr>
-              <a:t>It calls the point before the ball lands</a:t>
+              <a:t>It calls table-tennis points before the ball lands</a:t>
             </a:r>
           </a:p>
         </p:txBody>
@@ -12393,17 +12393,17 @@
           <a:p>
             <a:pPr algn="l">
               <a:lnSpc>
-                <a:spcPct val="110000"/>
+                <a:spcPct val="105000"/>
               </a:lnSpc>
             </a:pPr>
             <a:r>
-              <a:rPr sz="1000" b="0" i="0">
+              <a:rPr sz="950" b="0" i="0">
                 <a:solidFill>
                   <a:srgbClr val="A1A1A6"/>
                 </a:solidFill>
                 <a:latin typeface="Inter"/>
               </a:rPr>
-              <a:t>From our 90 s video (segment 24 s, muted, loops): engine calls on real held-out table tennis, our tracker on a licensed tennis rally, the spin model in simulated physics.</a:t>
+              <a:t>From our 90 s video (segment 24 s, muted, loops): engine calls on real held-out table tennis, our tracker on a licensed tennis rally (no calls), the spin model in simulated physics. Tennis rally: “Tennis Players Playing Match” by Gelato Prod, Pexels (Pexels License).</a:t>
             </a:r>
           </a:p>
         </p:txBody>
@@ -12730,7 +12730,7 @@
                 </a:solidFill>
                 <a:latin typeface="Inter"/>
               </a:rPr>
-              <a:t>per frame p50 (12.2 ms p99) at 119.9 fps; 0 of 102,120 frames dropped</a:t>
+              <a:t>per frame p50 (12.2 ms p99) at 119.9 fps; 0 of 102,120 frames dropped; the video's 6.9 ms is the p50 per emitted call</a:t>
             </a:r>
           </a:p>
         </p:txBody>
@@ -13069,7 +13069,7 @@
       </p:sp>
       <p:pic>
         <p:nvPicPr>
-          <p:cNvPr id="8" name="Fig: frame to trade (paper Fig. 4)" descr="fig4_frame_to_trade.png"/>
+          <p:cNvPr id="8" name="Fig: frame to trade (paper Fig. 1)" descr="fig4_frame_to_trade.png"/>
           <p:cNvPicPr>
             <a:picLocks noChangeAspect="1"/>
           </p:cNvPicPr>
@@ -13125,7 +13125,7 @@
                 </a:solidFill>
                 <a:latin typeface="Inter"/>
               </a:rPr>
-              <a:t>Stage means of 24 traces: our footage over WebRTC into the CV engine on a laptop, a simulated 1 s licensed feed, the measured network and the venue's 1 s hold. Shaded: when the book reprices. Source: paper Fig. 4, results/e2e/summary.json.</a:t>
+              <a:t>Stage means of 24 traces: our footage over WebRTC into the CV engine on a laptop, a simulated 1 s licensed feed, the measured network and the venue's 1 s hold. Shaded: when the book reprices. Source: paper Fig. 1, results/e2e/summary.json.</a:t>
             </a:r>
           </a:p>
         </p:txBody>
@@ -13347,7 +13347,7 @@
                 </a:solidFill>
                 <a:latin typeface="Inter"/>
               </a:rPr>
-              <a:t>vision on an L4 GPU (WebRTC frame to call 46 ms p50, 67 ms p99)</a:t>
+              <a:t>vision per frame on an L4 GPU, p50 (6.9 ms per emitted call; WebRTC frame to call 46 ms p50, 67 ms p99)</a:t>
             </a:r>
           </a:p>
         </p:txBody>
@@ -13759,7 +13759,7 @@
       </p:sp>
       <p:graphicFrame>
         <p:nvGraphicFramePr>
-          <p:cNvPr id="10" name="Latency scenarios (paper Table 1B)"/>
+          <p:cNvPr id="10" name="Latency scenarios (paper Table 2)"/>
           <p:cNvGraphicFramePr>
             <a:graphicFrameLocks noGrp="1"/>
           </p:cNvGraphicFramePr>
@@ -15917,8 +15917,8 @@
         </p:nvSpPr>
         <p:spPr>
           <a:xfrm>
-            <a:off x="6812280" y="5285232"/>
-            <a:ext cx="4465015" cy="438912"/>
+            <a:off x="6812280" y="5248656"/>
+            <a:ext cx="4465015" cy="512064"/>
           </a:xfrm>
           <a:prstGeom prst="rect">
             <a:avLst/>
@@ -15933,17 +15933,17 @@
           <a:p>
             <a:pPr algn="l">
               <a:lnSpc>
-                <a:spcPct val="110000"/>
+                <a:spcPct val="105000"/>
               </a:lnSpc>
             </a:pPr>
             <a:r>
-              <a:rPr sz="950" b="0" i="0">
+              <a:rPr sz="900" b="0" i="0">
                 <a:solidFill>
                   <a:srgbClr val="A1A1A6"/>
                 </a:solidFill>
                 <a:latin typeface="Inter"/>
               </a:rPr>
-              <a:t>Paper money, every v2 fill replayed. Its Sharpe counts trading days (199 / 40); the paper zero-fills calendar days (206 / 40): 14.5 / 6.7.</a:t>
+              <a:t>Paper money, every v2 fill replayed: Sharpe over trading days (199 / 40), max DD trade by trade. The paper uses calendar days (206 / 40) and daily P&amp;L: Sharpe 14.5 / 6.7, max DD −2.0% / −2.1%.</a:t>
             </a:r>
           </a:p>
         </p:txBody>
@@ -16237,7 +16237,7 @@
       </p:sp>
       <p:pic>
         <p:nvPicPr>
-          <p:cNvPr id="8" name="Fig: every test (paper Fig. A4)" descr="figA4_forest.png"/>
+          <p:cNvPr id="8" name="Fig: every test (results/paper/v2/figA4_forest.png (repo figure; the paper lists the same tests in Table A1))" descr="figA4_forest.png"/>
           <p:cNvPicPr>
             <a:picLocks noChangeAspect="1"/>
           </p:cNvPicPr>
@@ -16289,14 +16289,14 @@
                 </a:solidFill>
                 <a:latin typeface="Inter"/>
               </a:rPr>
-              <a:t>Every test on one axis; hollow = a held-out test. Source: paper Fig. A4.</a:t>
+              <a:t>Every test on one axis; hollow = a held-out test. Source: results/paper/v2/figA4_forest.png (repo figure; the paper lists the same tests in Table A1).</a:t>
             </a:r>
           </a:p>
         </p:txBody>
       </p:sp>
       <p:graphicFrame>
         <p:nvGraphicFramePr>
-          <p:cNvPr id="10" name="Robustness (paper Table 2)"/>
+          <p:cNvPr id="10" name="Robustness (paper Table A1)"/>
           <p:cNvGraphicFramePr>
             <a:graphicFrameLocks noGrp="1"/>
           </p:cNvGraphicFramePr>
@@ -16304,7 +16304,7 @@
         </p:nvGraphicFramePr>
         <p:xfrm>
           <a:off x="6217920" y="1481328"/>
-          <a:ext cx="5330952" cy="3255264"/>
+          <a:ext cx="5330952" cy="3328416"/>
         </p:xfrm>
         <a:graphic>
           <a:graphicData uri="http://schemas.openxmlformats.org/drawingml/2006/table">
@@ -16460,7 +16460,7 @@
                   </a:tcPr>
                 </a:tc>
               </a:tr>
-              <a:tr h="365760">
+              <a:tr h="347472">
                 <a:tc>
                   <a:txBody>
                     <a:bodyPr wrap="square"/>
@@ -16602,7 +16602,7 @@
                   </a:tcPr>
                 </a:tc>
               </a:tr>
-              <a:tr h="365760">
+              <a:tr h="347472">
                 <a:tc>
                   <a:txBody>
                     <a:bodyPr wrap="square"/>
@@ -16744,7 +16744,7 @@
                   </a:tcPr>
                 </a:tc>
               </a:tr>
-              <a:tr h="365760">
+              <a:tr h="347472">
                 <a:tc>
                   <a:txBody>
                     <a:bodyPr wrap="square"/>
@@ -16886,7 +16886,7 @@
                   </a:tcPr>
                 </a:tc>
               </a:tr>
-              <a:tr h="365760">
+              <a:tr h="347472">
                 <a:tc>
                   <a:txBody>
                     <a:bodyPr wrap="square"/>
@@ -17028,7 +17028,7 @@
                   </a:tcPr>
                 </a:tc>
               </a:tr>
-              <a:tr h="365760">
+              <a:tr h="347472">
                 <a:tc>
                   <a:txBody>
                     <a:bodyPr wrap="square"/>
@@ -17170,7 +17170,7 @@
                   </a:tcPr>
                 </a:tc>
               </a:tr>
-              <a:tr h="365760">
+              <a:tr h="347472">
                 <a:tc>
                   <a:txBody>
                     <a:bodyPr wrap="square"/>
@@ -17312,7 +17312,7 @@
                   </a:tcPr>
                 </a:tc>
               </a:tr>
-              <a:tr h="365760">
+              <a:tr h="347472">
                 <a:tc>
                   <a:txBody>
                     <a:bodyPr wrap="square"/>
@@ -17454,7 +17454,7 @@
                   </a:tcPr>
                 </a:tc>
               </a:tr>
-              <a:tr h="365760">
+              <a:tr h="566928">
                 <a:tc>
                   <a:txBody>
                     <a:bodyPr wrap="square"/>
@@ -17468,7 +17468,7 @@
                           </a:solidFill>
                           <a:latin typeface="Inter"/>
                         </a:rPr>
-                        <a:t>PBO · bootstrap P(SR ≤ 0)</a:t>
+                        <a:t>PBO · bootstrap P(SR ≤ 0) · deflated Sharpe OOS</a:t>
                       </a:r>
                     </a:p>
                   </a:txBody>
@@ -17501,7 +17501,7 @@
                           </a:solidFill>
                           <a:latin typeface="Inter"/>
                         </a:rPr>
-                        <a:t>15%</a:t>
+                        <a:t>15% · 0.0023</a:t>
                       </a:r>
                     </a:p>
                   </a:txBody>
@@ -17534,7 +17534,7 @@
                           </a:solidFill>
                           <a:latin typeface="Inter"/>
                         </a:rPr>
-                        <a:t>0.0023</a:t>
+                        <a:t>0.075</a:t>
                       </a:r>
                     </a:p>
                   </a:txBody>
@@ -17567,7 +17567,7 @@
                           </a:solidFill>
                           <a:latin typeface="Inter"/>
                         </a:rPr>
-                        <a:t>pass</a:t>
+                        <a:t>luck not ruled out OOS</a:t>
                       </a:r>
                     </a:p>
                   </a:txBody>
@@ -17600,12 +17600,12 @@
         </p:nvSpPr>
         <p:spPr>
           <a:xfrm>
-            <a:off x="6217920" y="4873752"/>
-            <a:ext cx="5333695" cy="457200"/>
+            <a:off x="6217920" y="4864608"/>
+            <a:ext cx="5333695" cy="493776"/>
           </a:xfrm>
           <a:prstGeom prst="roundRect">
             <a:avLst>
-              <a:gd name="adj" fmla="val 16000"/>
+              <a:gd name="adj" fmla="val 14814"/>
             </a:avLst>
           </a:prstGeom>
           <a:solidFill>
@@ -17646,8 +17646,8 @@
         </p:nvSpPr>
         <p:spPr>
           <a:xfrm>
-            <a:off x="6382512" y="4873752"/>
-            <a:ext cx="5004511" cy="457200"/>
+            <a:off x="6382512" y="4864608"/>
+            <a:ext cx="5004511" cy="493776"/>
           </a:xfrm>
           <a:prstGeom prst="rect">
             <a:avLst/>
@@ -17656,71 +17656,75 @@
         </p:spPr>
         <p:txBody>
           <a:bodyPr wrap="square" anchor="ctr" lIns="0" tIns="0" rIns="0" bIns="0">
-            <a:noAutofit/>
-          </a:bodyPr>
-          <a:lstStyle/>
-          <a:p>
-            <a:pPr algn="l"/>
-            <a:r>
-              <a:rPr sz="1200" b="1" i="0">
-                <a:solidFill>
-                  <a:srgbClr val="1D1D1F"/>
-                </a:solidFill>
-                <a:latin typeface="Inter"/>
-              </a:rPr>
-              <a:t>Blind forward test: runs 2026-10-04 11:30 UTC (pre-registered)</a:t>
-            </a:r>
-          </a:p>
-        </p:txBody>
-      </p:sp>
-      <p:sp>
-        <p:nvSpPr>
-          <p:cNvPr id="13" name="Rigor tally"/>
-          <p:cNvSpPr txBox="1"/>
-          <p:nvPr/>
-        </p:nvSpPr>
-        <p:spPr>
-          <a:xfrm>
-            <a:off x="6217920" y="5440680"/>
-            <a:ext cx="5333695" cy="868680"/>
-          </a:xfrm>
-          <a:prstGeom prst="rect">
-            <a:avLst/>
-          </a:prstGeom>
-          <a:noFill/>
-        </p:spPr>
-        <p:txBody>
-          <a:bodyPr wrap="square" anchor="t" lIns="0" tIns="0" rIns="0" bIns="0">
             <a:noAutofit/>
           </a:bodyPr>
           <a:lstStyle/>
           <a:p>
             <a:pPr algn="l">
               <a:lnSpc>
-                <a:spcPct val="110000"/>
+                <a:spcPct val="105000"/>
+              </a:lnSpc>
+            </a:pPr>
+            <a:r>
+              <a:rPr sz="1150" b="1" i="0">
+                <a:solidFill>
+                  <a:srgbClr val="1D1D1F"/>
+                </a:solidFill>
+                <a:latin typeface="Inter"/>
+              </a:rPr>
+              <a:t>Blind forward test: pre-registered but not run within the hackathon window (HYPOTHESIS_V2.md A5)</a:t>
+            </a:r>
+          </a:p>
+        </p:txBody>
+      </p:sp>
+      <p:sp>
+        <p:nvSpPr>
+          <p:cNvPr id="13" name="Rigor tally"/>
+          <p:cNvSpPr txBox="1"/>
+          <p:nvPr/>
+        </p:nvSpPr>
+        <p:spPr>
+          <a:xfrm>
+            <a:off x="6217920" y="5431536"/>
+            <a:ext cx="5333695" cy="896112"/>
+          </a:xfrm>
+          <a:prstGeom prst="rect">
+            <a:avLst/>
+          </a:prstGeom>
+          <a:noFill/>
+        </p:spPr>
+        <p:txBody>
+          <a:bodyPr wrap="square" anchor="t" lIns="0" tIns="0" rIns="0" bIns="0">
+            <a:noAutofit/>
+          </a:bodyPr>
+          <a:lstStyle/>
+          <a:p>
+            <a:pPr algn="l">
+              <a:lnSpc>
+                <a:spcPct val="105000"/>
               </a:lnSpc>
               <a:spcAft>
                 <a:spcPts val="300"/>
               </a:spcAft>
             </a:pPr>
             <a:r>
-              <a:rPr sz="1100" b="0" i="0">
+              <a:rPr sz="1050" b="0" i="0">
                 <a:solidFill>
                   <a:srgbClr val="1D1D1F"/>
                 </a:solidFill>
                 <a:latin typeface="Inter"/>
               </a:rPr>
-              <a:t>4,219 variants tried; held-out data read 77 times, every look logged; rules changed after a look: 2 for v2.</a:t>
+              <a:t>4,219 variants in all; 3,410 strategy variants (the video's count); 3,386 in the deflated Sharpe. Held-out data read 77 times, every look logged; rules changed after a look: 2 for v2.</a:t>
             </a:r>
           </a:p>
           <a:p>
             <a:pPr algn="l">
               <a:lnSpc>
-                <a:spcPct val="110000"/>
+                <a:spcPct val="105000"/>
               </a:lnSpc>
             </a:pPr>
             <a:r>
-              <a:rPr sz="1050" b="0" i="0">
+              <a:rPr sz="1000" b="0" i="0">
                 <a:solidFill>
                   <a:srgbClr val="6E6E73"/>
                 </a:solidFill>
